--- a/docs/presentation.pptx
+++ b/docs/presentation.pptx
@@ -1,29 +1,29 @@
 
 <file path=ppt/presentation.xml><?xml version="1.0" encoding="utf-8"?>
-<p:presentation xmlns:a="http://schemas.openxmlformats.org/drawingml/2006/main" xmlns:r="http://schemas.openxmlformats.org/officeDocument/2006/relationships" xmlns:p="http://schemas.openxmlformats.org/presentationml/2006/main" xmlns:m="http://schemas.openxmlformats.org/officeDocument/2006/math" xmlns:w="http://schemas.openxmlformats.org/wordprocessingml/2006/main" autoCompressPictures="0" saveSubsetFonts="1">
+<p:presentation xmlns:a="http://schemas.openxmlformats.org/drawingml/2006/main" xmlns:r="http://schemas.openxmlformats.org/officeDocument/2006/relationships" xmlns:p="http://schemas.openxmlformats.org/presentationml/2006/main" saveSubsetFonts="1" autoCompressPictures="0">
   <p:sldMasterIdLst>
     <p:sldMasterId id="2147483648" r:id="rId1"/>
   </p:sldMasterIdLst>
+  <p:sldIdLst>
+    <p:sldId id="256" r:id="rId2"/>
+    <p:sldId id="257" r:id="rId3"/>
+    <p:sldId id="258" r:id="rId4"/>
+    <p:sldId id="259" r:id="rId5"/>
+    <p:sldId id="260" r:id="rId6"/>
+    <p:sldId id="261" r:id="rId7"/>
+    <p:sldId id="262" r:id="rId8"/>
+    <p:sldId id="263" r:id="rId9"/>
+    <p:sldId id="264" r:id="rId10"/>
+    <p:sldId id="265" r:id="rId11"/>
+  </p:sldIdLst>
   <p:notesMasterIdLst>
-    <p:notesMasterId r:id="rId13"/>
+    <p:notesMasterId r:id="rId12"/>
   </p:notesMasterIdLst>
-  <p:sldIdLst>
-    <p:sldId id="256" r:id="rId3"/>
-    <p:sldId id="257" r:id="rId4"/>
-    <p:sldId id="258" r:id="rId5"/>
-    <p:sldId id="259" r:id="rId6"/>
-    <p:sldId id="260" r:id="rId7"/>
-    <p:sldId id="261" r:id="rId8"/>
-    <p:sldId id="262" r:id="rId9"/>
-    <p:sldId id="263" r:id="rId10"/>
-    <p:sldId id="264" r:id="rId11"/>
-    <p:sldId id="265" r:id="rId12"/>
-  </p:sldIdLst>
   <p:sldSz cx="9144000" cy="5143500"/>
   <p:notesSz cx="5143500" cy="9144000"/>
   <p:defaultTextStyle>
-    <a:lvl1pPr marL="0" algn="l" defTabSz="914400">
-      <a:defRPr sz="1800">
+    <a:lvl1pPr marL="0" algn="l" defTabSz="914400" rtl="0" eaLnBrk="1" latinLnBrk="0" hangingPunct="1">
+      <a:defRPr sz="1800" kern="1200">
         <a:solidFill>
           <a:schemeClr val="tx1"/>
         </a:solidFill>
@@ -32,8 +32,8 @@
         <a:cs typeface="+mn-cs"/>
       </a:defRPr>
     </a:lvl1pPr>
-    <a:lvl2pPr marL="457200" algn="l" defTabSz="914400">
-      <a:defRPr sz="1800">
+    <a:lvl2pPr marL="457200" algn="l" defTabSz="914400" rtl="0" eaLnBrk="1" latinLnBrk="0" hangingPunct="1">
+      <a:defRPr sz="1800" kern="1200">
         <a:solidFill>
           <a:schemeClr val="tx1"/>
         </a:solidFill>
@@ -42,8 +42,8 @@
         <a:cs typeface="+mn-cs"/>
       </a:defRPr>
     </a:lvl2pPr>
-    <a:lvl3pPr marL="914400" algn="l" defTabSz="914400">
-      <a:defRPr sz="1800">
+    <a:lvl3pPr marL="914400" algn="l" defTabSz="914400" rtl="0" eaLnBrk="1" latinLnBrk="0" hangingPunct="1">
+      <a:defRPr sz="1800" kern="1200">
         <a:solidFill>
           <a:schemeClr val="tx1"/>
         </a:solidFill>
@@ -52,8 +52,8 @@
         <a:cs typeface="+mn-cs"/>
       </a:defRPr>
     </a:lvl3pPr>
-    <a:lvl4pPr marL="1371600" algn="l" defTabSz="914400">
-      <a:defRPr sz="1800">
+    <a:lvl4pPr marL="1371600" algn="l" defTabSz="914400" rtl="0" eaLnBrk="1" latinLnBrk="0" hangingPunct="1">
+      <a:defRPr sz="1800" kern="1200">
         <a:solidFill>
           <a:schemeClr val="tx1"/>
         </a:solidFill>
@@ -62,8 +62,8 @@
         <a:cs typeface="+mn-cs"/>
       </a:defRPr>
     </a:lvl4pPr>
-    <a:lvl5pPr marL="1828800" algn="l" defTabSz="914400">
-      <a:defRPr sz="1800">
+    <a:lvl5pPr marL="1828800" algn="l" defTabSz="914400" rtl="0" eaLnBrk="1" latinLnBrk="0" hangingPunct="1">
+      <a:defRPr sz="1800" kern="1200">
         <a:solidFill>
           <a:schemeClr val="tx1"/>
         </a:solidFill>
@@ -72,8 +72,8 @@
         <a:cs typeface="+mn-cs"/>
       </a:defRPr>
     </a:lvl5pPr>
-    <a:lvl6pPr marL="2286000" algn="l" defTabSz="914400">
-      <a:defRPr sz="1800">
+    <a:lvl6pPr marL="2286000" algn="l" defTabSz="914400" rtl="0" eaLnBrk="1" latinLnBrk="0" hangingPunct="1">
+      <a:defRPr sz="1800" kern="1200">
         <a:solidFill>
           <a:schemeClr val="tx1"/>
         </a:solidFill>
@@ -82,8 +82,8 @@
         <a:cs typeface="+mn-cs"/>
       </a:defRPr>
     </a:lvl6pPr>
-    <a:lvl7pPr marL="2743200" algn="l" defTabSz="914400">
-      <a:defRPr sz="1800">
+    <a:lvl7pPr marL="2743200" algn="l" defTabSz="914400" rtl="0" eaLnBrk="1" latinLnBrk="0" hangingPunct="1">
+      <a:defRPr sz="1800" kern="1200">
         <a:solidFill>
           <a:schemeClr val="tx1"/>
         </a:solidFill>
@@ -92,8 +92,8 @@
         <a:cs typeface="+mn-cs"/>
       </a:defRPr>
     </a:lvl7pPr>
-    <a:lvl8pPr marL="3200400" algn="l" defTabSz="914400">
-      <a:defRPr sz="1800">
+    <a:lvl8pPr marL="3200400" algn="l" defTabSz="914400" rtl="0" eaLnBrk="1" latinLnBrk="0" hangingPunct="1">
+      <a:defRPr sz="1800" kern="1200">
         <a:solidFill>
           <a:schemeClr val="tx1"/>
         </a:solidFill>
@@ -102,8 +102,8 @@
         <a:cs typeface="+mn-cs"/>
       </a:defRPr>
     </a:lvl8pPr>
-    <a:lvl9pPr marL="3657600" algn="l" defTabSz="914400">
-      <a:defRPr sz="1800">
+    <a:lvl9pPr marL="3657600" algn="l" defTabSz="914400" rtl="0" eaLnBrk="1" latinLnBrk="0" hangingPunct="1">
+      <a:defRPr sz="1800" kern="1200">
         <a:solidFill>
           <a:schemeClr val="tx1"/>
         </a:solidFill>
@@ -113,21 +113,48 @@
       </a:defRPr>
     </a:lvl9pPr>
   </p:defaultTextStyle>
+  <p:extLst>
+    <p:ext uri="{521415D9-36F7-43E2-AB2F-B90AF26B5E84}">
+      <p14:sectionLst xmlns:p14="http://schemas.microsoft.com/office/powerpoint/2010/main">
+        <p14:section name="Введение" id="{727f4a03-ce9f-df6c-b71c-2248ea31c692}">
+          <p14:sldIdLst>
+            <p14:sldId id="256"/>
+            <p14:sldId id="257"/>
+          </p14:sldIdLst>
+        </p14:section>
+        <p14:section name="Решение" id="{b7497e15-fe10-3651-7df5-a45244bea286}">
+          <p14:sldIdLst>
+            <p14:sldId id="258"/>
+            <p14:sldId id="259"/>
+          </p14:sldIdLst>
+        </p14:section>
+        <p14:section name="Эксперимент" id="{c396164d-b822-e0b0-30a1-9a860fa76222}">
+          <p14:sldIdLst>
+            <p14:sldId id="260"/>
+            <p14:sldId id="261"/>
+            <p14:sldId id="262"/>
+          </p14:sldIdLst>
+        </p14:section>
+        <p14:section name="Итоги" id="{e09a1bf3-2d1e-67ab-d59f-ea757010b865}">
+          <p14:sldIdLst>
+            <p14:sldId id="263"/>
+            <p14:sldId id="264"/>
+            <p14:sldId id="265"/>
+          </p14:sldIdLst>
+        </p14:section>
+      </p14:sectionLst>
+    </p:ext>
+    <p:ext uri="{EFAFB233-063F-42B5-8137-9DF3F51BA10A}">
+      <p15:sldGuideLst xmlns:p15="http://schemas.microsoft.com/office/powerpoint/2012/main"/>
+    </p:ext>
+  </p:extLst>
 </p:presentation>
 </file>
 
 <file path=ppt/charts/chart1.xml><?xml version="1.0" encoding="utf-8"?>
-<c:chartSpace xmlns:c="http://schemas.openxmlformats.org/drawingml/2006/chart" xmlns:a="http://schemas.openxmlformats.org/drawingml/2006/main" xmlns:r="http://schemas.openxmlformats.org/officeDocument/2006/relationships" xmlns:mc="http://schemas.openxmlformats.org/markup-compatibility/2006" xmlns:c15="http://schemas.microsoft.com/office/drawing/2012/chart" xmlns:c14="http://schemas.microsoft.com/office/drawing/2007/8/2/chart" xmlns:c16r2="http://schemas.microsoft.com/office/drawing/2015/06/chart">
+<c:chartSpace xmlns:c="http://schemas.openxmlformats.org/drawingml/2006/chart" xmlns:a="http://schemas.openxmlformats.org/drawingml/2006/main" xmlns:r="http://schemas.openxmlformats.org/officeDocument/2006/relationships">
   <c:date1904 val="0"/>
   <c:roundedCorners val="1"/>
-  <mc:AlternateContent>
-    <mc:Choice Requires="c14">
-      <c14:style val="102"/>
-    </mc:Choice>
-    <mc:Fallback>
-      <c:style val="2"/>
-    </mc:Fallback>
-  </mc:AlternateContent>
   <c:chart>
     <c:title>
       <c:tx>
@@ -152,7 +179,6 @@
               </a:rPr>
               <a:t>Ошибки в словах (WER), % — меньше лучше</a:t>
             </a:r>
-            <a:endParaRPr/>
           </a:p>
         </c:rich>
       </c:tx>
@@ -180,24 +206,42 @@
               </c:strCache>
             </c:strRef>
           </c:tx>
-          <c:spPr bwMode="auto">
-            <a:prstGeom prst="rect">
-              <a:avLst/>
-            </a:prstGeom>
+          <c:spPr>
             <a:solidFill>
               <a:srgbClr val="E4572E"/>
             </a:solidFill>
             <a:effectLst/>
           </c:spPr>
           <c:invertIfNegative val="0"/>
+          <c:dLbls>
+            <c:numFmt formatCode="0.0" sourceLinked="0"/>
+            <c:txPr>
+              <a:bodyPr/>
+              <a:lstStyle/>
+              <a:p>
+                <a:pPr>
+                  <a:defRPr b="0" i="0" strike="noStrike" sz="1200" u="none">
+                    <a:solidFill>
+                      <a:srgbClr val="1B1F3B"/>
+                    </a:solidFill>
+                    <a:latin typeface="+mn-lt"/>
+                  </a:defRPr>
+                </a:pPr>
+              </a:p>
+            </c:txPr>
+            <c:showLegendKey val="0"/>
+            <c:showVal val="1"/>
+            <c:showCatName val="0"/>
+            <c:showSerName val="0"/>
+            <c:showPercent val="0"/>
+            <c:showBubbleSize val="0"/>
+            <c:showLeaderLines val="0"/>
+          </c:dLbls>
           <c:dPt>
             <c:idx val="0"/>
             <c:invertIfNegative val="0"/>
             <c:bubble3D val="0"/>
-            <c:spPr bwMode="auto">
-              <a:prstGeom prst="rect">
-                <a:avLst/>
-              </a:prstGeom>
+            <c:spPr>
               <a:solidFill>
                 <a:srgbClr val="E4572E"/>
               </a:solidFill>
@@ -208,10 +252,7 @@
             <c:idx val="1"/>
             <c:invertIfNegative val="0"/>
             <c:bubble3D val="0"/>
-            <c:spPr bwMode="auto">
-              <a:prstGeom prst="rect">
-                <a:avLst/>
-              </a:prstGeom>
+            <c:spPr>
               <a:solidFill>
                 <a:srgbClr val="6C7AE0"/>
               </a:solidFill>
@@ -222,10 +263,7 @@
             <c:idx val="2"/>
             <c:invertIfNegative val="0"/>
             <c:bubble3D val="0"/>
-            <c:spPr bwMode="auto">
-              <a:prstGeom prst="rect">
-                <a:avLst/>
-              </a:prstGeom>
+            <c:spPr>
               <a:solidFill>
                 <a:srgbClr val="9AA0C4"/>
               </a:solidFill>
@@ -236,41 +274,13 @@
             <c:idx val="3"/>
             <c:invertIfNegative val="0"/>
             <c:bubble3D val="0"/>
-            <c:spPr bwMode="auto">
-              <a:prstGeom prst="rect">
-                <a:avLst/>
-              </a:prstGeom>
+            <c:spPr>
               <a:solidFill>
                 <a:srgbClr val="2BB3A3"/>
               </a:solidFill>
               <a:effectLst/>
             </c:spPr>
           </c:dPt>
-          <c:dLbls>
-            <c:numFmt formatCode="0.0" sourceLinked="0"/>
-            <c:showBubbleSize val="0"/>
-            <c:showCatName val="0"/>
-            <c:showLeaderLines val="0"/>
-            <c:showLegendKey val="0"/>
-            <c:showPercent val="0"/>
-            <c:showSerName val="0"/>
-            <c:showVal val="1"/>
-            <c:txPr>
-              <a:bodyPr/>
-              <a:lstStyle/>
-              <a:p>
-                <a:pPr>
-                  <a:defRPr sz="1200" b="0" i="0" u="none" strike="noStrike">
-                    <a:solidFill>
-                      <a:srgbClr val="1B1F3B"/>
-                    </a:solidFill>
-                    <a:latin typeface="+mn-lt"/>
-                  </a:defRPr>
-                </a:pPr>
-                <a:endParaRPr/>
-              </a:p>
-            </c:txPr>
-          </c:dLbls>
           <c:cat>
             <c:multiLvlStrRef>
               <c:f>Sheet1!$A$2:$A$5</c:f>
@@ -303,13 +313,13 @@
                   <c:v>12.5</c:v>
                 </c:pt>
                 <c:pt idx="1">
-                  <c:v>2.5</c:v>
+                  <c:v>1.8</c:v>
                 </c:pt>
                 <c:pt idx="2">
                   <c:v>3.6</c:v>
                 </c:pt>
                 <c:pt idx="3">
-                  <c:v>1.1</c:v>
+                  <c:v>0.4</c:v>
                 </c:pt>
               </c:numCache>
             </c:numRef>
@@ -317,33 +327,33 @@
         </c:ser>
         <c:dLbls>
           <c:numFmt formatCode="0.0" sourceLinked="0"/>
-          <c:showBubbleSize val="0"/>
-          <c:showCatName val="0"/>
-          <c:showLeaderLines val="0"/>
-          <c:showLegendKey val="0"/>
-          <c:showPercent val="0"/>
-          <c:showSerName val="0"/>
-          <c:showVal val="1"/>
           <c:txPr>
             <a:bodyPr/>
             <a:lstStyle/>
             <a:p>
               <a:pPr>
-                <a:defRPr sz="1200" b="0" i="0" u="none" strike="noStrike">
+                <a:defRPr b="0" i="0" strike="noStrike" sz="1200" u="none">
                   <a:solidFill>
                     <a:srgbClr val="1B1F3B"/>
                   </a:solidFill>
                   <a:latin typeface="+mn-lt"/>
                 </a:defRPr>
               </a:pPr>
-              <a:endParaRPr/>
             </a:p>
           </c:txPr>
+          <c:showLegendKey val="0"/>
+          <c:showVal val="1"/>
+          <c:showCatName val="0"/>
+          <c:showSerName val="0"/>
+          <c:showPercent val="0"/>
+          <c:showBubbleSize val="0"/>
+          <c:showLeaderLines val="0"/>
         </c:dLbls>
         <c:gapWidth val="60"/>
         <c:overlap val="0"/>
         <c:axId val="2094734554"/>
         <c:axId val="2094734552"/>
+        <c:axId val="2094734556"/>
       </c:barChart>
       <c:catAx>
         <c:axId val="2094734554"/>
@@ -356,10 +366,7 @@
         <c:majorTickMark val="out"/>
         <c:minorTickMark val="none"/>
         <c:tickLblPos val="low"/>
-        <c:spPr bwMode="auto">
-          <a:prstGeom prst="rect">
-            <a:avLst/>
-          </a:prstGeom>
+        <c:spPr>
           <a:ln w="12700" cap="flat">
             <a:solidFill>
               <a:srgbClr val="888888"/>
@@ -393,16 +400,13 @@
         <c:axId val="2094734552"/>
         <c:scaling>
           <c:orientation val="minMax"/>
-          <c:max val="15.000000"/>
-          <c:min val="0.000000"/>
+          <c:max val="15"/>
+          <c:min val="0"/>
         </c:scaling>
         <c:delete val="0"/>
         <c:axPos val="l"/>
         <c:majorGridlines>
-          <c:spPr bwMode="auto">
-            <a:prstGeom prst="rect">
-              <a:avLst/>
-            </a:prstGeom>
+          <c:spPr>
             <a:ln w="6350" cap="flat">
               <a:solidFill>
                 <a:srgbClr val="E0E3F0"/>
@@ -416,10 +420,7 @@
         <c:majorTickMark val="out"/>
         <c:minorTickMark val="none"/>
         <c:tickLblPos val="nextTo"/>
-        <c:spPr bwMode="auto">
-          <a:prstGeom prst="rect">
-            <a:avLst/>
-          </a:prstGeom>
+        <c:spPr>
           <a:ln w="12700" cap="flat">
             <a:solidFill>
               <a:srgbClr val="888888"/>
@@ -446,12 +447,9 @@
         <c:crossAx val="2094734554"/>
         <c:crosses val="autoZero"/>
         <c:crossBetween val="between"/>
-        <c:majorUnit val="5.000000"/>
+        <c:majorUnit val="5"/>
       </c:valAx>
-      <c:spPr bwMode="auto">
-        <a:prstGeom prst="rect">
-          <a:avLst/>
-        </a:prstGeom>
+      <c:spPr>
         <a:noFill/>
         <a:ln>
           <a:noFill/>
@@ -461,16 +459,8 @@
     </c:plotArea>
     <c:plotVisOnly val="1"/>
     <c:dispBlanksAs val="span"/>
-    <c:showDLblsOverMax val="0"/>
   </c:chart>
-  <c:spPr bwMode="auto">
-    <a:xfrm>
-      <a:off x="548640" y="1325880"/>
-      <a:ext cx="3931920" cy="2926080"/>
-    </a:xfrm>
-    <a:prstGeom prst="rect">
-      <a:avLst/>
-    </a:prstGeom>
+  <c:spPr>
     <a:noFill/>
     <a:ln>
       <a:noFill/>
@@ -484,17 +474,9 @@
 </file>
 
 <file path=ppt/charts/chart2.xml><?xml version="1.0" encoding="utf-8"?>
-<c:chartSpace xmlns:c="http://schemas.openxmlformats.org/drawingml/2006/chart" xmlns:a="http://schemas.openxmlformats.org/drawingml/2006/main" xmlns:r="http://schemas.openxmlformats.org/officeDocument/2006/relationships" xmlns:mc="http://schemas.openxmlformats.org/markup-compatibility/2006" xmlns:c15="http://schemas.microsoft.com/office/drawing/2012/chart" xmlns:c14="http://schemas.microsoft.com/office/drawing/2007/8/2/chart" xmlns:c16r2="http://schemas.microsoft.com/office/drawing/2015/06/chart">
+<c:chartSpace xmlns:c="http://schemas.openxmlformats.org/drawingml/2006/chart" xmlns:a="http://schemas.openxmlformats.org/drawingml/2006/main" xmlns:r="http://schemas.openxmlformats.org/officeDocument/2006/relationships">
   <c:date1904 val="0"/>
   <c:roundedCorners val="1"/>
-  <mc:AlternateContent>
-    <mc:Choice Requires="c14">
-      <c14:style val="102"/>
-    </mc:Choice>
-    <mc:Fallback>
-      <c:style val="2"/>
-    </mc:Fallback>
-  </mc:AlternateContent>
   <c:chart>
     <c:title>
       <c:tx>
@@ -519,7 +501,6 @@
               </a:rPr>
               <a:t>Естественность на слух, 1–5 — больше лучше</a:t>
             </a:r>
-            <a:endParaRPr/>
           </a:p>
         </c:rich>
       </c:tx>
@@ -547,24 +528,42 @@
               </c:strCache>
             </c:strRef>
           </c:tx>
-          <c:spPr bwMode="auto">
-            <a:prstGeom prst="rect">
-              <a:avLst/>
-            </a:prstGeom>
+          <c:spPr>
             <a:solidFill>
               <a:srgbClr val="E4572E"/>
             </a:solidFill>
             <a:effectLst/>
           </c:spPr>
           <c:invertIfNegative val="0"/>
+          <c:dLbls>
+            <c:numFmt formatCode="0.0" sourceLinked="0"/>
+            <c:txPr>
+              <a:bodyPr/>
+              <a:lstStyle/>
+              <a:p>
+                <a:pPr>
+                  <a:defRPr b="0" i="0" strike="noStrike" sz="1200" u="none">
+                    <a:solidFill>
+                      <a:srgbClr val="1B1F3B"/>
+                    </a:solidFill>
+                    <a:latin typeface="+mn-lt"/>
+                  </a:defRPr>
+                </a:pPr>
+              </a:p>
+            </c:txPr>
+            <c:showLegendKey val="0"/>
+            <c:showVal val="1"/>
+            <c:showCatName val="0"/>
+            <c:showSerName val="0"/>
+            <c:showPercent val="0"/>
+            <c:showBubbleSize val="0"/>
+            <c:showLeaderLines val="0"/>
+          </c:dLbls>
           <c:dPt>
             <c:idx val="0"/>
             <c:invertIfNegative val="0"/>
             <c:bubble3D val="0"/>
-            <c:spPr bwMode="auto">
-              <a:prstGeom prst="rect">
-                <a:avLst/>
-              </a:prstGeom>
+            <c:spPr>
               <a:solidFill>
                 <a:srgbClr val="E4572E"/>
               </a:solidFill>
@@ -575,10 +574,7 @@
             <c:idx val="1"/>
             <c:invertIfNegative val="0"/>
             <c:bubble3D val="0"/>
-            <c:spPr bwMode="auto">
-              <a:prstGeom prst="rect">
-                <a:avLst/>
-              </a:prstGeom>
+            <c:spPr>
               <a:solidFill>
                 <a:srgbClr val="6C7AE0"/>
               </a:solidFill>
@@ -589,10 +585,7 @@
             <c:idx val="2"/>
             <c:invertIfNegative val="0"/>
             <c:bubble3D val="0"/>
-            <c:spPr bwMode="auto">
-              <a:prstGeom prst="rect">
-                <a:avLst/>
-              </a:prstGeom>
+            <c:spPr>
               <a:solidFill>
                 <a:srgbClr val="9AA0C4"/>
               </a:solidFill>
@@ -603,41 +596,13 @@
             <c:idx val="3"/>
             <c:invertIfNegative val="0"/>
             <c:bubble3D val="0"/>
-            <c:spPr bwMode="auto">
-              <a:prstGeom prst="rect">
-                <a:avLst/>
-              </a:prstGeom>
+            <c:spPr>
               <a:solidFill>
                 <a:srgbClr val="2BB3A3"/>
               </a:solidFill>
               <a:effectLst/>
             </c:spPr>
           </c:dPt>
-          <c:dLbls>
-            <c:numFmt formatCode="0.0" sourceLinked="0"/>
-            <c:showBubbleSize val="0"/>
-            <c:showCatName val="0"/>
-            <c:showLeaderLines val="0"/>
-            <c:showLegendKey val="0"/>
-            <c:showPercent val="0"/>
-            <c:showSerName val="0"/>
-            <c:showVal val="1"/>
-            <c:txPr>
-              <a:bodyPr/>
-              <a:lstStyle/>
-              <a:p>
-                <a:pPr>
-                  <a:defRPr sz="1200" b="0" i="0" u="none" strike="noStrike">
-                    <a:solidFill>
-                      <a:srgbClr val="1B1F3B"/>
-                    </a:solidFill>
-                    <a:latin typeface="+mn-lt"/>
-                  </a:defRPr>
-                </a:pPr>
-                <a:endParaRPr/>
-              </a:p>
-            </c:txPr>
-          </c:dLbls>
           <c:cat>
             <c:multiLvlStrRef>
               <c:f>Sheet1!$A$2:$A$5</c:f>
@@ -684,33 +649,33 @@
         </c:ser>
         <c:dLbls>
           <c:numFmt formatCode="0.0" sourceLinked="0"/>
-          <c:showBubbleSize val="0"/>
-          <c:showCatName val="0"/>
-          <c:showLeaderLines val="0"/>
-          <c:showLegendKey val="0"/>
-          <c:showPercent val="0"/>
-          <c:showSerName val="0"/>
-          <c:showVal val="1"/>
           <c:txPr>
             <a:bodyPr/>
             <a:lstStyle/>
             <a:p>
               <a:pPr>
-                <a:defRPr sz="1200" b="0" i="0" u="none" strike="noStrike">
+                <a:defRPr b="0" i="0" strike="noStrike" sz="1200" u="none">
                   <a:solidFill>
                     <a:srgbClr val="1B1F3B"/>
                   </a:solidFill>
                   <a:latin typeface="+mn-lt"/>
                 </a:defRPr>
               </a:pPr>
-              <a:endParaRPr/>
             </a:p>
           </c:txPr>
+          <c:showLegendKey val="0"/>
+          <c:showVal val="1"/>
+          <c:showCatName val="0"/>
+          <c:showSerName val="0"/>
+          <c:showPercent val="0"/>
+          <c:showBubbleSize val="0"/>
+          <c:showLeaderLines val="0"/>
         </c:dLbls>
         <c:gapWidth val="60"/>
         <c:overlap val="0"/>
         <c:axId val="2094734554"/>
         <c:axId val="2094734552"/>
+        <c:axId val="2094734556"/>
       </c:barChart>
       <c:catAx>
         <c:axId val="2094734554"/>
@@ -723,10 +688,7 @@
         <c:majorTickMark val="out"/>
         <c:minorTickMark val="none"/>
         <c:tickLblPos val="low"/>
-        <c:spPr bwMode="auto">
-          <a:prstGeom prst="rect">
-            <a:avLst/>
-          </a:prstGeom>
+        <c:spPr>
           <a:ln w="12700" cap="flat">
             <a:solidFill>
               <a:srgbClr val="888888"/>
@@ -760,16 +722,13 @@
         <c:axId val="2094734552"/>
         <c:scaling>
           <c:orientation val="minMax"/>
-          <c:max val="6.000000"/>
-          <c:min val="0.000000"/>
+          <c:max val="6"/>
+          <c:min val="0"/>
         </c:scaling>
         <c:delete val="0"/>
         <c:axPos val="l"/>
         <c:majorGridlines>
-          <c:spPr bwMode="auto">
-            <a:prstGeom prst="rect">
-              <a:avLst/>
-            </a:prstGeom>
+          <c:spPr>
             <a:ln w="6350" cap="flat">
               <a:solidFill>
                 <a:srgbClr val="E0E3F0"/>
@@ -783,10 +742,7 @@
         <c:majorTickMark val="out"/>
         <c:minorTickMark val="none"/>
         <c:tickLblPos val="nextTo"/>
-        <c:spPr bwMode="auto">
-          <a:prstGeom prst="rect">
-            <a:avLst/>
-          </a:prstGeom>
+        <c:spPr>
           <a:ln w="12700" cap="flat">
             <a:solidFill>
               <a:srgbClr val="888888"/>
@@ -814,10 +770,7 @@
         <c:crosses val="autoZero"/>
         <c:crossBetween val="between"/>
       </c:valAx>
-      <c:spPr bwMode="auto">
-        <a:prstGeom prst="rect">
-          <a:avLst/>
-        </a:prstGeom>
+      <c:spPr>
         <a:noFill/>
         <a:ln>
           <a:noFill/>
@@ -827,16 +780,8 @@
     </c:plotArea>
     <c:plotVisOnly val="1"/>
     <c:dispBlanksAs val="span"/>
-    <c:showDLblsOverMax val="0"/>
   </c:chart>
-  <c:spPr bwMode="auto">
-    <a:xfrm>
-      <a:off x="4663440" y="1325880"/>
-      <a:ext cx="3931920" cy="2926080"/>
-    </a:xfrm>
-    <a:prstGeom prst="rect">
-      <a:avLst/>
-    </a:prstGeom>
+  <c:spPr>
     <a:noFill/>
     <a:ln>
       <a:noFill/>
@@ -851,7 +796,7 @@
 
 <file path=ppt/notesMasters/notesMaster1.xml><?xml version="1.0" encoding="utf-8"?>
 <p:notesMaster xmlns:a="http://schemas.openxmlformats.org/drawingml/2006/main" xmlns:r="http://schemas.openxmlformats.org/officeDocument/2006/relationships" xmlns:p="http://schemas.openxmlformats.org/presentationml/2006/main">
-  <p:cSld name="">
+  <p:cSld>
     <p:bg>
       <p:bgRef idx="1001">
         <a:schemeClr val="bg1"/>
@@ -863,7 +808,7 @@
         <p:cNvGrpSpPr/>
         <p:nvPr/>
       </p:nvGrpSpPr>
-      <p:grpSpPr bwMode="auto">
+      <p:grpSpPr>
         <a:xfrm>
           <a:off x="0" y="0"/>
           <a:ext cx="0" cy="0"/>
@@ -881,7 +826,7 @@
             <p:ph type="hdr" sz="quarter"/>
           </p:nvPr>
         </p:nvSpPr>
-        <p:spPr bwMode="auto">
+        <p:spPr>
           <a:xfrm>
             <a:off x="0" y="0"/>
             <a:ext cx="2971800" cy="458788"/>
@@ -898,9 +843,6 @@
             </a:lvl1pPr>
           </a:lstStyle>
           <a:p>
-            <a:pPr>
-              <a:defRPr/>
-            </a:pPr>
             <a:endParaRPr lang="en-US"/>
           </a:p>
         </p:txBody>
@@ -915,7 +857,7 @@
             <p:ph type="dt" idx="1"/>
           </p:nvPr>
         </p:nvSpPr>
-        <p:spPr bwMode="auto">
+        <p:spPr>
           <a:xfrm>
             <a:off x="3884613" y="0"/>
             <a:ext cx="2971800" cy="458788"/>
@@ -932,9 +874,6 @@
             </a:lvl1pPr>
           </a:lstStyle>
           <a:p>
-            <a:pPr>
-              <a:defRPr/>
-            </a:pPr>
             <a:fld id="{5282F153-3F37-0F45-9E97-73ACFA13230C}" type="datetimeFigureOut">
               <a:rPr lang="en-US"/>
               <a:t>7/23/19</a:t>
@@ -947,13 +886,13 @@
         <p:nvSpPr>
           <p:cNvPr id="4" name="Slide Image Placeholder 3"/>
           <p:cNvSpPr>
-            <a:spLocks noChangeAspect="1" noGrp="1" noRot="1"/>
+            <a:spLocks noGrp="1" noRot="1" noChangeAspect="1"/>
           </p:cNvSpPr>
           <p:nvPr>
             <p:ph type="sldImg" idx="2"/>
           </p:nvPr>
         </p:nvSpPr>
-        <p:spPr bwMode="auto">
+        <p:spPr>
           <a:xfrm>
             <a:off x="685800" y="1143000"/>
             <a:ext cx="5486400" cy="3086100"/>
@@ -972,9 +911,6 @@
           <a:bodyPr vert="horz" lIns="91440" tIns="45720" rIns="91440" bIns="45720" rtlCol="0" anchor="ctr"/>
           <a:lstStyle/>
           <a:p>
-            <a:pPr>
-              <a:defRPr/>
-            </a:pPr>
             <a:endParaRPr lang="en-US"/>
           </a:p>
         </p:txBody>
@@ -989,7 +925,7 @@
             <p:ph type="body" sz="quarter" idx="3"/>
           </p:nvPr>
         </p:nvSpPr>
-        <p:spPr bwMode="auto">
+        <p:spPr>
           <a:xfrm>
             <a:off x="685800" y="4400550"/>
             <a:ext cx="5486400" cy="3600450"/>
@@ -1002,54 +938,39 @@
           <a:bodyPr vert="horz" lIns="91440" tIns="45720" rIns="91440" bIns="45720" rtlCol="0"/>
           <a:lstStyle/>
           <a:p>
-            <a:pPr lvl="0">
-              <a:defRPr/>
-            </a:pPr>
+            <a:pPr lvl="0"/>
             <a:r>
               <a:rPr lang="en-US"/>
               <a:t>Click to edit Master text styles</a:t>
             </a:r>
-            <a:endParaRPr/>
-          </a:p>
-          <a:p>
-            <a:pPr lvl="1">
-              <a:defRPr/>
-            </a:pPr>
+          </a:p>
+          <a:p>
+            <a:pPr lvl="1"/>
             <a:r>
               <a:rPr lang="en-US"/>
               <a:t>Second level</a:t>
             </a:r>
-            <a:endParaRPr/>
-          </a:p>
-          <a:p>
-            <a:pPr lvl="2">
-              <a:defRPr/>
-            </a:pPr>
+          </a:p>
+          <a:p>
+            <a:pPr lvl="2"/>
             <a:r>
               <a:rPr lang="en-US"/>
               <a:t>Third level</a:t>
             </a:r>
-            <a:endParaRPr/>
-          </a:p>
-          <a:p>
-            <a:pPr lvl="3">
-              <a:defRPr/>
-            </a:pPr>
+          </a:p>
+          <a:p>
+            <a:pPr lvl="3"/>
             <a:r>
               <a:rPr lang="en-US"/>
               <a:t>Fourth level</a:t>
             </a:r>
-            <a:endParaRPr/>
-          </a:p>
-          <a:p>
-            <a:pPr lvl="4">
-              <a:defRPr/>
-            </a:pPr>
+          </a:p>
+          <a:p>
+            <a:pPr lvl="4"/>
             <a:r>
               <a:rPr lang="en-US"/>
               <a:t>Fifth level</a:t>
             </a:r>
-            <a:endParaRPr/>
           </a:p>
         </p:txBody>
       </p:sp>
@@ -1063,7 +984,7 @@
             <p:ph type="ftr" sz="quarter" idx="4"/>
           </p:nvPr>
         </p:nvSpPr>
-        <p:spPr bwMode="auto">
+        <p:spPr>
           <a:xfrm>
             <a:off x="0" y="8685213"/>
             <a:ext cx="2971800" cy="458787"/>
@@ -1080,9 +1001,6 @@
             </a:lvl1pPr>
           </a:lstStyle>
           <a:p>
-            <a:pPr>
-              <a:defRPr/>
-            </a:pPr>
             <a:endParaRPr lang="en-US"/>
           </a:p>
         </p:txBody>
@@ -1097,7 +1015,7 @@
             <p:ph type="sldNum" sz="quarter" idx="5"/>
           </p:nvPr>
         </p:nvSpPr>
-        <p:spPr bwMode="auto">
+        <p:spPr>
           <a:xfrm>
             <a:off x="3884613" y="8685213"/>
             <a:ext cx="2971800" cy="458787"/>
@@ -1114,9 +1032,6 @@
             </a:lvl1pPr>
           </a:lstStyle>
           <a:p>
-            <a:pPr>
-              <a:defRPr/>
-            </a:pPr>
             <a:fld id="{CE5E9CC1-C706-0F49-92D6-E571CC5EEA8F}" type="slidenum">
               <a:rPr lang="en-US"/>
               <a:t>‹#›</a:t>
@@ -1126,11 +1041,16 @@
         </p:txBody>
       </p:sp>
     </p:spTree>
+    <p:extLst>
+      <p:ext uri="{BB962C8B-B14F-4D97-AF65-F5344CB8AC3E}">
+        <p14:creationId xmlns:p14="http://schemas.microsoft.com/office/powerpoint/2010/main" val="1024086991"/>
+      </p:ext>
+    </p:extLst>
   </p:cSld>
   <p:clrMap bg1="lt1" tx1="dk1" bg2="lt2" tx2="dk2" accent1="accent1" accent2="accent2" accent3="accent3" accent4="accent4" accent5="accent5" accent6="accent6" hlink="hlink" folHlink="folHlink"/>
   <p:notesStyle>
-    <a:lvl1pPr marL="0" algn="l" defTabSz="914400">
-      <a:defRPr sz="1200">
+    <a:lvl1pPr marL="0" algn="l" defTabSz="914400" rtl="0" eaLnBrk="1" latinLnBrk="0" hangingPunct="1">
+      <a:defRPr sz="1200" kern="1200">
         <a:solidFill>
           <a:schemeClr val="tx1"/>
         </a:solidFill>
@@ -1139,8 +1059,8 @@
         <a:cs typeface="+mn-cs"/>
       </a:defRPr>
     </a:lvl1pPr>
-    <a:lvl2pPr marL="457200" algn="l" defTabSz="914400">
-      <a:defRPr sz="1200">
+    <a:lvl2pPr marL="457200" algn="l" defTabSz="914400" rtl="0" eaLnBrk="1" latinLnBrk="0" hangingPunct="1">
+      <a:defRPr sz="1200" kern="1200">
         <a:solidFill>
           <a:schemeClr val="tx1"/>
         </a:solidFill>
@@ -1149,8 +1069,8 @@
         <a:cs typeface="+mn-cs"/>
       </a:defRPr>
     </a:lvl2pPr>
-    <a:lvl3pPr marL="914400" algn="l" defTabSz="914400">
-      <a:defRPr sz="1200">
+    <a:lvl3pPr marL="914400" algn="l" defTabSz="914400" rtl="0" eaLnBrk="1" latinLnBrk="0" hangingPunct="1">
+      <a:defRPr sz="1200" kern="1200">
         <a:solidFill>
           <a:schemeClr val="tx1"/>
         </a:solidFill>
@@ -1159,8 +1079,8 @@
         <a:cs typeface="+mn-cs"/>
       </a:defRPr>
     </a:lvl3pPr>
-    <a:lvl4pPr marL="1371600" algn="l" defTabSz="914400">
-      <a:defRPr sz="1200">
+    <a:lvl4pPr marL="1371600" algn="l" defTabSz="914400" rtl="0" eaLnBrk="1" latinLnBrk="0" hangingPunct="1">
+      <a:defRPr sz="1200" kern="1200">
         <a:solidFill>
           <a:schemeClr val="tx1"/>
         </a:solidFill>
@@ -1169,8 +1089,8 @@
         <a:cs typeface="+mn-cs"/>
       </a:defRPr>
     </a:lvl4pPr>
-    <a:lvl5pPr marL="1828800" algn="l" defTabSz="914400">
-      <a:defRPr sz="1200">
+    <a:lvl5pPr marL="1828800" algn="l" defTabSz="914400" rtl="0" eaLnBrk="1" latinLnBrk="0" hangingPunct="1">
+      <a:defRPr sz="1200" kern="1200">
         <a:solidFill>
           <a:schemeClr val="tx1"/>
         </a:solidFill>
@@ -1179,8 +1099,8 @@
         <a:cs typeface="+mn-cs"/>
       </a:defRPr>
     </a:lvl5pPr>
-    <a:lvl6pPr marL="2286000" algn="l" defTabSz="914400">
-      <a:defRPr sz="1200">
+    <a:lvl6pPr marL="2286000" algn="l" defTabSz="914400" rtl="0" eaLnBrk="1" latinLnBrk="0" hangingPunct="1">
+      <a:defRPr sz="1200" kern="1200">
         <a:solidFill>
           <a:schemeClr val="tx1"/>
         </a:solidFill>
@@ -1189,8 +1109,8 @@
         <a:cs typeface="+mn-cs"/>
       </a:defRPr>
     </a:lvl6pPr>
-    <a:lvl7pPr marL="2743200" algn="l" defTabSz="914400">
-      <a:defRPr sz="1200">
+    <a:lvl7pPr marL="2743200" algn="l" defTabSz="914400" rtl="0" eaLnBrk="1" latinLnBrk="0" hangingPunct="1">
+      <a:defRPr sz="1200" kern="1200">
         <a:solidFill>
           <a:schemeClr val="tx1"/>
         </a:solidFill>
@@ -1199,8 +1119,8 @@
         <a:cs typeface="+mn-cs"/>
       </a:defRPr>
     </a:lvl7pPr>
-    <a:lvl8pPr marL="3200400" algn="l" defTabSz="914400">
-      <a:defRPr sz="1200">
+    <a:lvl8pPr marL="3200400" algn="l" defTabSz="914400" rtl="0" eaLnBrk="1" latinLnBrk="0" hangingPunct="1">
+      <a:defRPr sz="1200" kern="1200">
         <a:solidFill>
           <a:schemeClr val="tx1"/>
         </a:solidFill>
@@ -1209,8 +1129,8 @@
         <a:cs typeface="+mn-cs"/>
       </a:defRPr>
     </a:lvl8pPr>
-    <a:lvl9pPr marL="3657600" algn="l" defTabSz="914400">
-      <a:defRPr sz="1200">
+    <a:lvl9pPr marL="3657600" algn="l" defTabSz="914400" rtl="0" eaLnBrk="1" latinLnBrk="0" hangingPunct="1">
+      <a:defRPr sz="1200" kern="1200">
         <a:solidFill>
           <a:schemeClr val="tx1"/>
         </a:solidFill>
@@ -1224,15 +1144,15 @@
 </file>
 
 <file path=ppt/notesSlides/notesSlide1.xml><?xml version="1.0" encoding="utf-8"?>
-<p:notes xmlns:a="http://schemas.openxmlformats.org/drawingml/2006/main" xmlns:r="http://schemas.openxmlformats.org/officeDocument/2006/relationships" xmlns:p="http://schemas.openxmlformats.org/presentationml/2006/main" xmlns:m="http://schemas.openxmlformats.org/officeDocument/2006/math" xmlns:w="http://schemas.openxmlformats.org/wordprocessingml/2006/main">
-  <p:cSld name="">
+<p:notes xmlns:a="http://schemas.openxmlformats.org/drawingml/2006/main" xmlns:r="http://schemas.openxmlformats.org/officeDocument/2006/relationships" xmlns:p="http://schemas.openxmlformats.org/presentationml/2006/main">
+  <p:cSld>
     <p:spTree>
       <p:nvGrpSpPr>
         <p:cNvPr id="1" name=""/>
         <p:cNvGrpSpPr/>
         <p:nvPr/>
       </p:nvGrpSpPr>
-      <p:grpSpPr bwMode="auto">
+      <p:grpSpPr>
         <a:xfrm>
           <a:off x="0" y="0"/>
           <a:ext cx="0" cy="0"/>
@@ -1244,13 +1164,13 @@
         <p:nvSpPr>
           <p:cNvPr id="2" name="Slide Image Placeholder 1"/>
           <p:cNvSpPr>
-            <a:spLocks noChangeAspect="1" noGrp="1" noRot="1"/>
+            <a:spLocks noGrp="1" noRot="1" noChangeAspect="1"/>
           </p:cNvSpPr>
           <p:nvPr>
             <p:ph type="sldImg"/>
           </p:nvPr>
         </p:nvSpPr>
-        <p:spPr bwMode="auto"/>
+        <p:spPr/>
       </p:sp>
       <p:sp>
         <p:nvSpPr>
@@ -1262,19 +1182,16 @@
             <p:ph type="body" idx="1"/>
           </p:nvPr>
         </p:nvSpPr>
-        <p:spPr bwMode="auto"/>
+        <p:spPr/>
         <p:txBody>
           <a:bodyPr/>
           <a:lstStyle/>
           <a:p>
-            <a:pPr>
-              <a:defRPr/>
-            </a:pPr>
-            <a:r>
-              <a:rPr lang="en-US"/>
+            <a:r>
+              <a:rPr lang="en-US" dirty="0"/>
               <a:t>Приветствие. Проект: озвучка документов с естественным голосом, бесплатно, с расчётами на устройстве пользователя. Тип проекта: гибридный (продукт + эксперимент).</a:t>
             </a:r>
-            <a:endParaRPr lang="en-US"/>
+            <a:endParaRPr lang="en-US" dirty="0"/>
           </a:p>
         </p:txBody>
       </p:sp>
@@ -1288,14 +1205,11 @@
             <p:ph type="sldNum" sz="quarter" idx="10"/>
           </p:nvPr>
         </p:nvSpPr>
-        <p:spPr bwMode="auto"/>
+        <p:spPr/>
         <p:txBody>
           <a:bodyPr/>
           <a:lstStyle/>
           <a:p>
-            <a:pPr>
-              <a:defRPr/>
-            </a:pPr>
             <a:fld id="{F7021451-1387-4CA6-816F-3879F97B5CBC}" type="slidenum">
               <a:rPr lang="en-US"/>
               <a:t>1</a:t>
@@ -1305,20 +1219,28 @@
         </p:txBody>
       </p:sp>
     </p:spTree>
+    <p:extLst>
+      <p:ext uri="{BB962C8B-B14F-4D97-AF65-F5344CB8AC3E}">
+        <p14:creationId xmlns:p14="http://schemas.microsoft.com/office/powerpoint/2010/main" val="1024086991"/>
+      </p:ext>
+    </p:extLst>
   </p:cSld>
+  <p:clrMapOvr>
+    <a:masterClrMapping/>
+  </p:clrMapOvr>
 </p:notes>
 </file>
 
 <file path=ppt/notesSlides/notesSlide10.xml><?xml version="1.0" encoding="utf-8"?>
-<p:notes xmlns:a="http://schemas.openxmlformats.org/drawingml/2006/main" xmlns:r="http://schemas.openxmlformats.org/officeDocument/2006/relationships" xmlns:p="http://schemas.openxmlformats.org/presentationml/2006/main" xmlns:m="http://schemas.openxmlformats.org/officeDocument/2006/math" xmlns:w="http://schemas.openxmlformats.org/wordprocessingml/2006/main">
-  <p:cSld name="">
+<p:notes xmlns:a="http://schemas.openxmlformats.org/drawingml/2006/main" xmlns:r="http://schemas.openxmlformats.org/officeDocument/2006/relationships" xmlns:p="http://schemas.openxmlformats.org/presentationml/2006/main">
+  <p:cSld>
     <p:spTree>
       <p:nvGrpSpPr>
         <p:cNvPr id="1" name=""/>
         <p:cNvGrpSpPr/>
         <p:nvPr/>
       </p:nvGrpSpPr>
-      <p:grpSpPr bwMode="auto">
+      <p:grpSpPr>
         <a:xfrm>
           <a:off x="0" y="0"/>
           <a:ext cx="0" cy="0"/>
@@ -1330,13 +1252,13 @@
         <p:nvSpPr>
           <p:cNvPr id="2" name="Slide Image Placeholder 1"/>
           <p:cNvSpPr>
-            <a:spLocks noChangeAspect="1" noGrp="1" noRot="1"/>
+            <a:spLocks noGrp="1" noRot="1" noChangeAspect="1"/>
           </p:cNvSpPr>
           <p:nvPr>
             <p:ph type="sldImg"/>
           </p:nvPr>
         </p:nvSpPr>
-        <p:spPr bwMode="auto"/>
+        <p:spPr/>
       </p:sp>
       <p:sp>
         <p:nvSpPr>
@@ -1348,19 +1270,16 @@
             <p:ph type="body" idx="1"/>
           </p:nvPr>
         </p:nvSpPr>
-        <p:spPr bwMode="auto"/>
+        <p:spPr/>
         <p:txBody>
           <a:bodyPr/>
           <a:lstStyle/>
           <a:p>
-            <a:pPr>
-              <a:defRPr/>
-            </a:pPr>
-            <a:r>
-              <a:rPr lang="en-US"/>
+            <a:r>
+              <a:rPr lang="en-US" dirty="0"/>
               <a:t>Роли: человек ставит цели, решает, тестирует на устройствах, оценивает звук; агент пишет код, тесты, документы. Платных ресурсов нет. Вопросы.</a:t>
             </a:r>
-            <a:endParaRPr lang="en-US"/>
+            <a:endParaRPr lang="en-US" dirty="0"/>
           </a:p>
         </p:txBody>
       </p:sp>
@@ -1374,14 +1293,11 @@
             <p:ph type="sldNum" sz="quarter" idx="10"/>
           </p:nvPr>
         </p:nvSpPr>
-        <p:spPr bwMode="auto"/>
+        <p:spPr/>
         <p:txBody>
           <a:bodyPr/>
           <a:lstStyle/>
           <a:p>
-            <a:pPr>
-              <a:defRPr/>
-            </a:pPr>
             <a:fld id="{F7021451-1387-4CA6-816F-3879F97B5CBC}" type="slidenum">
               <a:rPr lang="en-US"/>
               <a:t>10</a:t>
@@ -1391,20 +1307,28 @@
         </p:txBody>
       </p:sp>
     </p:spTree>
+    <p:extLst>
+      <p:ext uri="{BB962C8B-B14F-4D97-AF65-F5344CB8AC3E}">
+        <p14:creationId xmlns:p14="http://schemas.microsoft.com/office/powerpoint/2010/main" val="1024086991"/>
+      </p:ext>
+    </p:extLst>
   </p:cSld>
+  <p:clrMapOvr>
+    <a:masterClrMapping/>
+  </p:clrMapOvr>
 </p:notes>
 </file>
 
 <file path=ppt/notesSlides/notesSlide2.xml><?xml version="1.0" encoding="utf-8"?>
-<p:notes xmlns:a="http://schemas.openxmlformats.org/drawingml/2006/main" xmlns:r="http://schemas.openxmlformats.org/officeDocument/2006/relationships" xmlns:p="http://schemas.openxmlformats.org/presentationml/2006/main" xmlns:m="http://schemas.openxmlformats.org/officeDocument/2006/math" xmlns:w="http://schemas.openxmlformats.org/wordprocessingml/2006/main">
-  <p:cSld name="">
+<p:notes xmlns:a="http://schemas.openxmlformats.org/drawingml/2006/main" xmlns:r="http://schemas.openxmlformats.org/officeDocument/2006/relationships" xmlns:p="http://schemas.openxmlformats.org/presentationml/2006/main">
+  <p:cSld>
     <p:spTree>
       <p:nvGrpSpPr>
         <p:cNvPr id="1" name=""/>
         <p:cNvGrpSpPr/>
         <p:nvPr/>
       </p:nvGrpSpPr>
-      <p:grpSpPr bwMode="auto">
+      <p:grpSpPr>
         <a:xfrm>
           <a:off x="0" y="0"/>
           <a:ext cx="0" cy="0"/>
@@ -1416,13 +1340,13 @@
         <p:nvSpPr>
           <p:cNvPr id="2" name="Slide Image Placeholder 1"/>
           <p:cNvSpPr>
-            <a:spLocks noChangeAspect="1" noGrp="1" noRot="1"/>
+            <a:spLocks noGrp="1" noRot="1" noChangeAspect="1"/>
           </p:cNvSpPr>
           <p:nvPr>
             <p:ph type="sldImg"/>
           </p:nvPr>
         </p:nvSpPr>
-        <p:spPr bwMode="auto"/>
+        <p:spPr/>
       </p:sp>
       <p:sp>
         <p:nvSpPr>
@@ -1434,19 +1358,16 @@
             <p:ph type="body" idx="1"/>
           </p:nvPr>
         </p:nvSpPr>
-        <p:spPr bwMode="auto"/>
+        <p:spPr/>
         <p:txBody>
           <a:bodyPr/>
           <a:lstStyle/>
           <a:p>
-            <a:pPr>
-              <a:defRPr/>
-            </a:pPr>
-            <a:r>
-              <a:rPr lang="en-US"/>
+            <a:r>
+              <a:rPr lang="en-US" dirty="0"/>
               <a:t>Три требования: бесплатно, быстро, естественно. Классический eSpeak бесплатен и быстр, но звучит как робот.</a:t>
             </a:r>
-            <a:endParaRPr lang="en-US"/>
+            <a:endParaRPr lang="en-US" dirty="0"/>
           </a:p>
         </p:txBody>
       </p:sp>
@@ -1460,14 +1381,11 @@
             <p:ph type="sldNum" sz="quarter" idx="10"/>
           </p:nvPr>
         </p:nvSpPr>
-        <p:spPr bwMode="auto"/>
+        <p:spPr/>
         <p:txBody>
           <a:bodyPr/>
           <a:lstStyle/>
           <a:p>
-            <a:pPr>
-              <a:defRPr/>
-            </a:pPr>
             <a:fld id="{F7021451-1387-4CA6-816F-3879F97B5CBC}" type="slidenum">
               <a:rPr lang="en-US"/>
               <a:t>2</a:t>
@@ -1477,20 +1395,28 @@
         </p:txBody>
       </p:sp>
     </p:spTree>
+    <p:extLst>
+      <p:ext uri="{BB962C8B-B14F-4D97-AF65-F5344CB8AC3E}">
+        <p14:creationId xmlns:p14="http://schemas.microsoft.com/office/powerpoint/2010/main" val="1024086991"/>
+      </p:ext>
+    </p:extLst>
   </p:cSld>
+  <p:clrMapOvr>
+    <a:masterClrMapping/>
+  </p:clrMapOvr>
 </p:notes>
 </file>
 
 <file path=ppt/notesSlides/notesSlide3.xml><?xml version="1.0" encoding="utf-8"?>
-<p:notes xmlns:a="http://schemas.openxmlformats.org/drawingml/2006/main" xmlns:r="http://schemas.openxmlformats.org/officeDocument/2006/relationships" xmlns:p="http://schemas.openxmlformats.org/presentationml/2006/main" xmlns:m="http://schemas.openxmlformats.org/officeDocument/2006/math" xmlns:w="http://schemas.openxmlformats.org/wordprocessingml/2006/main">
-  <p:cSld name="">
+<p:notes xmlns:a="http://schemas.openxmlformats.org/drawingml/2006/main" xmlns:r="http://schemas.openxmlformats.org/officeDocument/2006/relationships" xmlns:p="http://schemas.openxmlformats.org/presentationml/2006/main">
+  <p:cSld>
     <p:spTree>
       <p:nvGrpSpPr>
         <p:cNvPr id="1" name=""/>
         <p:cNvGrpSpPr/>
         <p:nvPr/>
       </p:nvGrpSpPr>
-      <p:grpSpPr bwMode="auto">
+      <p:grpSpPr>
         <a:xfrm>
           <a:off x="0" y="0"/>
           <a:ext cx="0" cy="0"/>
@@ -1502,13 +1428,13 @@
         <p:nvSpPr>
           <p:cNvPr id="2" name="Slide Image Placeholder 1"/>
           <p:cNvSpPr>
-            <a:spLocks noChangeAspect="1" noGrp="1" noRot="1"/>
+            <a:spLocks noGrp="1" noRot="1" noChangeAspect="1"/>
           </p:cNvSpPr>
           <p:nvPr>
             <p:ph type="sldImg"/>
           </p:nvPr>
         </p:nvSpPr>
-        <p:spPr bwMode="auto"/>
+        <p:spPr/>
       </p:sp>
       <p:sp>
         <p:nvSpPr>
@@ -1520,19 +1446,16 @@
             <p:ph type="body" idx="1"/>
           </p:nvPr>
         </p:nvSpPr>
-        <p:spPr bwMode="auto"/>
+        <p:spPr/>
         <p:txBody>
           <a:bodyPr/>
           <a:lstStyle/>
           <a:p>
-            <a:pPr>
-              <a:defRPr/>
-            </a:pPr>
-            <a:r>
-              <a:rPr lang="en-US"/>
+            <a:r>
+              <a:rPr lang="en-US" dirty="0"/>
               <a:t>Сценарий: отправил файл, текст подготовился, Kokoro озвучил, слушаю с подсветкой предложения. Поддерживаются txt, md, pdf.</a:t>
             </a:r>
-            <a:endParaRPr lang="en-US"/>
+            <a:endParaRPr lang="en-US" dirty="0"/>
           </a:p>
         </p:txBody>
       </p:sp>
@@ -1546,14 +1469,11 @@
             <p:ph type="sldNum" sz="quarter" idx="10"/>
           </p:nvPr>
         </p:nvSpPr>
-        <p:spPr bwMode="auto"/>
+        <p:spPr/>
         <p:txBody>
           <a:bodyPr/>
           <a:lstStyle/>
           <a:p>
-            <a:pPr>
-              <a:defRPr/>
-            </a:pPr>
             <a:fld id="{F7021451-1387-4CA6-816F-3879F97B5CBC}" type="slidenum">
               <a:rPr lang="en-US"/>
               <a:t>3</a:t>
@@ -1563,20 +1483,28 @@
         </p:txBody>
       </p:sp>
     </p:spTree>
+    <p:extLst>
+      <p:ext uri="{BB962C8B-B14F-4D97-AF65-F5344CB8AC3E}">
+        <p14:creationId xmlns:p14="http://schemas.microsoft.com/office/powerpoint/2010/main" val="1024086991"/>
+      </p:ext>
+    </p:extLst>
   </p:cSld>
+  <p:clrMapOvr>
+    <a:masterClrMapping/>
+  </p:clrMapOvr>
 </p:notes>
 </file>
 
 <file path=ppt/notesSlides/notesSlide4.xml><?xml version="1.0" encoding="utf-8"?>
-<p:notes xmlns:a="http://schemas.openxmlformats.org/drawingml/2006/main" xmlns:r="http://schemas.openxmlformats.org/officeDocument/2006/relationships" xmlns:p="http://schemas.openxmlformats.org/presentationml/2006/main" xmlns:m="http://schemas.openxmlformats.org/officeDocument/2006/math" xmlns:w="http://schemas.openxmlformats.org/wordprocessingml/2006/main">
-  <p:cSld name="">
+<p:notes xmlns:a="http://schemas.openxmlformats.org/drawingml/2006/main" xmlns:r="http://schemas.openxmlformats.org/officeDocument/2006/relationships" xmlns:p="http://schemas.openxmlformats.org/presentationml/2006/main">
+  <p:cSld>
     <p:spTree>
       <p:nvGrpSpPr>
         <p:cNvPr id="1" name=""/>
         <p:cNvGrpSpPr/>
         <p:nvPr/>
       </p:nvGrpSpPr>
-      <p:grpSpPr bwMode="auto">
+      <p:grpSpPr>
         <a:xfrm>
           <a:off x="0" y="0"/>
           <a:ext cx="0" cy="0"/>
@@ -1588,13 +1516,13 @@
         <p:nvSpPr>
           <p:cNvPr id="2" name="Slide Image Placeholder 1"/>
           <p:cNvSpPr>
-            <a:spLocks noChangeAspect="1" noGrp="1" noRot="1"/>
+            <a:spLocks noGrp="1" noRot="1" noChangeAspect="1"/>
           </p:cNvSpPr>
           <p:nvPr>
             <p:ph type="sldImg"/>
           </p:nvPr>
         </p:nvSpPr>
-        <p:spPr bwMode="auto"/>
+        <p:spPr/>
       </p:sp>
       <p:sp>
         <p:nvSpPr>
@@ -1606,19 +1534,16 @@
             <p:ph type="body" idx="1"/>
           </p:nvPr>
         </p:nvSpPr>
-        <p:spPr bwMode="auto"/>
+        <p:spPr/>
         <p:txBody>
           <a:bodyPr/>
           <a:lstStyle/>
           <a:p>
-            <a:pPr>
-              <a:defRPr/>
-            </a:pPr>
-            <a:r>
-              <a:rPr lang="en-US"/>
+            <a:r>
+              <a:rPr lang="en-US" dirty="0"/>
               <a:t>Два пути: Mini App считает на устройстве пользователя (текст не уходит), бот считает на моём компьютере (быстрее на слабом телефоне). Общие правила подготовки текста в Python и JS, тесты проверяют их одними и теми же случаями.</a:t>
             </a:r>
-            <a:endParaRPr lang="en-US"/>
+            <a:endParaRPr lang="en-US" dirty="0"/>
           </a:p>
         </p:txBody>
       </p:sp>
@@ -1632,14 +1557,11 @@
             <p:ph type="sldNum" sz="quarter" idx="10"/>
           </p:nvPr>
         </p:nvSpPr>
-        <p:spPr bwMode="auto"/>
+        <p:spPr/>
         <p:txBody>
           <a:bodyPr/>
           <a:lstStyle/>
           <a:p>
-            <a:pPr>
-              <a:defRPr/>
-            </a:pPr>
             <a:fld id="{F7021451-1387-4CA6-816F-3879F97B5CBC}" type="slidenum">
               <a:rPr lang="en-US"/>
               <a:t>4</a:t>
@@ -1649,20 +1571,28 @@
         </p:txBody>
       </p:sp>
     </p:spTree>
+    <p:extLst>
+      <p:ext uri="{BB962C8B-B14F-4D97-AF65-F5344CB8AC3E}">
+        <p14:creationId xmlns:p14="http://schemas.microsoft.com/office/powerpoint/2010/main" val="1024086991"/>
+      </p:ext>
+    </p:extLst>
   </p:cSld>
+  <p:clrMapOvr>
+    <a:masterClrMapping/>
+  </p:clrMapOvr>
 </p:notes>
 </file>
 
 <file path=ppt/notesSlides/notesSlide5.xml><?xml version="1.0" encoding="utf-8"?>
-<p:notes xmlns:a="http://schemas.openxmlformats.org/drawingml/2006/main" xmlns:r="http://schemas.openxmlformats.org/officeDocument/2006/relationships" xmlns:p="http://schemas.openxmlformats.org/presentationml/2006/main" xmlns:m="http://schemas.openxmlformats.org/officeDocument/2006/math" xmlns:w="http://schemas.openxmlformats.org/wordprocessingml/2006/main">
-  <p:cSld name="">
+<p:notes xmlns:a="http://schemas.openxmlformats.org/drawingml/2006/main" xmlns:r="http://schemas.openxmlformats.org/officeDocument/2006/relationships" xmlns:p="http://schemas.openxmlformats.org/presentationml/2006/main">
+  <p:cSld>
     <p:spTree>
       <p:nvGrpSpPr>
         <p:cNvPr id="1" name=""/>
         <p:cNvGrpSpPr/>
         <p:nvPr/>
       </p:nvGrpSpPr>
-      <p:grpSpPr bwMode="auto">
+      <p:grpSpPr>
         <a:xfrm>
           <a:off x="0" y="0"/>
           <a:ext cx="0" cy="0"/>
@@ -1674,13 +1604,13 @@
         <p:nvSpPr>
           <p:cNvPr id="2" name="Slide Image Placeholder 1"/>
           <p:cNvSpPr>
-            <a:spLocks noChangeAspect="1" noGrp="1" noRot="1"/>
+            <a:spLocks noGrp="1" noRot="1" noChangeAspect="1"/>
           </p:cNvSpPr>
           <p:nvPr>
             <p:ph type="sldImg"/>
           </p:nvPr>
         </p:nvSpPr>
-        <p:spPr bwMode="auto"/>
+        <p:spPr/>
       </p:sp>
       <p:sp>
         <p:nvSpPr>
@@ -1692,19 +1622,16 @@
             <p:ph type="body" idx="1"/>
           </p:nvPr>
         </p:nvSpPr>
-        <p:spPr bwMode="auto"/>
+        <p:spPr/>
         <p:txBody>
           <a:bodyPr/>
           <a:lstStyle/>
           <a:p>
-            <a:pPr>
-              <a:defRPr/>
-            </a:pPr>
-            <a:r>
-              <a:rPr lang="en-US"/>
+            <a:r>
+              <a:rPr lang="en-US" dirty="0"/>
               <a:t>Протокол: 22 предложения, 4 системы, метрики: WER через Whisper, скорость, самая длинная пауза, оценка на слух вслепую (24 клипа).</a:t>
             </a:r>
-            <a:endParaRPr lang="en-US"/>
+            <a:endParaRPr lang="en-US" dirty="0"/>
           </a:p>
         </p:txBody>
       </p:sp>
@@ -1718,14 +1645,11 @@
             <p:ph type="sldNum" sz="quarter" idx="10"/>
           </p:nvPr>
         </p:nvSpPr>
-        <p:spPr bwMode="auto"/>
+        <p:spPr/>
         <p:txBody>
           <a:bodyPr/>
           <a:lstStyle/>
           <a:p>
-            <a:pPr>
-              <a:defRPr/>
-            </a:pPr>
             <a:fld id="{F7021451-1387-4CA6-816F-3879F97B5CBC}" type="slidenum">
               <a:rPr lang="en-US"/>
               <a:t>5</a:t>
@@ -1735,20 +1659,28 @@
         </p:txBody>
       </p:sp>
     </p:spTree>
+    <p:extLst>
+      <p:ext uri="{BB962C8B-B14F-4D97-AF65-F5344CB8AC3E}">
+        <p14:creationId xmlns:p14="http://schemas.microsoft.com/office/powerpoint/2010/main" val="1024086991"/>
+      </p:ext>
+    </p:extLst>
   </p:cSld>
+  <p:clrMapOvr>
+    <a:masterClrMapping/>
+  </p:clrMapOvr>
 </p:notes>
 </file>
 
 <file path=ppt/notesSlides/notesSlide6.xml><?xml version="1.0" encoding="utf-8"?>
-<p:notes xmlns:a="http://schemas.openxmlformats.org/drawingml/2006/main" xmlns:r="http://schemas.openxmlformats.org/officeDocument/2006/relationships" xmlns:p="http://schemas.openxmlformats.org/presentationml/2006/main" xmlns:m="http://schemas.openxmlformats.org/officeDocument/2006/math" xmlns:w="http://schemas.openxmlformats.org/wordprocessingml/2006/main">
-  <p:cSld name="">
+<p:notes xmlns:a="http://schemas.openxmlformats.org/drawingml/2006/main" xmlns:r="http://schemas.openxmlformats.org/officeDocument/2006/relationships" xmlns:p="http://schemas.openxmlformats.org/presentationml/2006/main">
+  <p:cSld>
     <p:spTree>
       <p:nvGrpSpPr>
         <p:cNvPr id="1" name=""/>
         <p:cNvGrpSpPr/>
         <p:nvPr/>
       </p:nvGrpSpPr>
-      <p:grpSpPr bwMode="auto">
+      <p:grpSpPr>
         <a:xfrm>
           <a:off x="0" y="0"/>
           <a:ext cx="0" cy="0"/>
@@ -1760,13 +1692,13 @@
         <p:nvSpPr>
           <p:cNvPr id="2" name="Slide Image Placeholder 1"/>
           <p:cNvSpPr>
-            <a:spLocks noChangeAspect="1" noGrp="1" noRot="1"/>
+            <a:spLocks noGrp="1" noRot="1" noChangeAspect="1"/>
           </p:cNvSpPr>
           <p:nvPr>
             <p:ph type="sldImg"/>
           </p:nvPr>
         </p:nvSpPr>
-        <p:spPr bwMode="auto"/>
+        <p:spPr/>
       </p:sp>
       <p:sp>
         <p:nvSpPr>
@@ -1778,19 +1710,16 @@
             <p:ph type="body" idx="1"/>
           </p:nvPr>
         </p:nvSpPr>
-        <p:spPr bwMode="auto"/>
+        <p:spPr/>
         <p:txBody>
           <a:bodyPr/>
           <a:lstStyle/>
           <a:p>
-            <a:pPr>
-              <a:defRPr/>
-            </a:pPr>
-            <a:r>
-              <a:rPr lang="en-US"/>
+            <a:r>
+              <a:rPr lang="en-US" dirty="0"/>
               <a:t>Kokoro лучше всех по естественности (5,0 против 3,2 и 1,0). По WER Kokoro с подготовкой текста 1,1%. Цена: скорость около 3x реального времени. Оценка на слух: один оценщик.</a:t>
             </a:r>
-            <a:endParaRPr lang="en-US"/>
+            <a:endParaRPr lang="en-US" dirty="0"/>
           </a:p>
         </p:txBody>
       </p:sp>
@@ -1804,14 +1733,11 @@
             <p:ph type="sldNum" sz="quarter" idx="10"/>
           </p:nvPr>
         </p:nvSpPr>
-        <p:spPr bwMode="auto"/>
+        <p:spPr/>
         <p:txBody>
           <a:bodyPr/>
           <a:lstStyle/>
           <a:p>
-            <a:pPr>
-              <a:defRPr/>
-            </a:pPr>
             <a:fld id="{F7021451-1387-4CA6-816F-3879F97B5CBC}" type="slidenum">
               <a:rPr lang="en-US"/>
               <a:t>6</a:t>
@@ -1821,20 +1747,28 @@
         </p:txBody>
       </p:sp>
     </p:spTree>
+    <p:extLst>
+      <p:ext uri="{BB962C8B-B14F-4D97-AF65-F5344CB8AC3E}">
+        <p14:creationId xmlns:p14="http://schemas.microsoft.com/office/powerpoint/2010/main" val="1024086991"/>
+      </p:ext>
+    </p:extLst>
   </p:cSld>
+  <p:clrMapOvr>
+    <a:masterClrMapping/>
+  </p:clrMapOvr>
 </p:notes>
 </file>
 
 <file path=ppt/notesSlides/notesSlide7.xml><?xml version="1.0" encoding="utf-8"?>
-<p:notes xmlns:a="http://schemas.openxmlformats.org/drawingml/2006/main" xmlns:r="http://schemas.openxmlformats.org/officeDocument/2006/relationships" xmlns:p="http://schemas.openxmlformats.org/presentationml/2006/main" xmlns:m="http://schemas.openxmlformats.org/officeDocument/2006/math" xmlns:w="http://schemas.openxmlformats.org/wordprocessingml/2006/main">
-  <p:cSld name="">
+<p:notes xmlns:a="http://schemas.openxmlformats.org/drawingml/2006/main" xmlns:r="http://schemas.openxmlformats.org/officeDocument/2006/relationships" xmlns:p="http://schemas.openxmlformats.org/presentationml/2006/main">
+  <p:cSld>
     <p:spTree>
       <p:nvGrpSpPr>
         <p:cNvPr id="1" name=""/>
         <p:cNvGrpSpPr/>
         <p:nvPr/>
       </p:nvGrpSpPr>
-      <p:grpSpPr bwMode="auto">
+      <p:grpSpPr>
         <a:xfrm>
           <a:off x="0" y="0"/>
           <a:ext cx="0" cy="0"/>
@@ -1846,13 +1780,13 @@
         <p:nvSpPr>
           <p:cNvPr id="2" name="Slide Image Placeholder 1"/>
           <p:cNvSpPr>
-            <a:spLocks noChangeAspect="1" noGrp="1" noRot="1"/>
+            <a:spLocks noGrp="1" noRot="1" noChangeAspect="1"/>
           </p:cNvSpPr>
           <p:nvPr>
             <p:ph type="sldImg"/>
           </p:nvPr>
         </p:nvSpPr>
-        <p:spPr bwMode="auto"/>
+        <p:spPr/>
       </p:sp>
       <p:sp>
         <p:nvSpPr>
@@ -1864,19 +1798,16 @@
             <p:ph type="body" idx="1"/>
           </p:nvPr>
         </p:nvSpPr>
-        <p:spPr bwMode="auto"/>
+        <p:spPr/>
         <p:txBody>
           <a:bodyPr/>
           <a:lstStyle/>
           <a:p>
-            <a:pPr>
-              <a:defRPr/>
-            </a:pPr>
-            <a:r>
-              <a:rPr lang="en-US"/>
+            <a:r>
+              <a:rPr lang="en-US" dirty="0"/>
               <a:t>Подготовка текста: на временах WER с 17% до 2,1%, пауза на двоеточии пропадает. Дёшево и измеримо.</a:t>
             </a:r>
-            <a:endParaRPr lang="en-US"/>
+            <a:endParaRPr lang="en-US" dirty="0"/>
           </a:p>
         </p:txBody>
       </p:sp>
@@ -1890,14 +1821,11 @@
             <p:ph type="sldNum" sz="quarter" idx="10"/>
           </p:nvPr>
         </p:nvSpPr>
-        <p:spPr bwMode="auto"/>
+        <p:spPr/>
         <p:txBody>
           <a:bodyPr/>
           <a:lstStyle/>
           <a:p>
-            <a:pPr>
-              <a:defRPr/>
-            </a:pPr>
             <a:fld id="{F7021451-1387-4CA6-816F-3879F97B5CBC}" type="slidenum">
               <a:rPr lang="en-US"/>
               <a:t>7</a:t>
@@ -1907,20 +1835,28 @@
         </p:txBody>
       </p:sp>
     </p:spTree>
+    <p:extLst>
+      <p:ext uri="{BB962C8B-B14F-4D97-AF65-F5344CB8AC3E}">
+        <p14:creationId xmlns:p14="http://schemas.microsoft.com/office/powerpoint/2010/main" val="1024086991"/>
+      </p:ext>
+    </p:extLst>
   </p:cSld>
+  <p:clrMapOvr>
+    <a:masterClrMapping/>
+  </p:clrMapOvr>
 </p:notes>
 </file>
 
 <file path=ppt/notesSlides/notesSlide8.xml><?xml version="1.0" encoding="utf-8"?>
-<p:notes xmlns:a="http://schemas.openxmlformats.org/drawingml/2006/main" xmlns:r="http://schemas.openxmlformats.org/officeDocument/2006/relationships" xmlns:p="http://schemas.openxmlformats.org/presentationml/2006/main" xmlns:m="http://schemas.openxmlformats.org/officeDocument/2006/math" xmlns:w="http://schemas.openxmlformats.org/wordprocessingml/2006/main">
-  <p:cSld name="">
+<p:notes xmlns:a="http://schemas.openxmlformats.org/drawingml/2006/main" xmlns:r="http://schemas.openxmlformats.org/officeDocument/2006/relationships" xmlns:p="http://schemas.openxmlformats.org/presentationml/2006/main">
+  <p:cSld>
     <p:spTree>
       <p:nvGrpSpPr>
         <p:cNvPr id="1" name=""/>
         <p:cNvGrpSpPr/>
         <p:nvPr/>
       </p:nvGrpSpPr>
-      <p:grpSpPr bwMode="auto">
+      <p:grpSpPr>
         <a:xfrm>
           <a:off x="0" y="0"/>
           <a:ext cx="0" cy="0"/>
@@ -1932,13 +1868,13 @@
         <p:nvSpPr>
           <p:cNvPr id="2" name="Slide Image Placeholder 1"/>
           <p:cNvSpPr>
-            <a:spLocks noChangeAspect="1" noGrp="1" noRot="1"/>
+            <a:spLocks noGrp="1" noRot="1" noChangeAspect="1"/>
           </p:cNvSpPr>
           <p:nvPr>
             <p:ph type="sldImg"/>
           </p:nvPr>
         </p:nvSpPr>
-        <p:spPr bwMode="auto"/>
+        <p:spPr/>
       </p:sp>
       <p:sp>
         <p:nvSpPr>
@@ -1950,19 +1886,16 @@
             <p:ph type="body" idx="1"/>
           </p:nvPr>
         </p:nvSpPr>
-        <p:spPr bwMode="auto"/>
+        <p:spPr/>
         <p:txBody>
           <a:bodyPr/>
           <a:lstStyle/>
           <a:p>
-            <a:pPr>
-              <a:defRPr/>
-            </a:pPr>
-            <a:r>
-              <a:rPr lang="en-US"/>
+            <a:r>
+              <a:rPr lang="en-US" dirty="0"/>
               <a:t>Ошибки, найденные в работе: часть нашёл человек (телефон, пауза, кнопка, CI), часть агент (стек Windows, метрика). Все превращены в тесты или документированы.</a:t>
             </a:r>
-            <a:endParaRPr lang="en-US"/>
+            <a:endParaRPr lang="en-US" dirty="0"/>
           </a:p>
         </p:txBody>
       </p:sp>
@@ -1976,14 +1909,11 @@
             <p:ph type="sldNum" sz="quarter" idx="10"/>
           </p:nvPr>
         </p:nvSpPr>
-        <p:spPr bwMode="auto"/>
+        <p:spPr/>
         <p:txBody>
           <a:bodyPr/>
           <a:lstStyle/>
           <a:p>
-            <a:pPr>
-              <a:defRPr/>
-            </a:pPr>
             <a:fld id="{F7021451-1387-4CA6-816F-3879F97B5CBC}" type="slidenum">
               <a:rPr lang="en-US"/>
               <a:t>8</a:t>
@@ -1993,20 +1923,28 @@
         </p:txBody>
       </p:sp>
     </p:spTree>
+    <p:extLst>
+      <p:ext uri="{BB962C8B-B14F-4D97-AF65-F5344CB8AC3E}">
+        <p14:creationId xmlns:p14="http://schemas.microsoft.com/office/powerpoint/2010/main" val="1024086991"/>
+      </p:ext>
+    </p:extLst>
   </p:cSld>
+  <p:clrMapOvr>
+    <a:masterClrMapping/>
+  </p:clrMapOvr>
 </p:notes>
 </file>
 
 <file path=ppt/notesSlides/notesSlide9.xml><?xml version="1.0" encoding="utf-8"?>
-<p:notes xmlns:a="http://schemas.openxmlformats.org/drawingml/2006/main" xmlns:r="http://schemas.openxmlformats.org/officeDocument/2006/relationships" xmlns:p="http://schemas.openxmlformats.org/presentationml/2006/main" xmlns:m="http://schemas.openxmlformats.org/officeDocument/2006/math" xmlns:w="http://schemas.openxmlformats.org/wordprocessingml/2006/main">
-  <p:cSld name="">
+<p:notes xmlns:a="http://schemas.openxmlformats.org/drawingml/2006/main" xmlns:r="http://schemas.openxmlformats.org/officeDocument/2006/relationships" xmlns:p="http://schemas.openxmlformats.org/presentationml/2006/main">
+  <p:cSld>
     <p:spTree>
       <p:nvGrpSpPr>
         <p:cNvPr id="1" name=""/>
         <p:cNvGrpSpPr/>
         <p:nvPr/>
       </p:nvGrpSpPr>
-      <p:grpSpPr bwMode="auto">
+      <p:grpSpPr>
         <a:xfrm>
           <a:off x="0" y="0"/>
           <a:ext cx="0" cy="0"/>
@@ -2018,13 +1956,13 @@
         <p:nvSpPr>
           <p:cNvPr id="2" name="Slide Image Placeholder 1"/>
           <p:cNvSpPr>
-            <a:spLocks noChangeAspect="1" noGrp="1" noRot="1"/>
+            <a:spLocks noGrp="1" noRot="1" noChangeAspect="1"/>
           </p:cNvSpPr>
           <p:nvPr>
             <p:ph type="sldImg"/>
           </p:nvPr>
         </p:nvSpPr>
-        <p:spPr bwMode="auto"/>
+        <p:spPr/>
       </p:sp>
       <p:sp>
         <p:nvSpPr>
@@ -2036,19 +1974,16 @@
             <p:ph type="body" idx="1"/>
           </p:nvPr>
         </p:nvSpPr>
-        <p:spPr bwMode="auto"/>
+        <p:spPr/>
         <p:txBody>
           <a:bodyPr/>
           <a:lstStyle/>
           <a:p>
-            <a:pPr>
-              <a:defRPr/>
-            </a:pPr>
-            <a:r>
-              <a:rPr lang="en-US"/>
+            <a:r>
+              <a:rPr lang="en-US" dirty="0"/>
               <a:t>Честно об ограничениях: скорость на телефоне не измерена, один оценщик, только английский, нет OCR. Дальше: задачи T-01...T-06.</a:t>
             </a:r>
-            <a:endParaRPr lang="en-US"/>
+            <a:endParaRPr lang="en-US" dirty="0"/>
           </a:p>
         </p:txBody>
       </p:sp>
@@ -2062,14 +1997,11 @@
             <p:ph type="sldNum" sz="quarter" idx="10"/>
           </p:nvPr>
         </p:nvSpPr>
-        <p:spPr bwMode="auto"/>
+        <p:spPr/>
         <p:txBody>
           <a:bodyPr/>
           <a:lstStyle/>
           <a:p>
-            <a:pPr>
-              <a:defRPr/>
-            </a:pPr>
             <a:fld id="{F7021451-1387-4CA6-816F-3879F97B5CBC}" type="slidenum">
               <a:rPr lang="en-US"/>
               <a:t>9</a:t>
@@ -2079,12 +2011,20 @@
         </p:txBody>
       </p:sp>
     </p:spTree>
+    <p:extLst>
+      <p:ext uri="{BB962C8B-B14F-4D97-AF65-F5344CB8AC3E}">
+        <p14:creationId xmlns:p14="http://schemas.microsoft.com/office/powerpoint/2010/main" val="1024086991"/>
+      </p:ext>
+    </p:extLst>
   </p:cSld>
+  <p:clrMapOvr>
+    <a:masterClrMapping/>
+  </p:clrMapOvr>
 </p:notes>
 </file>
 
 <file path=ppt/slideLayouts/slideLayout1.xml><?xml version="1.0" encoding="utf-8"?>
-<p:sldLayout xmlns:a="http://schemas.openxmlformats.org/drawingml/2006/main" xmlns:r="http://schemas.openxmlformats.org/officeDocument/2006/relationships" xmlns:p="http://schemas.openxmlformats.org/presentationml/2006/main" xmlns:m="http://schemas.openxmlformats.org/officeDocument/2006/math" xmlns:w="http://schemas.openxmlformats.org/wordprocessingml/2006/main" matchingName="" preserve="1" showMasterPhAnim="0" showMasterSp="1" userDrawn="1">
+<p:sldLayout xmlns:a="http://schemas.openxmlformats.org/drawingml/2006/main" xmlns:r="http://schemas.openxmlformats.org/officeDocument/2006/relationships" xmlns:p="http://schemas.openxmlformats.org/presentationml/2006/main" preserve="1">
   <p:cSld name="DEFAULT">
     <p:bg>
       <p:bgRef idx="1001">
@@ -2097,7 +2037,7 @@
         <p:cNvGrpSpPr/>
         <p:nvPr/>
       </p:nvGrpSpPr>
-      <p:grpSpPr bwMode="auto">
+      <p:grpSpPr>
         <a:xfrm>
           <a:off x="0" y="0"/>
           <a:ext cx="0" cy="0"/>
@@ -2114,10 +2054,10 @@
 </file>
 
 <file path=ppt/slideLayouts/slideLayout2.xml><?xml version="1.0" encoding="utf-8"?>
-<p:sldLayout xmlns:a="http://schemas.openxmlformats.org/drawingml/2006/main" xmlns:r="http://schemas.openxmlformats.org/officeDocument/2006/relationships" xmlns:p="http://schemas.openxmlformats.org/presentationml/2006/main" xmlns:m="http://schemas.openxmlformats.org/officeDocument/2006/math" xmlns:w="http://schemas.openxmlformats.org/wordprocessingml/2006/main" matchingName="" preserve="1" showMasterPhAnim="0" showMasterSp="1" userDrawn="1">
+<p:sldLayout xmlns:a="http://schemas.openxmlformats.org/drawingml/2006/main" xmlns:r="http://schemas.openxmlformats.org/officeDocument/2006/relationships" xmlns:p="http://schemas.openxmlformats.org/presentationml/2006/main" preserve="1">
   <p:cSld name="TITLE">
     <p:bg>
-      <p:bgPr shadeToTitle="0">
+      <p:bgPr>
         <a:solidFill>
           <a:schemeClr val="tx1"/>
         </a:solidFill>
@@ -2129,7 +2069,7 @@
         <p:cNvGrpSpPr/>
         <p:nvPr/>
       </p:nvGrpSpPr>
-      <p:grpSpPr bwMode="auto">
+      <p:grpSpPr>
         <a:xfrm>
           <a:off x="0" y="0"/>
           <a:ext cx="0" cy="0"/>
@@ -2142,10 +2082,10 @@
           <p:cNvPr id="2" name="Text 0"/>
           <p:cNvSpPr/>
           <p:nvPr>
-            <p:ph type="title" idx="100" hasCustomPrompt="1"/>
+            <p:ph idx="100" type="title" hasCustomPrompt="1"/>
           </p:nvPr>
         </p:nvSpPr>
-        <p:spPr bwMode="auto">
+        <p:spPr>
           <a:xfrm>
             <a:off x="548640" y="1371600"/>
             <a:ext cx="8046720" cy="1371600"/>
@@ -2159,24 +2099,23 @@
         <p:txBody>
           <a:bodyPr wrap="square" rtlCol="0"/>
           <a:lstStyle>
-            <a:lvl1pPr marL="0" indent="0" algn="l">
+            <a:lvl1pPr algn="l" indent="0" marL="0">
               <a:buNone/>
-              <a:defRPr lang="en-US" sz="4200" b="1">
+              <a:defRPr lang="en-US" sz="4200" b="1" dirty="0">
                 <a:solidFill>
                   <a:schemeClr val="bg1"/>
                 </a:solidFill>
-                <a:latin typeface="Cambria"/>
-                <a:ea typeface="Cambria"/>
-                <a:cs typeface="Cambria"/>
+                <a:latin typeface="Cambria" pitchFamily="34" charset="0"/>
+                <a:ea typeface="Cambria" pitchFamily="34" charset="-122"/>
+                <a:cs typeface="Cambria" pitchFamily="34" charset="-120"/>
               </a:defRPr>
             </a:lvl1pPr>
           </a:lstStyle>
           <a:p>
-            <a:pPr marL="0" indent="0" algn="l">
+            <a:pPr algn="l" indent="0" marL="0">
               <a:buNone/>
-              <a:defRPr/>
-            </a:pPr>
-            <a:endParaRPr lang="en-US" sz="4200"/>
+            </a:pPr>
+            <a:endParaRPr lang="en-US" sz="4200" dirty="0"/>
           </a:p>
         </p:txBody>
       </p:sp>
@@ -2185,10 +2124,10 @@
           <p:cNvPr id="3" name="Text 0"/>
           <p:cNvSpPr/>
           <p:nvPr>
-            <p:ph type="body" idx="101" hasCustomPrompt="1"/>
+            <p:ph idx="101" type="body" hasCustomPrompt="1"/>
           </p:nvPr>
         </p:nvSpPr>
-        <p:spPr bwMode="auto">
+        <p:spPr>
           <a:xfrm>
             <a:off x="548640" y="2926080"/>
             <a:ext cx="8046720" cy="914400"/>
@@ -2202,9 +2141,9 @@
         <p:txBody>
           <a:bodyPr wrap="square" rtlCol="0"/>
           <a:lstStyle>
-            <a:lvl1pPr marL="0" indent="0">
+            <a:lvl1pPr indent="0" marL="0">
               <a:buNone/>
-              <a:defRPr lang="en-US" sz="1800">
+              <a:defRPr lang="en-US" sz="1800" dirty="0">
                 <a:solidFill>
                   <a:schemeClr val="bg2"/>
                 </a:solidFill>
@@ -2212,11 +2151,10 @@
             </a:lvl1pPr>
           </a:lstStyle>
           <a:p>
-            <a:pPr marL="0" indent="0">
+            <a:pPr indent="0" marL="0">
               <a:buNone/>
-              <a:defRPr/>
-            </a:pPr>
-            <a:endParaRPr lang="en-US" sz="1800"/>
+            </a:pPr>
+            <a:endParaRPr lang="en-US" sz="1800" dirty="0"/>
           </a:p>
         </p:txBody>
       </p:sp>
@@ -2229,10 +2167,10 @@
 </file>
 
 <file path=ppt/slideLayouts/slideLayout3.xml><?xml version="1.0" encoding="utf-8"?>
-<p:sldLayout xmlns:a="http://schemas.openxmlformats.org/drawingml/2006/main" xmlns:r="http://schemas.openxmlformats.org/officeDocument/2006/relationships" xmlns:p="http://schemas.openxmlformats.org/presentationml/2006/main" xmlns:m="http://schemas.openxmlformats.org/officeDocument/2006/math" xmlns:w="http://schemas.openxmlformats.org/wordprocessingml/2006/main" matchingName="" preserve="1" showMasterPhAnim="0" showMasterSp="1" userDrawn="1">
+<p:sldLayout xmlns:a="http://schemas.openxmlformats.org/drawingml/2006/main" xmlns:r="http://schemas.openxmlformats.org/officeDocument/2006/relationships" xmlns:p="http://schemas.openxmlformats.org/presentationml/2006/main" preserve="1">
   <p:cSld name="CONTENT">
     <p:bg>
-      <p:bgPr shadeToTitle="0">
+      <p:bgPr>
         <a:solidFill>
           <a:schemeClr val="bg1"/>
         </a:solidFill>
@@ -2244,7 +2182,7 @@
         <p:cNvGrpSpPr/>
         <p:nvPr/>
       </p:nvGrpSpPr>
-      <p:grpSpPr bwMode="auto">
+      <p:grpSpPr>
         <a:xfrm>
           <a:off x="0" y="0"/>
           <a:ext cx="0" cy="0"/>
@@ -2257,10 +2195,10 @@
           <p:cNvPr id="2" name="Text 0"/>
           <p:cNvSpPr/>
           <p:nvPr>
-            <p:ph type="title" idx="100" hasCustomPrompt="1"/>
+            <p:ph idx="100" type="title" hasCustomPrompt="1"/>
           </p:nvPr>
         </p:nvSpPr>
-        <p:spPr bwMode="auto">
+        <p:spPr>
           <a:xfrm>
             <a:off x="548640" y="320040"/>
             <a:ext cx="8046720" cy="822960"/>
@@ -2274,24 +2212,23 @@
         <p:txBody>
           <a:bodyPr wrap="square" rtlCol="0"/>
           <a:lstStyle>
-            <a:lvl1pPr marL="0" indent="0">
+            <a:lvl1pPr indent="0" marL="0">
               <a:buNone/>
-              <a:defRPr lang="en-US" sz="3200" b="1">
+              <a:defRPr lang="en-US" sz="3200" b="1" dirty="0">
                 <a:solidFill>
                   <a:schemeClr val="tx1"/>
                 </a:solidFill>
-                <a:latin typeface="Cambria"/>
-                <a:ea typeface="Cambria"/>
-                <a:cs typeface="Cambria"/>
+                <a:latin typeface="Cambria" pitchFamily="34" charset="0"/>
+                <a:ea typeface="Cambria" pitchFamily="34" charset="-122"/>
+                <a:cs typeface="Cambria" pitchFamily="34" charset="-120"/>
               </a:defRPr>
             </a:lvl1pPr>
           </a:lstStyle>
           <a:p>
-            <a:pPr marL="0" indent="0">
+            <a:pPr indent="0" marL="0">
               <a:buNone/>
-              <a:defRPr/>
-            </a:pPr>
-            <a:endParaRPr lang="en-US" sz="3200"/>
+            </a:pPr>
+            <a:endParaRPr lang="en-US" sz="3200" dirty="0"/>
           </a:p>
         </p:txBody>
       </p:sp>
@@ -2305,14 +2242,19 @@
             <p:ph type="sldNum" sz="quarter" idx="4294967295"/>
           </p:nvPr>
         </p:nvSpPr>
-        <p:spPr bwMode="auto">
-          <a:xfrm>
-            <a:off x="8321039" y="4754880"/>
+        <p:spPr>
+          <a:xfrm>
+            <a:off x="8321040" y="4754880"/>
             <a:ext cx="457200" cy="228600"/>
           </a:xfrm>
           <a:prstGeom prst="rect">
             <a:avLst/>
           </a:prstGeom>
+          <a:extLst>
+            <a:ext uri="{C572A759-6A51-4108-AA02-DFA0A04FC94B}">
+              <ma14:wrappingTextBoxFlag xmlns:ma14="http://schemas.microsoft.com/office/mac/drawingml/2011/main" val="0"/>
+            </a:ext>
+          </a:extLst>
         </p:spPr>
         <p:txBody>
           <a:bodyPr/>
@@ -2326,11 +2268,9 @@
             </a:lvl1pPr>
           </a:lstStyle>
           <a:p>
-            <a:pPr algn="l">
-              <a:defRPr/>
-            </a:pPr>
+            <a:pPr algn="l"/>
             <a:fld id="{F7021451-1387-4CA6-816F-3879F97B5CBC}" type="slidenum">
-              <a:rPr lang="en-US" b="0"/>
+              <a:rPr b="0" lang="en-US"/>
               <a:t>1003</a:t>
             </a:fld>
             <a:endParaRPr lang="en-US"/>
@@ -2346,10 +2286,10 @@
 </file>
 
 <file path=ppt/slideLayouts/slideLayout4.xml><?xml version="1.0" encoding="utf-8"?>
-<p:sldLayout xmlns:a="http://schemas.openxmlformats.org/drawingml/2006/main" xmlns:r="http://schemas.openxmlformats.org/officeDocument/2006/relationships" xmlns:p="http://schemas.openxmlformats.org/presentationml/2006/main" xmlns:m="http://schemas.openxmlformats.org/officeDocument/2006/math" xmlns:w="http://schemas.openxmlformats.org/wordprocessingml/2006/main" matchingName="" preserve="1" showMasterPhAnim="0" showMasterSp="1" userDrawn="1">
+<p:sldLayout xmlns:a="http://schemas.openxmlformats.org/drawingml/2006/main" xmlns:r="http://schemas.openxmlformats.org/officeDocument/2006/relationships" xmlns:p="http://schemas.openxmlformats.org/presentationml/2006/main" preserve="1">
   <p:cSld name="CLOSING">
     <p:bg>
-      <p:bgPr shadeToTitle="0">
+      <p:bgPr>
         <a:solidFill>
           <a:schemeClr val="tx1"/>
         </a:solidFill>
@@ -2361,7 +2301,7 @@
         <p:cNvGrpSpPr/>
         <p:nvPr/>
       </p:nvGrpSpPr>
-      <p:grpSpPr bwMode="auto">
+      <p:grpSpPr>
         <a:xfrm>
           <a:off x="0" y="0"/>
           <a:ext cx="0" cy="0"/>
@@ -2374,10 +2314,10 @@
           <p:cNvPr id="2" name="Text 0"/>
           <p:cNvSpPr/>
           <p:nvPr>
-            <p:ph type="title" idx="100" hasCustomPrompt="1"/>
+            <p:ph idx="100" type="title" hasCustomPrompt="1"/>
           </p:nvPr>
         </p:nvSpPr>
-        <p:spPr bwMode="auto">
+        <p:spPr>
           <a:xfrm>
             <a:off x="548640" y="320040"/>
             <a:ext cx="8046720" cy="822960"/>
@@ -2391,24 +2331,23 @@
         <p:txBody>
           <a:bodyPr wrap="square" rtlCol="0"/>
           <a:lstStyle>
-            <a:lvl1pPr marL="0" indent="0">
+            <a:lvl1pPr indent="0" marL="0">
               <a:buNone/>
-              <a:defRPr lang="en-US" sz="3200" b="1">
+              <a:defRPr lang="en-US" sz="3200" b="1" dirty="0">
                 <a:solidFill>
                   <a:schemeClr val="bg1"/>
                 </a:solidFill>
-                <a:latin typeface="Cambria"/>
-                <a:ea typeface="Cambria"/>
-                <a:cs typeface="Cambria"/>
+                <a:latin typeface="Cambria" pitchFamily="34" charset="0"/>
+                <a:ea typeface="Cambria" pitchFamily="34" charset="-122"/>
+                <a:cs typeface="Cambria" pitchFamily="34" charset="-120"/>
               </a:defRPr>
             </a:lvl1pPr>
           </a:lstStyle>
           <a:p>
-            <a:pPr marL="0" indent="0">
+            <a:pPr indent="0" marL="0">
               <a:buNone/>
-              <a:defRPr/>
-            </a:pPr>
-            <a:endParaRPr lang="en-US" sz="3200"/>
+            </a:pPr>
+            <a:endParaRPr lang="en-US" sz="3200" dirty="0"/>
           </a:p>
         </p:txBody>
       </p:sp>
@@ -2421,15 +2360,15 @@
 </file>
 
 <file path=ppt/slideMasters/slideMaster1.xml><?xml version="1.0" encoding="utf-8"?>
-<p:sldMaster xmlns:a="http://schemas.openxmlformats.org/drawingml/2006/main" xmlns:r="http://schemas.openxmlformats.org/officeDocument/2006/relationships" xmlns:p="http://schemas.openxmlformats.org/presentationml/2006/main" xmlns:m="http://schemas.openxmlformats.org/officeDocument/2006/math" xmlns:w="http://schemas.openxmlformats.org/wordprocessingml/2006/main" preserve="0">
-  <p:cSld name="">
+<p:sldMaster xmlns:a="http://schemas.openxmlformats.org/drawingml/2006/main" xmlns:r="http://schemas.openxmlformats.org/officeDocument/2006/relationships" xmlns:p="http://schemas.openxmlformats.org/presentationml/2006/main">
+  <p:cSld>
     <p:spTree>
       <p:nvGrpSpPr>
         <p:cNvPr id="1" name=""/>
         <p:cNvGrpSpPr/>
         <p:nvPr/>
       </p:nvGrpSpPr>
-      <p:grpSpPr bwMode="auto">
+      <p:grpSpPr>
         <a:xfrm>
           <a:off x="0" y="0"/>
           <a:ext cx="0" cy="0"/>
@@ -2447,14 +2386,19 @@
             <p:ph type="sldNum" sz="quarter" idx="4294967295"/>
           </p:nvPr>
         </p:nvSpPr>
-        <p:spPr bwMode="auto">
-          <a:xfrm>
-            <a:off x="8321039" y="4754880"/>
+        <p:spPr>
+          <a:xfrm>
+            <a:off x="8321040" y="4754880"/>
             <a:ext cx="457200" cy="228600"/>
           </a:xfrm>
           <a:prstGeom prst="rect">
             <a:avLst/>
           </a:prstGeom>
+          <a:extLst>
+            <a:ext uri="{C572A759-6A51-4108-AA02-DFA0A04FC94B}">
+              <ma14:wrappingTextBoxFlag xmlns:ma14="http://schemas.microsoft.com/office/mac/drawingml/2011/main" val="0"/>
+            </a:ext>
+          </a:extLst>
         </p:spPr>
         <p:txBody>
           <a:bodyPr/>
@@ -2468,11 +2412,9 @@
             </a:lvl1pPr>
           </a:lstStyle>
           <a:p>
-            <a:pPr algn="l">
-              <a:defRPr/>
-            </a:pPr>
+            <a:pPr algn="l"/>
             <a:fld id="{F7021451-1387-4CA6-816F-3879F97B5CBC}" type="slidenum">
-              <a:rPr lang="en-US" b="0"/>
+              <a:rPr b="0" lang="en-US"/>
               <a:t>null</a:t>
             </a:fld>
             <a:endParaRPr lang="en-US"/>
@@ -2488,15 +2430,15 @@
     <p:sldLayoutId id="2147483651" r:id="rId3"/>
     <p:sldLayoutId id="2147483652" r:id="rId4"/>
   </p:sldLayoutIdLst>
-  <p:hf dt="0" ftr="0" hdr="0" sldNum="0"/>
+  <p:hf sldNum="0" hdr="0" ftr="0" dt="0"/>
   <p:txStyles>
     <p:titleStyle>
-      <a:lvl1pPr algn="ctr" defTabSz="914400">
+      <a:lvl1pPr algn="ctr" defTabSz="914400" rtl="0" eaLnBrk="1" latinLnBrk="0" hangingPunct="1">
         <a:spcBef>
-          <a:spcPts val="0"/>
+          <a:spcPct val="0"/>
         </a:spcBef>
         <a:buNone/>
-        <a:defRPr sz="4400">
+        <a:defRPr sz="4400" kern="1200">
           <a:solidFill>
             <a:schemeClr val="tx1"/>
           </a:solidFill>
@@ -2507,13 +2449,13 @@
       </a:lvl1pPr>
     </p:titleStyle>
     <p:bodyStyle>
-      <a:lvl1pPr marL="342900" indent="-342900" algn="l" defTabSz="914400">
+      <a:lvl1pPr marL="342900" indent="-342900" algn="l" defTabSz="914400" rtl="0" eaLnBrk="1" latinLnBrk="0" hangingPunct="1">
         <a:spcBef>
-          <a:spcPts val="0"/>
+          <a:spcPct val="20000"/>
         </a:spcBef>
-        <a:buFont typeface="Arial"/>
+        <a:buFont typeface="Arial" pitchFamily="34" charset="0"/>
         <a:buChar char="•"/>
-        <a:defRPr sz="3200">
+        <a:defRPr sz="3200" kern="1200">
           <a:solidFill>
             <a:schemeClr val="tx1"/>
           </a:solidFill>
@@ -2522,13 +2464,13 @@
           <a:cs typeface="+mn-cs"/>
         </a:defRPr>
       </a:lvl1pPr>
-      <a:lvl2pPr marL="742950" indent="-285750" algn="l" defTabSz="914400">
+      <a:lvl2pPr marL="742950" indent="-285750" algn="l" defTabSz="914400" rtl="0" eaLnBrk="1" latinLnBrk="0" hangingPunct="1">
         <a:spcBef>
-          <a:spcPts val="0"/>
+          <a:spcPct val="20000"/>
         </a:spcBef>
-        <a:buFont typeface="Arial"/>
+        <a:buFont typeface="Arial" pitchFamily="34" charset="0"/>
         <a:buChar char="–"/>
-        <a:defRPr sz="2800">
+        <a:defRPr sz="2800" kern="1200">
           <a:solidFill>
             <a:schemeClr val="tx1"/>
           </a:solidFill>
@@ -2537,13 +2479,13 @@
           <a:cs typeface="+mn-cs"/>
         </a:defRPr>
       </a:lvl2pPr>
-      <a:lvl3pPr marL="1143000" indent="-228600" algn="l" defTabSz="914400">
+      <a:lvl3pPr marL="1143000" indent="-228600" algn="l" defTabSz="914400" rtl="0" eaLnBrk="1" latinLnBrk="0" hangingPunct="1">
         <a:spcBef>
-          <a:spcPts val="0"/>
+          <a:spcPct val="20000"/>
         </a:spcBef>
-        <a:buFont typeface="Arial"/>
+        <a:buFont typeface="Arial" pitchFamily="34" charset="0"/>
         <a:buChar char="•"/>
-        <a:defRPr sz="2400">
+        <a:defRPr sz="2400" kern="1200">
           <a:solidFill>
             <a:schemeClr val="tx1"/>
           </a:solidFill>
@@ -2552,13 +2494,13 @@
           <a:cs typeface="+mn-cs"/>
         </a:defRPr>
       </a:lvl3pPr>
-      <a:lvl4pPr marL="1600200" indent="-228600" algn="l" defTabSz="914400">
+      <a:lvl4pPr marL="1600200" indent="-228600" algn="l" defTabSz="914400" rtl="0" eaLnBrk="1" latinLnBrk="0" hangingPunct="1">
         <a:spcBef>
-          <a:spcPts val="0"/>
+          <a:spcPct val="20000"/>
         </a:spcBef>
-        <a:buFont typeface="Arial"/>
+        <a:buFont typeface="Arial" pitchFamily="34" charset="0"/>
         <a:buChar char="–"/>
-        <a:defRPr sz="2000">
+        <a:defRPr sz="2000" kern="1200">
           <a:solidFill>
             <a:schemeClr val="tx1"/>
           </a:solidFill>
@@ -2567,13 +2509,13 @@
           <a:cs typeface="+mn-cs"/>
         </a:defRPr>
       </a:lvl4pPr>
-      <a:lvl5pPr marL="2057400" indent="-228600" algn="l" defTabSz="914400">
+      <a:lvl5pPr marL="2057400" indent="-228600" algn="l" defTabSz="914400" rtl="0" eaLnBrk="1" latinLnBrk="0" hangingPunct="1">
         <a:spcBef>
-          <a:spcPts val="0"/>
+          <a:spcPct val="20000"/>
         </a:spcBef>
-        <a:buFont typeface="Arial"/>
+        <a:buFont typeface="Arial" pitchFamily="34" charset="0"/>
         <a:buChar char="»"/>
-        <a:defRPr sz="2000">
+        <a:defRPr sz="2000" kern="1200">
           <a:solidFill>
             <a:schemeClr val="tx1"/>
           </a:solidFill>
@@ -2582,13 +2524,13 @@
           <a:cs typeface="+mn-cs"/>
         </a:defRPr>
       </a:lvl5pPr>
-      <a:lvl6pPr marL="2514600" indent="-228600" algn="l" defTabSz="914400">
+      <a:lvl6pPr marL="2514600" indent="-228600" algn="l" defTabSz="914400" rtl="0" eaLnBrk="1" latinLnBrk="0" hangingPunct="1">
         <a:spcBef>
-          <a:spcPts val="0"/>
+          <a:spcPct val="20000"/>
         </a:spcBef>
-        <a:buFont typeface="Arial"/>
+        <a:buFont typeface="Arial" pitchFamily="34" charset="0"/>
         <a:buChar char="•"/>
-        <a:defRPr sz="2000">
+        <a:defRPr sz="2000" kern="1200">
           <a:solidFill>
             <a:schemeClr val="tx1"/>
           </a:solidFill>
@@ -2597,13 +2539,13 @@
           <a:cs typeface="+mn-cs"/>
         </a:defRPr>
       </a:lvl6pPr>
-      <a:lvl7pPr marL="2971800" indent="-228600" algn="l" defTabSz="914400">
+      <a:lvl7pPr marL="2971800" indent="-228600" algn="l" defTabSz="914400" rtl="0" eaLnBrk="1" latinLnBrk="0" hangingPunct="1">
         <a:spcBef>
-          <a:spcPts val="0"/>
+          <a:spcPct val="20000"/>
         </a:spcBef>
-        <a:buFont typeface="Arial"/>
+        <a:buFont typeface="Arial" pitchFamily="34" charset="0"/>
         <a:buChar char="•"/>
-        <a:defRPr sz="2000">
+        <a:defRPr sz="2000" kern="1200">
           <a:solidFill>
             <a:schemeClr val="tx1"/>
           </a:solidFill>
@@ -2612,13 +2554,13 @@
           <a:cs typeface="+mn-cs"/>
         </a:defRPr>
       </a:lvl7pPr>
-      <a:lvl8pPr marL="3429000" indent="-228600" algn="l" defTabSz="914400">
+      <a:lvl8pPr marL="3429000" indent="-228600" algn="l" defTabSz="914400" rtl="0" eaLnBrk="1" latinLnBrk="0" hangingPunct="1">
         <a:spcBef>
-          <a:spcPts val="0"/>
+          <a:spcPct val="20000"/>
         </a:spcBef>
-        <a:buFont typeface="Arial"/>
+        <a:buFont typeface="Arial" pitchFamily="34" charset="0"/>
         <a:buChar char="•"/>
-        <a:defRPr sz="2000">
+        <a:defRPr sz="2000" kern="1200">
           <a:solidFill>
             <a:schemeClr val="tx1"/>
           </a:solidFill>
@@ -2627,13 +2569,13 @@
           <a:cs typeface="+mn-cs"/>
         </a:defRPr>
       </a:lvl8pPr>
-      <a:lvl9pPr marL="3886200" indent="-228600" algn="l" defTabSz="914400">
+      <a:lvl9pPr marL="3886200" indent="-228600" algn="l" defTabSz="914400" rtl="0" eaLnBrk="1" latinLnBrk="0" hangingPunct="1">
         <a:spcBef>
-          <a:spcPts val="0"/>
+          <a:spcPct val="20000"/>
         </a:spcBef>
-        <a:buFont typeface="Arial"/>
+        <a:buFont typeface="Arial" pitchFamily="34" charset="0"/>
         <a:buChar char="•"/>
-        <a:defRPr sz="2000">
+        <a:defRPr sz="2000" kern="1200">
           <a:solidFill>
             <a:schemeClr val="tx1"/>
           </a:solidFill>
@@ -2647,8 +2589,8 @@
       <a:defPPr>
         <a:defRPr lang="en-US"/>
       </a:defPPr>
-      <a:lvl1pPr marL="0" algn="l" defTabSz="914400">
-        <a:defRPr sz="1800">
+      <a:lvl1pPr marL="0" algn="l" defTabSz="914400" rtl="0" eaLnBrk="1" latinLnBrk="0" hangingPunct="1">
+        <a:defRPr sz="1800" kern="1200">
           <a:solidFill>
             <a:schemeClr val="tx1"/>
           </a:solidFill>
@@ -2657,8 +2599,8 @@
           <a:cs typeface="+mn-cs"/>
         </a:defRPr>
       </a:lvl1pPr>
-      <a:lvl2pPr marL="457200" algn="l" defTabSz="914400">
-        <a:defRPr sz="1800">
+      <a:lvl2pPr marL="457200" algn="l" defTabSz="914400" rtl="0" eaLnBrk="1" latinLnBrk="0" hangingPunct="1">
+        <a:defRPr sz="1800" kern="1200">
           <a:solidFill>
             <a:schemeClr val="tx1"/>
           </a:solidFill>
@@ -2667,8 +2609,8 @@
           <a:cs typeface="+mn-cs"/>
         </a:defRPr>
       </a:lvl2pPr>
-      <a:lvl3pPr marL="914400" algn="l" defTabSz="914400">
-        <a:defRPr sz="1800">
+      <a:lvl3pPr marL="914400" algn="l" defTabSz="914400" rtl="0" eaLnBrk="1" latinLnBrk="0" hangingPunct="1">
+        <a:defRPr sz="1800" kern="1200">
           <a:solidFill>
             <a:schemeClr val="tx1"/>
           </a:solidFill>
@@ -2677,8 +2619,8 @@
           <a:cs typeface="+mn-cs"/>
         </a:defRPr>
       </a:lvl3pPr>
-      <a:lvl4pPr marL="1371600" algn="l" defTabSz="914400">
-        <a:defRPr sz="1800">
+      <a:lvl4pPr marL="1371600" algn="l" defTabSz="914400" rtl="0" eaLnBrk="1" latinLnBrk="0" hangingPunct="1">
+        <a:defRPr sz="1800" kern="1200">
           <a:solidFill>
             <a:schemeClr val="tx1"/>
           </a:solidFill>
@@ -2687,8 +2629,8 @@
           <a:cs typeface="+mn-cs"/>
         </a:defRPr>
       </a:lvl4pPr>
-      <a:lvl5pPr marL="1828800" algn="l" defTabSz="914400">
-        <a:defRPr sz="1800">
+      <a:lvl5pPr marL="1828800" algn="l" defTabSz="914400" rtl="0" eaLnBrk="1" latinLnBrk="0" hangingPunct="1">
+        <a:defRPr sz="1800" kern="1200">
           <a:solidFill>
             <a:schemeClr val="tx1"/>
           </a:solidFill>
@@ -2697,8 +2639,8 @@
           <a:cs typeface="+mn-cs"/>
         </a:defRPr>
       </a:lvl5pPr>
-      <a:lvl6pPr marL="2286000" algn="l" defTabSz="914400">
-        <a:defRPr sz="1800">
+      <a:lvl6pPr marL="2286000" algn="l" defTabSz="914400" rtl="0" eaLnBrk="1" latinLnBrk="0" hangingPunct="1">
+        <a:defRPr sz="1800" kern="1200">
           <a:solidFill>
             <a:schemeClr val="tx1"/>
           </a:solidFill>
@@ -2707,8 +2649,8 @@
           <a:cs typeface="+mn-cs"/>
         </a:defRPr>
       </a:lvl6pPr>
-      <a:lvl7pPr marL="2743200" algn="l" defTabSz="914400">
-        <a:defRPr sz="1800">
+      <a:lvl7pPr marL="2743200" algn="l" defTabSz="914400" rtl="0" eaLnBrk="1" latinLnBrk="0" hangingPunct="1">
+        <a:defRPr sz="1800" kern="1200">
           <a:solidFill>
             <a:schemeClr val="tx1"/>
           </a:solidFill>
@@ -2717,8 +2659,8 @@
           <a:cs typeface="+mn-cs"/>
         </a:defRPr>
       </a:lvl7pPr>
-      <a:lvl8pPr marL="3200400" algn="l" defTabSz="914400">
-        <a:defRPr sz="1800">
+      <a:lvl8pPr marL="3200400" algn="l" defTabSz="914400" rtl="0" eaLnBrk="1" latinLnBrk="0" hangingPunct="1">
+        <a:defRPr sz="1800" kern="1200">
           <a:solidFill>
             <a:schemeClr val="tx1"/>
           </a:solidFill>
@@ -2727,8 +2669,8 @@
           <a:cs typeface="+mn-cs"/>
         </a:defRPr>
       </a:lvl8pPr>
-      <a:lvl9pPr marL="3657600" algn="l" defTabSz="914400">
-        <a:defRPr sz="1800">
+      <a:lvl9pPr marL="3657600" algn="l" defTabSz="914400" rtl="0" eaLnBrk="1" latinLnBrk="0" hangingPunct="1">
+        <a:defRPr sz="1800" kern="1200">
           <a:solidFill>
             <a:schemeClr val="tx1"/>
           </a:solidFill>
@@ -2743,7 +2685,7 @@
 </file>
 
 <file path=ppt/slides/slide1.xml><?xml version="1.0" encoding="utf-8"?>
-<p:sld xmlns:a="http://schemas.openxmlformats.org/drawingml/2006/main" xmlns:r="http://schemas.openxmlformats.org/officeDocument/2006/relationships" xmlns:p="http://schemas.openxmlformats.org/presentationml/2006/main" xmlns:m="http://schemas.openxmlformats.org/officeDocument/2006/math" xmlns:w="http://schemas.openxmlformats.org/wordprocessingml/2006/main" xmlns:mc="http://schemas.openxmlformats.org/markup-compatibility/2006" showMasterPhAnim="0" showMasterSp="1" show="1">
+<p:sld xmlns:a="http://schemas.openxmlformats.org/drawingml/2006/main" xmlns:r="http://schemas.openxmlformats.org/officeDocument/2006/relationships" xmlns:p="http://schemas.openxmlformats.org/presentationml/2006/main">
   <p:cSld name="Slide 1">
     <p:spTree>
       <p:nvGrpSpPr>
@@ -2751,7 +2693,7 @@
         <p:cNvGrpSpPr/>
         <p:nvPr/>
       </p:nvGrpSpPr>
-      <p:grpSpPr bwMode="auto">
+      <p:grpSpPr>
         <a:xfrm>
           <a:off x="0" y="0"/>
           <a:ext cx="0" cy="0"/>
@@ -2764,10 +2706,10 @@
           <p:cNvPr id="2" name="Text 0"/>
           <p:cNvSpPr/>
           <p:nvPr>
-            <p:ph type="title" idx="100" hasCustomPrompt="1"/>
+            <p:ph idx="100" type="title" hasCustomPrompt="1"/>
           </p:nvPr>
         </p:nvSpPr>
-        <p:spPr bwMode="auto">
+        <p:spPr>
           <a:xfrm>
             <a:off x="548640" y="1371600"/>
             <a:ext cx="8046720" cy="1371600"/>
@@ -2782,22 +2724,21 @@
           <a:bodyPr wrap="square" rtlCol="0" anchor="b"/>
           <a:lstStyle/>
           <a:p>
-            <a:pPr marL="0" indent="0" algn="l">
+            <a:pPr algn="l" indent="0" marL="0">
               <a:buNone/>
-              <a:defRPr/>
-            </a:pPr>
-            <a:r>
-              <a:rPr lang="en-US" sz="4200" b="1">
+            </a:pPr>
+            <a:r>
+              <a:rPr lang="en-US" sz="4200" b="1" dirty="0">
                 <a:solidFill>
                   <a:schemeClr val="bg1"/>
                 </a:solidFill>
-                <a:latin typeface="Cambria"/>
-                <a:ea typeface="Cambria"/>
-                <a:cs typeface="Cambria"/>
+                <a:latin typeface="Cambria" pitchFamily="34" charset="0"/>
+                <a:ea typeface="Cambria" pitchFamily="34" charset="-122"/>
+                <a:cs typeface="Cambria" pitchFamily="34" charset="-120"/>
               </a:rPr>
               <a:t>Kokoro Reader</a:t>
             </a:r>
-            <a:endParaRPr lang="en-US" sz="4200"/>
+            <a:endParaRPr lang="en-US" sz="4200" dirty="0"/>
           </a:p>
         </p:txBody>
       </p:sp>
@@ -2806,10 +2747,10 @@
           <p:cNvPr id="3" name="Text 0"/>
           <p:cNvSpPr/>
           <p:nvPr>
-            <p:ph type="body" idx="101" hasCustomPrompt="1"/>
+            <p:ph idx="101" type="body" hasCustomPrompt="1"/>
           </p:nvPr>
         </p:nvSpPr>
-        <p:spPr bwMode="auto">
+        <p:spPr>
           <a:xfrm>
             <a:off x="548640" y="2926080"/>
             <a:ext cx="8046720" cy="914400"/>
@@ -2824,34 +2765,32 @@
           <a:bodyPr wrap="square" rtlCol="0" anchor="t"/>
           <a:lstStyle/>
           <a:p>
-            <a:pPr marL="0" indent="0">
+            <a:pPr indent="0" marL="0">
               <a:buNone/>
-              <a:defRPr/>
-            </a:pPr>
-            <a:r>
-              <a:rPr lang="en-US" sz="1800">
+            </a:pPr>
+            <a:r>
+              <a:rPr lang="en-US" sz="1800" dirty="0">
                 <a:solidFill>
                   <a:schemeClr val="bg2"/>
                 </a:solidFill>
               </a:rPr>
               <a:t>Озвучка документов в Telegram с расчётами на устройстве пользователя</a:t>
             </a:r>
-            <a:endParaRPr lang="en-US" sz="1800"/>
-          </a:p>
-          <a:p>
-            <a:pPr marL="0" indent="0">
+            <a:endParaRPr lang="en-US" sz="1800" dirty="0"/>
+          </a:p>
+          <a:p>
+            <a:pPr indent="0" marL="0">
               <a:buNone/>
-              <a:defRPr/>
-            </a:pPr>
-            <a:r>
-              <a:rPr lang="en-US" sz="1800">
+            </a:pPr>
+            <a:r>
+              <a:rPr lang="en-US" sz="1800" dirty="0">
                 <a:solidFill>
                   <a:schemeClr val="bg2"/>
                 </a:solidFill>
               </a:rPr>
               <a:t>Maryna Maksimava · гибридный проект</a:t>
             </a:r>
-            <a:endParaRPr lang="en-US" sz="1800"/>
+            <a:endParaRPr lang="en-US" sz="1800" dirty="0"/>
           </a:p>
         </p:txBody>
       </p:sp>
@@ -2861,7 +2800,7 @@
           <p:cNvSpPr/>
           <p:nvPr/>
         </p:nvSpPr>
-        <p:spPr bwMode="auto">
+        <p:spPr>
           <a:xfrm>
             <a:off x="7040880" y="457200"/>
             <a:ext cx="1463040" cy="1463040"/>
@@ -2886,7 +2825,7 @@
           <p:cNvSpPr/>
           <p:nvPr/>
         </p:nvSpPr>
-        <p:spPr bwMode="auto">
+        <p:spPr>
           <a:xfrm>
             <a:off x="7406640" y="822960"/>
             <a:ext cx="731520" cy="731520"/>
@@ -2910,19 +2849,11 @@
   <p:clrMapOvr>
     <a:masterClrMapping/>
   </p:clrMapOvr>
-  <mc:AlternateContent xmlns:mc="http://schemas.openxmlformats.org/markup-compatibility/2006">
-    <mc:Choice xmlns:p159="http://schemas.microsoft.com/office/powerpoint/2015/09/main" xmlns:p14="http://schemas.microsoft.com/office/powerpoint/2010/main" Requires="p159">
-      <p:transition p14:dur="2000" advClick="1"/>
-    </mc:Choice>
-    <mc:Fallback>
-      <p:transition advClick="1"/>
-    </mc:Fallback>
-  </mc:AlternateContent>
 </p:sld>
 </file>
 
 <file path=ppt/slides/slide10.xml><?xml version="1.0" encoding="utf-8"?>
-<p:sld xmlns:a="http://schemas.openxmlformats.org/drawingml/2006/main" xmlns:r="http://schemas.openxmlformats.org/officeDocument/2006/relationships" xmlns:p="http://schemas.openxmlformats.org/presentationml/2006/main" xmlns:m="http://schemas.openxmlformats.org/officeDocument/2006/math" xmlns:w="http://schemas.openxmlformats.org/wordprocessingml/2006/main" xmlns:mc="http://schemas.openxmlformats.org/markup-compatibility/2006" showMasterPhAnim="0" showMasterSp="1" show="1">
+<p:sld xmlns:a="http://schemas.openxmlformats.org/drawingml/2006/main" xmlns:r="http://schemas.openxmlformats.org/officeDocument/2006/relationships" xmlns:p="http://schemas.openxmlformats.org/presentationml/2006/main">
   <p:cSld name="Slide 10">
     <p:spTree>
       <p:nvGrpSpPr>
@@ -2930,7 +2861,7 @@
         <p:cNvGrpSpPr/>
         <p:nvPr/>
       </p:nvGrpSpPr>
-      <p:grpSpPr bwMode="auto">
+      <p:grpSpPr>
         <a:xfrm>
           <a:off x="0" y="0"/>
           <a:ext cx="0" cy="0"/>
@@ -2943,10 +2874,10 @@
           <p:cNvPr id="2" name="Text 0"/>
           <p:cNvSpPr/>
           <p:nvPr>
-            <p:ph type="title" idx="100" hasCustomPrompt="1"/>
+            <p:ph idx="100" type="title" hasCustomPrompt="1"/>
           </p:nvPr>
         </p:nvSpPr>
-        <p:spPr bwMode="auto">
+        <p:spPr>
           <a:xfrm>
             <a:off x="548640" y="320040"/>
             <a:ext cx="8046720" cy="822960"/>
@@ -2961,22 +2892,21 @@
           <a:bodyPr wrap="square" rtlCol="0" anchor="ctr"/>
           <a:lstStyle/>
           <a:p>
-            <a:pPr marL="0" indent="0">
+            <a:pPr indent="0" marL="0">
               <a:buNone/>
-              <a:defRPr/>
-            </a:pPr>
-            <a:r>
-              <a:rPr lang="en-US" sz="3200" b="1">
+            </a:pPr>
+            <a:r>
+              <a:rPr lang="en-US" sz="3200" b="1" dirty="0">
                 <a:solidFill>
                   <a:schemeClr val="bg1"/>
                 </a:solidFill>
-                <a:latin typeface="Cambria"/>
-                <a:ea typeface="Cambria"/>
-                <a:cs typeface="Cambria"/>
+                <a:latin typeface="Cambria" pitchFamily="34" charset="0"/>
+                <a:ea typeface="Cambria" pitchFamily="34" charset="-122"/>
+                <a:cs typeface="Cambria" pitchFamily="34" charset="-120"/>
               </a:rPr>
               <a:t>Кто что делал и сколько это стоило</a:t>
             </a:r>
-            <a:endParaRPr lang="en-US" sz="3200"/>
+            <a:endParaRPr lang="en-US" sz="3200" dirty="0"/>
           </a:p>
         </p:txBody>
       </p:sp>
@@ -2986,7 +2916,7 @@
           <p:cNvSpPr/>
           <p:nvPr/>
         </p:nvSpPr>
-        <p:spPr bwMode="auto">
+        <p:spPr>
           <a:xfrm>
             <a:off x="548640" y="1463040"/>
             <a:ext cx="2560320" cy="2834640"/>
@@ -3013,7 +2943,7 @@
           <p:cNvSpPr/>
           <p:nvPr/>
         </p:nvSpPr>
-        <p:spPr bwMode="auto">
+        <p:spPr>
           <a:xfrm>
             <a:off x="777240" y="1691640"/>
             <a:ext cx="411480" cy="411480"/>
@@ -3038,7 +2968,7 @@
           <p:cNvSpPr txBox="1"/>
           <p:nvPr/>
         </p:nvSpPr>
-        <p:spPr bwMode="auto">
+        <p:spPr>
           <a:xfrm>
             <a:off x="777240" y="2240280"/>
             <a:ext cx="2103120" cy="457200"/>
@@ -3053,22 +2983,21 @@
           <a:bodyPr wrap="square" lIns="0" tIns="0" rIns="0" bIns="0" rtlCol="0" anchor="ctr"/>
           <a:lstStyle/>
           <a:p>
-            <a:pPr marL="0" indent="0">
+            <a:pPr indent="0" marL="0">
               <a:buNone/>
-              <a:defRPr/>
-            </a:pPr>
-            <a:r>
-              <a:rPr lang="en-US" sz="2000" b="1">
+            </a:pPr>
+            <a:r>
+              <a:rPr lang="en-US" sz="2000" b="1" dirty="0">
                 <a:solidFill>
                   <a:schemeClr val="bg1"/>
                 </a:solidFill>
-                <a:latin typeface="Cambria"/>
-                <a:ea typeface="Cambria"/>
-                <a:cs typeface="Cambria"/>
+                <a:latin typeface="Cambria" pitchFamily="34" charset="0"/>
+                <a:ea typeface="Cambria" pitchFamily="34" charset="-122"/>
+                <a:cs typeface="Cambria" pitchFamily="34" charset="-120"/>
               </a:rPr>
               <a:t>Человек</a:t>
             </a:r>
-            <a:endParaRPr lang="en-US" sz="2000"/>
+            <a:endParaRPr lang="en-US" sz="2000" dirty="0"/>
           </a:p>
         </p:txBody>
       </p:sp>
@@ -3078,7 +3007,7 @@
           <p:cNvSpPr txBox="1"/>
           <p:nvPr/>
         </p:nvSpPr>
-        <p:spPr bwMode="auto">
+        <p:spPr>
           <a:xfrm>
             <a:off x="777240" y="2743200"/>
             <a:ext cx="2103120" cy="1463040"/>
@@ -3093,19 +3022,18 @@
           <a:bodyPr wrap="square" lIns="0" tIns="0" rIns="0" bIns="0" rtlCol="0" anchor="t"/>
           <a:lstStyle/>
           <a:p>
-            <a:pPr marL="0" indent="0">
+            <a:pPr indent="0" marL="0">
               <a:buNone/>
-              <a:defRPr/>
-            </a:pPr>
-            <a:r>
-              <a:rPr lang="en-US" sz="1400">
+            </a:pPr>
+            <a:r>
+              <a:rPr lang="en-US" sz="1400" dirty="0">
                 <a:solidFill>
                   <a:schemeClr val="bg2"/>
                 </a:solidFill>
               </a:rPr>
               <a:t>Цели и решения, создание бота и репозитория, тесты на телефоне, поиск ошибок, оценка звука на слух</a:t>
             </a:r>
-            <a:endParaRPr lang="en-US" sz="1400"/>
+            <a:endParaRPr lang="en-US" sz="1400" dirty="0"/>
           </a:p>
         </p:txBody>
       </p:sp>
@@ -3115,7 +3043,7 @@
           <p:cNvSpPr/>
           <p:nvPr/>
         </p:nvSpPr>
-        <p:spPr bwMode="auto">
+        <p:spPr>
           <a:xfrm>
             <a:off x="3291840" y="1463040"/>
             <a:ext cx="2560320" cy="2834640"/>
@@ -3142,7 +3070,7 @@
           <p:cNvSpPr/>
           <p:nvPr/>
         </p:nvSpPr>
-        <p:spPr bwMode="auto">
+        <p:spPr>
           <a:xfrm>
             <a:off x="3520440" y="1691640"/>
             <a:ext cx="411480" cy="411480"/>
@@ -3167,7 +3095,7 @@
           <p:cNvSpPr txBox="1"/>
           <p:nvPr/>
         </p:nvSpPr>
-        <p:spPr bwMode="auto">
+        <p:spPr>
           <a:xfrm>
             <a:off x="3520440" y="2240280"/>
             <a:ext cx="2103120" cy="457200"/>
@@ -3182,22 +3110,21 @@
           <a:bodyPr wrap="square" lIns="0" tIns="0" rIns="0" bIns="0" rtlCol="0" anchor="ctr"/>
           <a:lstStyle/>
           <a:p>
-            <a:pPr marL="0" indent="0">
+            <a:pPr indent="0" marL="0">
               <a:buNone/>
-              <a:defRPr/>
-            </a:pPr>
-            <a:r>
-              <a:rPr lang="en-US" sz="2000" b="1">
+            </a:pPr>
+            <a:r>
+              <a:rPr lang="en-US" sz="2000" b="1" dirty="0">
                 <a:solidFill>
                   <a:schemeClr val="bg1"/>
                 </a:solidFill>
-                <a:latin typeface="Cambria"/>
-                <a:ea typeface="Cambria"/>
-                <a:cs typeface="Cambria"/>
+                <a:latin typeface="Cambria" pitchFamily="34" charset="0"/>
+                <a:ea typeface="Cambria" pitchFamily="34" charset="-122"/>
+                <a:cs typeface="Cambria" pitchFamily="34" charset="-120"/>
               </a:rPr>
               <a:t>AI-агент</a:t>
             </a:r>
-            <a:endParaRPr lang="en-US" sz="2000"/>
+            <a:endParaRPr lang="en-US" sz="2000" dirty="0"/>
           </a:p>
         </p:txBody>
       </p:sp>
@@ -3207,7 +3134,7 @@
           <p:cNvSpPr txBox="1"/>
           <p:nvPr/>
         </p:nvSpPr>
-        <p:spPr bwMode="auto">
+        <p:spPr>
           <a:xfrm>
             <a:off x="3520440" y="2743200"/>
             <a:ext cx="2103120" cy="1463040"/>
@@ -3222,19 +3149,18 @@
           <a:bodyPr wrap="square" lIns="0" tIns="0" rIns="0" bIns="0" rtlCol="0" anchor="t"/>
           <a:lstStyle/>
           <a:p>
-            <a:pPr marL="0" indent="0">
+            <a:pPr indent="0" marL="0">
               <a:buNone/>
-              <a:defRPr/>
-            </a:pPr>
-            <a:r>
-              <a:rPr lang="en-US" sz="1400">
+            </a:pPr>
+            <a:r>
+              <a:rPr lang="en-US" sz="1400" dirty="0">
                 <a:solidFill>
                   <a:schemeClr val="bg2"/>
                 </a:solidFill>
               </a:rPr>
               <a:t>Код, тесты, CI, эксперимент, документы; считает и честно сообщает, что не проверено</a:t>
             </a:r>
-            <a:endParaRPr lang="en-US" sz="1400"/>
+            <a:endParaRPr lang="en-US" sz="1400" dirty="0"/>
           </a:p>
         </p:txBody>
       </p:sp>
@@ -3244,9 +3170,9 @@
           <p:cNvSpPr/>
           <p:nvPr/>
         </p:nvSpPr>
-        <p:spPr bwMode="auto">
-          <a:xfrm>
-            <a:off x="6035039" y="1463040"/>
+        <p:spPr>
+          <a:xfrm>
+            <a:off x="6035040" y="1463040"/>
             <a:ext cx="2560320" cy="2834640"/>
           </a:xfrm>
           <a:prstGeom prst="roundRect">
@@ -3271,7 +3197,7 @@
           <p:cNvSpPr/>
           <p:nvPr/>
         </p:nvSpPr>
-        <p:spPr bwMode="auto">
+        <p:spPr>
           <a:xfrm>
             <a:off x="6263640" y="1691640"/>
             <a:ext cx="411480" cy="411480"/>
@@ -3296,7 +3222,7 @@
           <p:cNvSpPr txBox="1"/>
           <p:nvPr/>
         </p:nvSpPr>
-        <p:spPr bwMode="auto">
+        <p:spPr>
           <a:xfrm>
             <a:off x="6263640" y="2240280"/>
             <a:ext cx="2103120" cy="457200"/>
@@ -3311,22 +3237,21 @@
           <a:bodyPr wrap="square" lIns="0" tIns="0" rIns="0" bIns="0" rtlCol="0" anchor="ctr"/>
           <a:lstStyle/>
           <a:p>
-            <a:pPr marL="0" indent="0">
+            <a:pPr indent="0" marL="0">
               <a:buNone/>
-              <a:defRPr/>
-            </a:pPr>
-            <a:r>
-              <a:rPr lang="en-US" sz="2000" b="1">
+            </a:pPr>
+            <a:r>
+              <a:rPr lang="en-US" sz="2000" b="1" dirty="0">
                 <a:solidFill>
                   <a:schemeClr val="bg1"/>
                 </a:solidFill>
-                <a:latin typeface="Cambria"/>
-                <a:ea typeface="Cambria"/>
-                <a:cs typeface="Cambria"/>
+                <a:latin typeface="Cambria" pitchFamily="34" charset="0"/>
+                <a:ea typeface="Cambria" pitchFamily="34" charset="-122"/>
+                <a:cs typeface="Cambria" pitchFamily="34" charset="-120"/>
               </a:rPr>
               <a:t>Стоимость</a:t>
             </a:r>
-            <a:endParaRPr lang="en-US" sz="2000"/>
+            <a:endParaRPr lang="en-US" sz="2000" dirty="0"/>
           </a:p>
         </p:txBody>
       </p:sp>
@@ -3336,7 +3261,7 @@
           <p:cNvSpPr txBox="1"/>
           <p:nvPr/>
         </p:nvSpPr>
-        <p:spPr bwMode="auto">
+        <p:spPr>
           <a:xfrm>
             <a:off x="6263640" y="2743200"/>
             <a:ext cx="2103120" cy="1463040"/>
@@ -3351,42 +3276,18 @@
           <a:bodyPr wrap="square" lIns="0" tIns="0" rIns="0" bIns="0" rtlCol="0" anchor="t"/>
           <a:lstStyle/>
           <a:p>
-            <a:pPr marL="0" indent="0">
+            <a:pPr indent="0" marL="0">
               <a:buNone/>
-              <a:defRPr/>
-            </a:pPr>
-            <a:r>
-              <a:rPr lang="en-US" sz="1400">
+            </a:pPr>
+            <a:r>
+              <a:rPr lang="en-US" sz="1400" dirty="0">
                 <a:solidFill>
                   <a:schemeClr val="bg2"/>
                 </a:solidFill>
               </a:rPr>
               <a:t>Платных облачных ресурсов нет: GitHub Pages, Actions и модель бесплатны</a:t>
             </a:r>
-            <a:r>
-              <a:rPr lang="ru-RU" sz="1400">
-                <a:solidFill>
-                  <a:schemeClr val="bg2"/>
-                </a:solidFill>
-              </a:rPr>
-              <a:t>.</a:t>
-            </a:r>
-            <a:br>
-              <a:rPr lang="ru-RU" sz="1400">
-                <a:solidFill>
-                  <a:schemeClr val="bg2"/>
-                </a:solidFill>
-              </a:rPr>
-            </a:br>
-            <a:r>
-              <a:rPr lang="ru-RU" sz="1400">
-                <a:solidFill>
-                  <a:schemeClr val="bg2"/>
-                </a:solidFill>
-              </a:rPr>
-              <a:t>Подписка на ИИ - 20 долларов.</a:t>
-            </a:r>
-            <a:endParaRPr lang="en-US" sz="1400"/>
+            <a:endParaRPr lang="en-US" sz="1400" dirty="0"/>
           </a:p>
         </p:txBody>
       </p:sp>
@@ -3395,19 +3296,11 @@
   <p:clrMapOvr>
     <a:masterClrMapping/>
   </p:clrMapOvr>
-  <mc:AlternateContent xmlns:mc="http://schemas.openxmlformats.org/markup-compatibility/2006">
-    <mc:Choice xmlns:p159="http://schemas.microsoft.com/office/powerpoint/2015/09/main" xmlns:p14="http://schemas.microsoft.com/office/powerpoint/2010/main" Requires="p159">
-      <p:transition p14:dur="2000" advClick="1"/>
-    </mc:Choice>
-    <mc:Fallback>
-      <p:transition advClick="1"/>
-    </mc:Fallback>
-  </mc:AlternateContent>
 </p:sld>
 </file>
 
 <file path=ppt/slides/slide2.xml><?xml version="1.0" encoding="utf-8"?>
-<p:sld xmlns:a="http://schemas.openxmlformats.org/drawingml/2006/main" xmlns:r="http://schemas.openxmlformats.org/officeDocument/2006/relationships" xmlns:p="http://schemas.openxmlformats.org/presentationml/2006/main" xmlns:m="http://schemas.openxmlformats.org/officeDocument/2006/math" xmlns:w="http://schemas.openxmlformats.org/wordprocessingml/2006/main" xmlns:mc="http://schemas.openxmlformats.org/markup-compatibility/2006" showMasterPhAnim="0" showMasterSp="1" show="1">
+<p:sld xmlns:a="http://schemas.openxmlformats.org/drawingml/2006/main" xmlns:r="http://schemas.openxmlformats.org/officeDocument/2006/relationships" xmlns:p="http://schemas.openxmlformats.org/presentationml/2006/main">
   <p:cSld name="Slide 2">
     <p:spTree>
       <p:nvGrpSpPr>
@@ -3415,7 +3308,7 @@
         <p:cNvGrpSpPr/>
         <p:nvPr/>
       </p:nvGrpSpPr>
-      <p:grpSpPr bwMode="auto">
+      <p:grpSpPr>
         <a:xfrm>
           <a:off x="0" y="0"/>
           <a:ext cx="0" cy="0"/>
@@ -3428,10 +3321,10 @@
           <p:cNvPr id="2" name="Text 0"/>
           <p:cNvSpPr/>
           <p:nvPr>
-            <p:ph type="title" idx="100" hasCustomPrompt="1"/>
+            <p:ph idx="100" type="title" hasCustomPrompt="1"/>
           </p:nvPr>
         </p:nvSpPr>
-        <p:spPr bwMode="auto">
+        <p:spPr>
           <a:xfrm>
             <a:off x="548640" y="320040"/>
             <a:ext cx="8046720" cy="822960"/>
@@ -3446,22 +3339,21 @@
           <a:bodyPr wrap="square" rtlCol="0" anchor="ctr"/>
           <a:lstStyle/>
           <a:p>
-            <a:pPr marL="0" indent="0">
+            <a:pPr indent="0" marL="0">
               <a:buNone/>
-              <a:defRPr/>
-            </a:pPr>
-            <a:r>
-              <a:rPr lang="en-US" sz="3200" b="1">
+            </a:pPr>
+            <a:r>
+              <a:rPr lang="en-US" sz="3200" b="1" dirty="0">
                 <a:solidFill>
                   <a:schemeClr val="tx1"/>
                 </a:solidFill>
-                <a:latin typeface="Cambria"/>
-                <a:ea typeface="Cambria"/>
-                <a:cs typeface="Cambria"/>
+                <a:latin typeface="Cambria" pitchFamily="34" charset="0"/>
+                <a:ea typeface="Cambria" pitchFamily="34" charset="-122"/>
+                <a:cs typeface="Cambria" pitchFamily="34" charset="-120"/>
               </a:rPr>
               <a:t>Слушать документы вместо чтения</a:t>
             </a:r>
-            <a:endParaRPr lang="en-US" sz="3200"/>
+            <a:endParaRPr lang="en-US" sz="3200" dirty="0"/>
           </a:p>
         </p:txBody>
       </p:sp>
@@ -3471,7 +3363,7 @@
           <p:cNvSpPr/>
           <p:nvPr/>
         </p:nvSpPr>
-        <p:spPr bwMode="auto">
+        <p:spPr>
           <a:xfrm>
             <a:off x="548640" y="1463040"/>
             <a:ext cx="2560320" cy="2743200"/>
@@ -3498,7 +3390,7 @@
           <p:cNvSpPr txBox="1"/>
           <p:nvPr/>
         </p:nvSpPr>
-        <p:spPr bwMode="auto">
+        <p:spPr>
           <a:xfrm>
             <a:off x="777240" y="1645920"/>
             <a:ext cx="1371600" cy="731520"/>
@@ -3513,22 +3405,21 @@
           <a:bodyPr wrap="square" lIns="0" tIns="0" rIns="0" bIns="0" rtlCol="0" anchor="ctr"/>
           <a:lstStyle/>
           <a:p>
-            <a:pPr marL="0" indent="0">
+            <a:pPr indent="0" marL="0">
               <a:buNone/>
-              <a:defRPr/>
-            </a:pPr>
-            <a:r>
-              <a:rPr lang="en-US" sz="4000" b="1">
+            </a:pPr>
+            <a:r>
+              <a:rPr lang="en-US" sz="4000" b="1" dirty="0">
                 <a:solidFill>
                   <a:schemeClr val="accent1"/>
                 </a:solidFill>
-                <a:latin typeface="Cambria"/>
-                <a:ea typeface="Cambria"/>
-                <a:cs typeface="Cambria"/>
+                <a:latin typeface="Cambria" pitchFamily="34" charset="0"/>
+                <a:ea typeface="Cambria" pitchFamily="34" charset="-122"/>
+                <a:cs typeface="Cambria" pitchFamily="34" charset="-120"/>
               </a:rPr>
               <a:t>01</a:t>
             </a:r>
-            <a:endParaRPr lang="en-US" sz="4000"/>
+            <a:endParaRPr lang="en-US" sz="4000" dirty="0"/>
           </a:p>
         </p:txBody>
       </p:sp>
@@ -3538,7 +3429,7 @@
           <p:cNvSpPr txBox="1"/>
           <p:nvPr/>
         </p:nvSpPr>
-        <p:spPr bwMode="auto">
+        <p:spPr>
           <a:xfrm>
             <a:off x="777240" y="2468880"/>
             <a:ext cx="2103120" cy="457200"/>
@@ -3553,22 +3444,21 @@
           <a:bodyPr wrap="square" lIns="0" tIns="0" rIns="0" bIns="0" rtlCol="0" anchor="ctr"/>
           <a:lstStyle/>
           <a:p>
-            <a:pPr marL="0" indent="0">
+            <a:pPr indent="0" marL="0">
               <a:buNone/>
-              <a:defRPr/>
-            </a:pPr>
-            <a:r>
-              <a:rPr lang="en-US" sz="2200" b="1">
+            </a:pPr>
+            <a:r>
+              <a:rPr lang="en-US" sz="2200" b="1" dirty="0">
                 <a:solidFill>
                   <a:schemeClr val="tx1"/>
                 </a:solidFill>
-                <a:latin typeface="Cambria"/>
-                <a:ea typeface="Cambria"/>
-                <a:cs typeface="Cambria"/>
+                <a:latin typeface="Cambria" pitchFamily="34" charset="0"/>
+                <a:ea typeface="Cambria" pitchFamily="34" charset="-122"/>
+                <a:cs typeface="Cambria" pitchFamily="34" charset="-120"/>
               </a:rPr>
               <a:t>Бесплатно</a:t>
             </a:r>
-            <a:endParaRPr lang="en-US" sz="2200"/>
+            <a:endParaRPr lang="en-US" sz="2200" dirty="0"/>
           </a:p>
         </p:txBody>
       </p:sp>
@@ -3578,9 +3468,9 @@
           <p:cNvSpPr txBox="1"/>
           <p:nvPr/>
         </p:nvSpPr>
-        <p:spPr bwMode="auto">
-          <a:xfrm>
-            <a:off x="777240" y="3017519"/>
+        <p:spPr>
+          <a:xfrm>
+            <a:off x="777240" y="3017520"/>
             <a:ext cx="2103120" cy="1005840"/>
           </a:xfrm>
           <a:prstGeom prst="rect">
@@ -3593,19 +3483,18 @@
           <a:bodyPr wrap="square" lIns="0" tIns="0" rIns="0" bIns="0" rtlCol="0" anchor="t"/>
           <a:lstStyle/>
           <a:p>
-            <a:pPr marL="0" indent="0">
+            <a:pPr indent="0" marL="0">
               <a:buNone/>
-              <a:defRPr/>
-            </a:pPr>
-            <a:r>
-              <a:rPr lang="en-US" sz="1400">
+            </a:pPr>
+            <a:r>
+              <a:rPr lang="en-US" sz="1400" dirty="0">
                 <a:solidFill>
                   <a:schemeClr val="tx2"/>
                 </a:solidFill>
               </a:rPr>
               <a:t>Открытая модель Kokoro-82M, без платных API и подписок</a:t>
             </a:r>
-            <a:endParaRPr lang="en-US" sz="1400"/>
+            <a:endParaRPr lang="en-US" sz="1400" dirty="0"/>
           </a:p>
         </p:txBody>
       </p:sp>
@@ -3615,7 +3504,7 @@
           <p:cNvSpPr/>
           <p:nvPr/>
         </p:nvSpPr>
-        <p:spPr bwMode="auto">
+        <p:spPr>
           <a:xfrm>
             <a:off x="3291840" y="1463040"/>
             <a:ext cx="2560320" cy="2743200"/>
@@ -3642,7 +3531,7 @@
           <p:cNvSpPr txBox="1"/>
           <p:nvPr/>
         </p:nvSpPr>
-        <p:spPr bwMode="auto">
+        <p:spPr>
           <a:xfrm>
             <a:off x="3520440" y="1645920"/>
             <a:ext cx="1371600" cy="731520"/>
@@ -3657,22 +3546,21 @@
           <a:bodyPr wrap="square" lIns="0" tIns="0" rIns="0" bIns="0" rtlCol="0" anchor="ctr"/>
           <a:lstStyle/>
           <a:p>
-            <a:pPr marL="0" indent="0">
+            <a:pPr indent="0" marL="0">
               <a:buNone/>
-              <a:defRPr/>
-            </a:pPr>
-            <a:r>
-              <a:rPr lang="en-US" sz="4000" b="1">
+            </a:pPr>
+            <a:r>
+              <a:rPr lang="en-US" sz="4000" b="1" dirty="0">
                 <a:solidFill>
                   <a:schemeClr val="accent2"/>
                 </a:solidFill>
-                <a:latin typeface="Cambria"/>
-                <a:ea typeface="Cambria"/>
-                <a:cs typeface="Cambria"/>
+                <a:latin typeface="Cambria" pitchFamily="34" charset="0"/>
+                <a:ea typeface="Cambria" pitchFamily="34" charset="-122"/>
+                <a:cs typeface="Cambria" pitchFamily="34" charset="-120"/>
               </a:rPr>
               <a:t>02</a:t>
             </a:r>
-            <a:endParaRPr lang="en-US" sz="4000"/>
+            <a:endParaRPr lang="en-US" sz="4000" dirty="0"/>
           </a:p>
         </p:txBody>
       </p:sp>
@@ -3682,7 +3570,7 @@
           <p:cNvSpPr txBox="1"/>
           <p:nvPr/>
         </p:nvSpPr>
-        <p:spPr bwMode="auto">
+        <p:spPr>
           <a:xfrm>
             <a:off x="3520440" y="2468880"/>
             <a:ext cx="2103120" cy="457200"/>
@@ -3697,22 +3585,21 @@
           <a:bodyPr wrap="square" lIns="0" tIns="0" rIns="0" bIns="0" rtlCol="0" anchor="ctr"/>
           <a:lstStyle/>
           <a:p>
-            <a:pPr marL="0" indent="0">
+            <a:pPr indent="0" marL="0">
               <a:buNone/>
-              <a:defRPr/>
-            </a:pPr>
-            <a:r>
-              <a:rPr lang="en-US" sz="2200" b="1">
+            </a:pPr>
+            <a:r>
+              <a:rPr lang="en-US" sz="2200" b="1" dirty="0">
                 <a:solidFill>
                   <a:schemeClr val="tx1"/>
                 </a:solidFill>
-                <a:latin typeface="Cambria"/>
-                <a:ea typeface="Cambria"/>
-                <a:cs typeface="Cambria"/>
+                <a:latin typeface="Cambria" pitchFamily="34" charset="0"/>
+                <a:ea typeface="Cambria" pitchFamily="34" charset="-122"/>
+                <a:cs typeface="Cambria" pitchFamily="34" charset="-120"/>
               </a:rPr>
               <a:t>Быстро</a:t>
             </a:r>
-            <a:endParaRPr lang="en-US" sz="2200"/>
+            <a:endParaRPr lang="en-US" sz="2200" dirty="0"/>
           </a:p>
         </p:txBody>
       </p:sp>
@@ -3722,9 +3609,9 @@
           <p:cNvSpPr txBox="1"/>
           <p:nvPr/>
         </p:nvSpPr>
-        <p:spPr bwMode="auto">
-          <a:xfrm>
-            <a:off x="3520440" y="3017519"/>
+        <p:spPr>
+          <a:xfrm>
+            <a:off x="3520440" y="3017520"/>
             <a:ext cx="2103120" cy="1005840"/>
           </a:xfrm>
           <a:prstGeom prst="rect">
@@ -3737,19 +3624,18 @@
           <a:bodyPr wrap="square" lIns="0" tIns="0" rIns="0" bIns="0" rtlCol="0" anchor="t"/>
           <a:lstStyle/>
           <a:p>
-            <a:pPr marL="0" indent="0">
+            <a:pPr indent="0" marL="0">
               <a:buNone/>
-              <a:defRPr/>
-            </a:pPr>
-            <a:r>
-              <a:rPr lang="en-US" sz="1400">
+            </a:pPr>
+            <a:r>
+              <a:rPr lang="en-US" sz="1400" dirty="0">
                 <a:solidFill>
                   <a:schemeClr val="tx2"/>
                 </a:solidFill>
               </a:rPr>
               <a:t>Около 3× реального времени на обычном процессоре</a:t>
             </a:r>
-            <a:endParaRPr lang="en-US" sz="1400"/>
+            <a:endParaRPr lang="en-US" sz="1400" dirty="0"/>
           </a:p>
         </p:txBody>
       </p:sp>
@@ -3759,9 +3645,9 @@
           <p:cNvSpPr/>
           <p:nvPr/>
         </p:nvSpPr>
-        <p:spPr bwMode="auto">
-          <a:xfrm>
-            <a:off x="6035039" y="1463040"/>
+        <p:spPr>
+          <a:xfrm>
+            <a:off x="6035040" y="1463040"/>
             <a:ext cx="2560320" cy="2743200"/>
           </a:xfrm>
           <a:prstGeom prst="roundRect">
@@ -3786,7 +3672,7 @@
           <p:cNvSpPr txBox="1"/>
           <p:nvPr/>
         </p:nvSpPr>
-        <p:spPr bwMode="auto">
+        <p:spPr>
           <a:xfrm>
             <a:off x="6263640" y="1645920"/>
             <a:ext cx="1371600" cy="731520"/>
@@ -3801,22 +3687,21 @@
           <a:bodyPr wrap="square" lIns="0" tIns="0" rIns="0" bIns="0" rtlCol="0" anchor="ctr"/>
           <a:lstStyle/>
           <a:p>
-            <a:pPr marL="0" indent="0">
+            <a:pPr indent="0" marL="0">
               <a:buNone/>
-              <a:defRPr/>
-            </a:pPr>
-            <a:r>
-              <a:rPr lang="en-US" sz="4000" b="1">
+            </a:pPr>
+            <a:r>
+              <a:rPr lang="en-US" sz="4000" b="1" dirty="0">
                 <a:solidFill>
                   <a:schemeClr val="accent4"/>
                 </a:solidFill>
-                <a:latin typeface="Cambria"/>
-                <a:ea typeface="Cambria"/>
-                <a:cs typeface="Cambria"/>
+                <a:latin typeface="Cambria" pitchFamily="34" charset="0"/>
+                <a:ea typeface="Cambria" pitchFamily="34" charset="-122"/>
+                <a:cs typeface="Cambria" pitchFamily="34" charset="-120"/>
               </a:rPr>
               <a:t>03</a:t>
             </a:r>
-            <a:endParaRPr lang="en-US" sz="4000"/>
+            <a:endParaRPr lang="en-US" sz="4000" dirty="0"/>
           </a:p>
         </p:txBody>
       </p:sp>
@@ -3826,7 +3711,7 @@
           <p:cNvSpPr txBox="1"/>
           <p:nvPr/>
         </p:nvSpPr>
-        <p:spPr bwMode="auto">
+        <p:spPr>
           <a:xfrm>
             <a:off x="6263640" y="2468880"/>
             <a:ext cx="2103120" cy="457200"/>
@@ -3841,22 +3726,21 @@
           <a:bodyPr wrap="square" lIns="0" tIns="0" rIns="0" bIns="0" rtlCol="0" anchor="ctr"/>
           <a:lstStyle/>
           <a:p>
-            <a:pPr marL="0" indent="0">
+            <a:pPr indent="0" marL="0">
               <a:buNone/>
-              <a:defRPr/>
-            </a:pPr>
-            <a:r>
-              <a:rPr lang="en-US" sz="2200" b="1">
+            </a:pPr>
+            <a:r>
+              <a:rPr lang="en-US" sz="2200" b="1" dirty="0">
                 <a:solidFill>
                   <a:schemeClr val="tx1"/>
                 </a:solidFill>
-                <a:latin typeface="Cambria"/>
-                <a:ea typeface="Cambria"/>
-                <a:cs typeface="Cambria"/>
+                <a:latin typeface="Cambria" pitchFamily="34" charset="0"/>
+                <a:ea typeface="Cambria" pitchFamily="34" charset="-122"/>
+                <a:cs typeface="Cambria" pitchFamily="34" charset="-120"/>
               </a:rPr>
               <a:t>Естественно</a:t>
             </a:r>
-            <a:endParaRPr lang="en-US" sz="2200"/>
+            <a:endParaRPr lang="en-US" sz="2200" dirty="0"/>
           </a:p>
         </p:txBody>
       </p:sp>
@@ -3866,9 +3750,9 @@
           <p:cNvSpPr txBox="1"/>
           <p:nvPr/>
         </p:nvSpPr>
-        <p:spPr bwMode="auto">
-          <a:xfrm>
-            <a:off x="6263640" y="3017519"/>
+        <p:spPr>
+          <a:xfrm>
+            <a:off x="6263640" y="3017520"/>
             <a:ext cx="2103120" cy="1005840"/>
           </a:xfrm>
           <a:prstGeom prst="rect">
@@ -3881,19 +3765,18 @@
           <a:bodyPr wrap="square" lIns="0" tIns="0" rIns="0" bIns="0" rtlCol="0" anchor="t"/>
           <a:lstStyle/>
           <a:p>
-            <a:pPr marL="0" indent="0">
+            <a:pPr indent="0" marL="0">
               <a:buNone/>
-              <a:defRPr/>
-            </a:pPr>
-            <a:r>
-              <a:rPr lang="en-US" sz="1400">
+            </a:pPr>
+            <a:r>
+              <a:rPr lang="en-US" sz="1400" dirty="0">
                 <a:solidFill>
                   <a:schemeClr val="tx2"/>
                 </a:solidFill>
               </a:rPr>
               <a:t>Речь, которую приятно слушать, а не «робот»</a:t>
             </a:r>
-            <a:endParaRPr lang="en-US" sz="1400"/>
+            <a:endParaRPr lang="en-US" sz="1400" dirty="0"/>
           </a:p>
         </p:txBody>
       </p:sp>
@@ -3907,14 +3790,19 @@
             <p:ph type="sldNum" sz="quarter" idx="4294967295"/>
           </p:nvPr>
         </p:nvSpPr>
-        <p:spPr bwMode="auto">
-          <a:xfrm>
-            <a:off x="8321039" y="4754880"/>
+        <p:spPr>
+          <a:xfrm>
+            <a:off x="8321040" y="4754880"/>
             <a:ext cx="457200" cy="228600"/>
           </a:xfrm>
           <a:prstGeom prst="rect">
             <a:avLst/>
           </a:prstGeom>
+          <a:extLst>
+            <a:ext uri="{C572A759-6A51-4108-AA02-DFA0A04FC94B}">
+              <ma14:wrappingTextBoxFlag xmlns:ma14="http://schemas.microsoft.com/office/mac/drawingml/2011/main" val="0"/>
+            </a:ext>
+          </a:extLst>
         </p:spPr>
         <p:txBody>
           <a:bodyPr/>
@@ -3928,11 +3816,9 @@
             </a:lvl1pPr>
           </a:lstStyle>
           <a:p>
-            <a:pPr algn="l">
-              <a:defRPr/>
-            </a:pPr>
+            <a:pPr algn="l"/>
             <a:fld id="{F7021451-1387-4CA6-816F-3879F97B5CBC}" type="slidenum">
-              <a:rPr lang="en-US" b="0"/>
+              <a:rPr b="0" lang="en-US"/>
               <a:t>2</a:t>
             </a:fld>
             <a:endParaRPr lang="en-US"/>
@@ -3944,19 +3830,11 @@
   <p:clrMapOvr>
     <a:masterClrMapping/>
   </p:clrMapOvr>
-  <mc:AlternateContent xmlns:mc="http://schemas.openxmlformats.org/markup-compatibility/2006">
-    <mc:Choice xmlns:p159="http://schemas.microsoft.com/office/powerpoint/2015/09/main" xmlns:p14="http://schemas.microsoft.com/office/powerpoint/2010/main" Requires="p159">
-      <p:transition p14:dur="2000" advClick="1"/>
-    </mc:Choice>
-    <mc:Fallback>
-      <p:transition advClick="1"/>
-    </mc:Fallback>
-  </mc:AlternateContent>
 </p:sld>
 </file>
 
 <file path=ppt/slides/slide3.xml><?xml version="1.0" encoding="utf-8"?>
-<p:sld xmlns:a="http://schemas.openxmlformats.org/drawingml/2006/main" xmlns:r="http://schemas.openxmlformats.org/officeDocument/2006/relationships" xmlns:p="http://schemas.openxmlformats.org/presentationml/2006/main" xmlns:m="http://schemas.openxmlformats.org/officeDocument/2006/math" xmlns:w="http://schemas.openxmlformats.org/wordprocessingml/2006/main" xmlns:mc="http://schemas.openxmlformats.org/markup-compatibility/2006" showMasterPhAnim="0" showMasterSp="1" show="1">
+<p:sld xmlns:a="http://schemas.openxmlformats.org/drawingml/2006/main" xmlns:r="http://schemas.openxmlformats.org/officeDocument/2006/relationships" xmlns:p="http://schemas.openxmlformats.org/presentationml/2006/main">
   <p:cSld name="Slide 3">
     <p:spTree>
       <p:nvGrpSpPr>
@@ -3964,7 +3842,7 @@
         <p:cNvGrpSpPr/>
         <p:nvPr/>
       </p:nvGrpSpPr>
-      <p:grpSpPr bwMode="auto">
+      <p:grpSpPr>
         <a:xfrm>
           <a:off x="0" y="0"/>
           <a:ext cx="0" cy="0"/>
@@ -3977,10 +3855,10 @@
           <p:cNvPr id="2" name="Text 0"/>
           <p:cNvSpPr/>
           <p:nvPr>
-            <p:ph type="title" idx="100" hasCustomPrompt="1"/>
+            <p:ph idx="100" type="title" hasCustomPrompt="1"/>
           </p:nvPr>
         </p:nvSpPr>
-        <p:spPr bwMode="auto">
+        <p:spPr>
           <a:xfrm>
             <a:off x="548640" y="320040"/>
             <a:ext cx="8046720" cy="822960"/>
@@ -3995,22 +3873,21 @@
           <a:bodyPr wrap="square" rtlCol="0" anchor="ctr"/>
           <a:lstStyle/>
           <a:p>
-            <a:pPr marL="0" indent="0">
+            <a:pPr indent="0" marL="0">
               <a:buNone/>
-              <a:defRPr/>
-            </a:pPr>
-            <a:r>
-              <a:rPr lang="en-US" sz="3200" b="1">
+            </a:pPr>
+            <a:r>
+              <a:rPr lang="en-US" sz="3200" b="1" dirty="0">
                 <a:solidFill>
                   <a:schemeClr val="tx1"/>
                 </a:solidFill>
-                <a:latin typeface="Cambria"/>
-                <a:ea typeface="Cambria"/>
-                <a:cs typeface="Cambria"/>
+                <a:latin typeface="Cambria" pitchFamily="34" charset="0"/>
+                <a:ea typeface="Cambria" pitchFamily="34" charset="-122"/>
+                <a:cs typeface="Cambria" pitchFamily="34" charset="-120"/>
               </a:rPr>
               <a:t>Сценарий пользователя</a:t>
             </a:r>
-            <a:endParaRPr lang="en-US" sz="3200"/>
+            <a:endParaRPr lang="en-US" sz="3200" dirty="0"/>
           </a:p>
         </p:txBody>
       </p:sp>
@@ -4020,7 +3897,7 @@
           <p:cNvSpPr/>
           <p:nvPr/>
         </p:nvSpPr>
-        <p:spPr bwMode="auto">
+        <p:spPr>
           <a:xfrm>
             <a:off x="548640" y="1554480"/>
             <a:ext cx="1874520" cy="2286000"/>
@@ -4047,7 +3924,7 @@
           <p:cNvSpPr/>
           <p:nvPr/>
         </p:nvSpPr>
-        <p:spPr bwMode="auto">
+        <p:spPr>
           <a:xfrm>
             <a:off x="731520" y="1737360"/>
             <a:ext cx="548640" cy="548640"/>
@@ -4072,7 +3949,7 @@
           <p:cNvSpPr txBox="1"/>
           <p:nvPr/>
         </p:nvSpPr>
-        <p:spPr bwMode="auto">
+        <p:spPr>
           <a:xfrm>
             <a:off x="731520" y="1737360"/>
             <a:ext cx="548640" cy="548640"/>
@@ -4087,22 +3964,21 @@
           <a:bodyPr wrap="square" lIns="0" tIns="0" rIns="0" bIns="0" rtlCol="0" anchor="ctr"/>
           <a:lstStyle/>
           <a:p>
-            <a:pPr marL="0" indent="0" algn="ctr">
+            <a:pPr algn="ctr" indent="0" marL="0">
               <a:buNone/>
-              <a:defRPr/>
-            </a:pPr>
-            <a:r>
-              <a:rPr lang="en-US" sz="1800" b="1">
+            </a:pPr>
+            <a:r>
+              <a:rPr lang="en-US" sz="1800" b="1" dirty="0">
                 <a:solidFill>
                   <a:schemeClr val="tx1"/>
                 </a:solidFill>
-                <a:latin typeface="Cambria"/>
-                <a:ea typeface="Cambria"/>
-                <a:cs typeface="Cambria"/>
+                <a:latin typeface="Cambria" pitchFamily="34" charset="0"/>
+                <a:ea typeface="Cambria" pitchFamily="34" charset="-122"/>
+                <a:cs typeface="Cambria" pitchFamily="34" charset="-120"/>
               </a:rPr>
               <a:t>1</a:t>
             </a:r>
-            <a:endParaRPr lang="en-US" sz="1800"/>
+            <a:endParaRPr lang="en-US" sz="1800" dirty="0"/>
           </a:p>
         </p:txBody>
       </p:sp>
@@ -4112,7 +3988,7 @@
           <p:cNvSpPr txBox="1"/>
           <p:nvPr/>
         </p:nvSpPr>
-        <p:spPr bwMode="auto">
+        <p:spPr>
           <a:xfrm>
             <a:off x="731520" y="2468880"/>
             <a:ext cx="1554480" cy="640080"/>
@@ -4127,19 +4003,18 @@
           <a:bodyPr wrap="square" lIns="0" tIns="0" rIns="0" bIns="0" rtlCol="0" anchor="t"/>
           <a:lstStyle/>
           <a:p>
-            <a:pPr marL="0" indent="0">
+            <a:pPr indent="0" marL="0">
               <a:buNone/>
-              <a:defRPr/>
-            </a:pPr>
-            <a:r>
-              <a:rPr lang="en-US" sz="1600" b="1">
+            </a:pPr>
+            <a:r>
+              <a:rPr lang="en-US" sz="1600" b="1" dirty="0">
                 <a:solidFill>
                   <a:schemeClr val="tx1"/>
                 </a:solidFill>
               </a:rPr>
               <a:t>Отправить файл</a:t>
             </a:r>
-            <a:endParaRPr lang="en-US" sz="1600"/>
+            <a:endParaRPr lang="en-US" sz="1600" dirty="0"/>
           </a:p>
         </p:txBody>
       </p:sp>
@@ -4149,7 +4024,7 @@
           <p:cNvSpPr txBox="1"/>
           <p:nvPr/>
         </p:nvSpPr>
-        <p:spPr bwMode="auto">
+        <p:spPr>
           <a:xfrm>
             <a:off x="731520" y="3108960"/>
             <a:ext cx="1554480" cy="640080"/>
@@ -4164,19 +4039,18 @@
           <a:bodyPr wrap="square" lIns="0" tIns="0" rIns="0" bIns="0" rtlCol="0" anchor="t"/>
           <a:lstStyle/>
           <a:p>
-            <a:pPr marL="0" indent="0">
+            <a:pPr indent="0" marL="0">
               <a:buNone/>
-              <a:defRPr/>
-            </a:pPr>
-            <a:r>
-              <a:rPr lang="en-US" sz="1400">
+            </a:pPr>
+            <a:r>
+              <a:rPr lang="en-US" sz="1400" dirty="0">
                 <a:solidFill>
                   <a:schemeClr val="tx2"/>
                 </a:solidFill>
               </a:rPr>
               <a:t>.txt, .md, .pdf</a:t>
             </a:r>
-            <a:endParaRPr lang="en-US" sz="1400"/>
+            <a:endParaRPr lang="en-US" sz="1400" dirty="0"/>
           </a:p>
         </p:txBody>
       </p:sp>
@@ -4186,7 +4060,7 @@
           <p:cNvSpPr txBox="1"/>
           <p:nvPr/>
         </p:nvSpPr>
-        <p:spPr bwMode="auto">
+        <p:spPr>
           <a:xfrm>
             <a:off x="2404872" y="2377440"/>
             <a:ext cx="228600" cy="457200"/>
@@ -4201,19 +4075,18 @@
           <a:bodyPr wrap="square" lIns="0" tIns="0" rIns="0" bIns="0" rtlCol="0" anchor="ctr"/>
           <a:lstStyle/>
           <a:p>
-            <a:pPr marL="0" indent="0" algn="ctr">
+            <a:pPr algn="ctr" indent="0" marL="0">
               <a:buNone/>
-              <a:defRPr/>
-            </a:pPr>
-            <a:r>
-              <a:rPr lang="en-US" sz="2800">
+            </a:pPr>
+            <a:r>
+              <a:rPr lang="en-US" sz="2800" dirty="0">
                 <a:solidFill>
                   <a:schemeClr val="accent5"/>
                 </a:solidFill>
               </a:rPr>
               <a:t>›</a:t>
             </a:r>
-            <a:endParaRPr lang="en-US" sz="2800"/>
+            <a:endParaRPr lang="en-US" sz="2800" dirty="0"/>
           </a:p>
         </p:txBody>
       </p:sp>
@@ -4223,7 +4096,7 @@
           <p:cNvSpPr/>
           <p:nvPr/>
         </p:nvSpPr>
-        <p:spPr bwMode="auto">
+        <p:spPr>
           <a:xfrm>
             <a:off x="2624328" y="1554480"/>
             <a:ext cx="1874520" cy="2286000"/>
@@ -4250,7 +4123,7 @@
           <p:cNvSpPr/>
           <p:nvPr/>
         </p:nvSpPr>
-        <p:spPr bwMode="auto">
+        <p:spPr>
           <a:xfrm>
             <a:off x="2807208" y="1737360"/>
             <a:ext cx="548640" cy="548640"/>
@@ -4275,7 +4148,7 @@
           <p:cNvSpPr txBox="1"/>
           <p:nvPr/>
         </p:nvSpPr>
-        <p:spPr bwMode="auto">
+        <p:spPr>
           <a:xfrm>
             <a:off x="2807208" y="1737360"/>
             <a:ext cx="548640" cy="548640"/>
@@ -4290,22 +4163,21 @@
           <a:bodyPr wrap="square" lIns="0" tIns="0" rIns="0" bIns="0" rtlCol="0" anchor="ctr"/>
           <a:lstStyle/>
           <a:p>
-            <a:pPr marL="0" indent="0" algn="ctr">
+            <a:pPr algn="ctr" indent="0" marL="0">
               <a:buNone/>
-              <a:defRPr/>
-            </a:pPr>
-            <a:r>
-              <a:rPr lang="en-US" sz="1800" b="1">
+            </a:pPr>
+            <a:r>
+              <a:rPr lang="en-US" sz="1800" b="1" dirty="0">
                 <a:solidFill>
                   <a:schemeClr val="tx1"/>
                 </a:solidFill>
-                <a:latin typeface="Cambria"/>
-                <a:ea typeface="Cambria"/>
-                <a:cs typeface="Cambria"/>
+                <a:latin typeface="Cambria" pitchFamily="34" charset="0"/>
+                <a:ea typeface="Cambria" pitchFamily="34" charset="-122"/>
+                <a:cs typeface="Cambria" pitchFamily="34" charset="-120"/>
               </a:rPr>
               <a:t>2</a:t>
             </a:r>
-            <a:endParaRPr lang="en-US" sz="1800"/>
+            <a:endParaRPr lang="en-US" sz="1800" dirty="0"/>
           </a:p>
         </p:txBody>
       </p:sp>
@@ -4315,7 +4187,7 @@
           <p:cNvSpPr txBox="1"/>
           <p:nvPr/>
         </p:nvSpPr>
-        <p:spPr bwMode="auto">
+        <p:spPr>
           <a:xfrm>
             <a:off x="2807208" y="2468880"/>
             <a:ext cx="1554480" cy="640080"/>
@@ -4330,19 +4202,18 @@
           <a:bodyPr wrap="square" lIns="0" tIns="0" rIns="0" bIns="0" rtlCol="0" anchor="t"/>
           <a:lstStyle/>
           <a:p>
-            <a:pPr marL="0" indent="0">
+            <a:pPr indent="0" marL="0">
               <a:buNone/>
-              <a:defRPr/>
-            </a:pPr>
-            <a:r>
-              <a:rPr lang="en-US" sz="1600" b="1">
+            </a:pPr>
+            <a:r>
+              <a:rPr lang="en-US" sz="1600" b="1" dirty="0">
                 <a:solidFill>
                   <a:schemeClr val="tx1"/>
                 </a:solidFill>
               </a:rPr>
               <a:t>Подготовка текста</a:t>
             </a:r>
-            <a:endParaRPr lang="en-US" sz="1600"/>
+            <a:endParaRPr lang="en-US" sz="1600" dirty="0"/>
           </a:p>
         </p:txBody>
       </p:sp>
@@ -4352,7 +4223,7 @@
           <p:cNvSpPr txBox="1"/>
           <p:nvPr/>
         </p:nvSpPr>
-        <p:spPr bwMode="auto">
+        <p:spPr>
           <a:xfrm>
             <a:off x="2807208" y="3108960"/>
             <a:ext cx="1554480" cy="640080"/>
@@ -4367,19 +4238,18 @@
           <a:bodyPr wrap="square" lIns="0" tIns="0" rIns="0" bIns="0" rtlCol="0" anchor="t"/>
           <a:lstStyle/>
           <a:p>
-            <a:pPr marL="0" indent="0">
+            <a:pPr indent="0" marL="0">
               <a:buNone/>
-              <a:defRPr/>
-            </a:pPr>
-            <a:r>
-              <a:rPr lang="en-US" sz="1400">
+            </a:pPr>
+            <a:r>
+              <a:rPr lang="en-US" sz="1400" dirty="0">
                 <a:solidFill>
                   <a:schemeClr val="tx2"/>
                 </a:solidFill>
               </a:rPr>
               <a:t>заголовки, абзацы, «7:30»</a:t>
             </a:r>
-            <a:endParaRPr lang="en-US" sz="1400"/>
+            <a:endParaRPr lang="en-US" sz="1400" dirty="0"/>
           </a:p>
         </p:txBody>
       </p:sp>
@@ -4389,7 +4259,7 @@
           <p:cNvSpPr txBox="1"/>
           <p:nvPr/>
         </p:nvSpPr>
-        <p:spPr bwMode="auto">
+        <p:spPr>
           <a:xfrm>
             <a:off x="4480560" y="2377440"/>
             <a:ext cx="228600" cy="457200"/>
@@ -4404,19 +4274,18 @@
           <a:bodyPr wrap="square" lIns="0" tIns="0" rIns="0" bIns="0" rtlCol="0" anchor="ctr"/>
           <a:lstStyle/>
           <a:p>
-            <a:pPr marL="0" indent="0" algn="ctr">
+            <a:pPr algn="ctr" indent="0" marL="0">
               <a:buNone/>
-              <a:defRPr/>
-            </a:pPr>
-            <a:r>
-              <a:rPr lang="en-US" sz="2800">
+            </a:pPr>
+            <a:r>
+              <a:rPr lang="en-US" sz="2800" dirty="0">
                 <a:solidFill>
                   <a:schemeClr val="accent5"/>
                 </a:solidFill>
               </a:rPr>
               <a:t>›</a:t>
             </a:r>
-            <a:endParaRPr lang="en-US" sz="2800"/>
+            <a:endParaRPr lang="en-US" sz="2800" dirty="0"/>
           </a:p>
         </p:txBody>
       </p:sp>
@@ -4426,7 +4295,7 @@
           <p:cNvSpPr/>
           <p:nvPr/>
         </p:nvSpPr>
-        <p:spPr bwMode="auto">
+        <p:spPr>
           <a:xfrm>
             <a:off x="4700016" y="1554480"/>
             <a:ext cx="1874520" cy="2286000"/>
@@ -4453,7 +4322,7 @@
           <p:cNvSpPr/>
           <p:nvPr/>
         </p:nvSpPr>
-        <p:spPr bwMode="auto">
+        <p:spPr>
           <a:xfrm>
             <a:off x="4882896" y="1737360"/>
             <a:ext cx="548640" cy="548640"/>
@@ -4478,7 +4347,7 @@
           <p:cNvSpPr txBox="1"/>
           <p:nvPr/>
         </p:nvSpPr>
-        <p:spPr bwMode="auto">
+        <p:spPr>
           <a:xfrm>
             <a:off x="4882896" y="1737360"/>
             <a:ext cx="548640" cy="548640"/>
@@ -4493,22 +4362,21 @@
           <a:bodyPr wrap="square" lIns="0" tIns="0" rIns="0" bIns="0" rtlCol="0" anchor="ctr"/>
           <a:lstStyle/>
           <a:p>
-            <a:pPr marL="0" indent="0" algn="ctr">
+            <a:pPr algn="ctr" indent="0" marL="0">
               <a:buNone/>
-              <a:defRPr/>
-            </a:pPr>
-            <a:r>
-              <a:rPr lang="en-US" sz="1800" b="1">
+            </a:pPr>
+            <a:r>
+              <a:rPr lang="en-US" sz="1800" b="1" dirty="0">
                 <a:solidFill>
                   <a:schemeClr val="tx1"/>
                 </a:solidFill>
-                <a:latin typeface="Cambria"/>
-                <a:ea typeface="Cambria"/>
-                <a:cs typeface="Cambria"/>
+                <a:latin typeface="Cambria" pitchFamily="34" charset="0"/>
+                <a:ea typeface="Cambria" pitchFamily="34" charset="-122"/>
+                <a:cs typeface="Cambria" pitchFamily="34" charset="-120"/>
               </a:rPr>
               <a:t>3</a:t>
             </a:r>
-            <a:endParaRPr lang="en-US" sz="1800"/>
+            <a:endParaRPr lang="en-US" sz="1800" dirty="0"/>
           </a:p>
         </p:txBody>
       </p:sp>
@@ -4518,7 +4386,7 @@
           <p:cNvSpPr txBox="1"/>
           <p:nvPr/>
         </p:nvSpPr>
-        <p:spPr bwMode="auto">
+        <p:spPr>
           <a:xfrm>
             <a:off x="4882896" y="2468880"/>
             <a:ext cx="1554480" cy="640080"/>
@@ -4533,19 +4401,18 @@
           <a:bodyPr wrap="square" lIns="0" tIns="0" rIns="0" bIns="0" rtlCol="0" anchor="t"/>
           <a:lstStyle/>
           <a:p>
-            <a:pPr marL="0" indent="0">
+            <a:pPr indent="0" marL="0">
               <a:buNone/>
-              <a:defRPr/>
-            </a:pPr>
-            <a:r>
-              <a:rPr lang="en-US" sz="1600" b="1">
+            </a:pPr>
+            <a:r>
+              <a:rPr lang="en-US" sz="1600" b="1" dirty="0">
                 <a:solidFill>
                   <a:schemeClr val="tx1"/>
                 </a:solidFill>
               </a:rPr>
               <a:t>Синтез Kokoro</a:t>
             </a:r>
-            <a:endParaRPr lang="en-US" sz="1600"/>
+            <a:endParaRPr lang="en-US" sz="1600" dirty="0"/>
           </a:p>
         </p:txBody>
       </p:sp>
@@ -4555,7 +4422,7 @@
           <p:cNvSpPr txBox="1"/>
           <p:nvPr/>
         </p:nvSpPr>
-        <p:spPr bwMode="auto">
+        <p:spPr>
           <a:xfrm>
             <a:off x="4882896" y="3108960"/>
             <a:ext cx="1554480" cy="640080"/>
@@ -4570,19 +4437,18 @@
           <a:bodyPr wrap="square" lIns="0" tIns="0" rIns="0" bIns="0" rtlCol="0" anchor="t"/>
           <a:lstStyle/>
           <a:p>
-            <a:pPr marL="0" indent="0">
+            <a:pPr indent="0" marL="0">
               <a:buNone/>
-              <a:defRPr/>
-            </a:pPr>
-            <a:r>
-              <a:rPr lang="en-US" sz="1400">
+            </a:pPr>
+            <a:r>
+              <a:rPr lang="en-US" sz="1400" dirty="0">
                 <a:solidFill>
                   <a:schemeClr val="tx2"/>
                 </a:solidFill>
               </a:rPr>
               <a:t>на устройстве или на ПК</a:t>
             </a:r>
-            <a:endParaRPr lang="en-US" sz="1400"/>
+            <a:endParaRPr lang="en-US" sz="1400" dirty="0"/>
           </a:p>
         </p:txBody>
       </p:sp>
@@ -4592,7 +4458,7 @@
           <p:cNvSpPr txBox="1"/>
           <p:nvPr/>
         </p:nvSpPr>
-        <p:spPr bwMode="auto">
+        <p:spPr>
           <a:xfrm>
             <a:off x="6556248" y="2377440"/>
             <a:ext cx="228600" cy="457200"/>
@@ -4607,19 +4473,18 @@
           <a:bodyPr wrap="square" lIns="0" tIns="0" rIns="0" bIns="0" rtlCol="0" anchor="ctr"/>
           <a:lstStyle/>
           <a:p>
-            <a:pPr marL="0" indent="0" algn="ctr">
+            <a:pPr algn="ctr" indent="0" marL="0">
               <a:buNone/>
-              <a:defRPr/>
-            </a:pPr>
-            <a:r>
-              <a:rPr lang="en-US" sz="2800">
+            </a:pPr>
+            <a:r>
+              <a:rPr lang="en-US" sz="2800" dirty="0">
                 <a:solidFill>
                   <a:schemeClr val="accent5"/>
                 </a:solidFill>
               </a:rPr>
               <a:t>›</a:t>
             </a:r>
-            <a:endParaRPr lang="en-US" sz="2800"/>
+            <a:endParaRPr lang="en-US" sz="2800" dirty="0"/>
           </a:p>
         </p:txBody>
       </p:sp>
@@ -4629,7 +4494,7 @@
           <p:cNvSpPr/>
           <p:nvPr/>
         </p:nvSpPr>
-        <p:spPr bwMode="auto">
+        <p:spPr>
           <a:xfrm>
             <a:off x="6775704" y="1554480"/>
             <a:ext cx="1874520" cy="2286000"/>
@@ -4656,7 +4521,7 @@
           <p:cNvSpPr/>
           <p:nvPr/>
         </p:nvSpPr>
-        <p:spPr bwMode="auto">
+        <p:spPr>
           <a:xfrm>
             <a:off x="6958584" y="1737360"/>
             <a:ext cx="548640" cy="548640"/>
@@ -4681,7 +4546,7 @@
           <p:cNvSpPr txBox="1"/>
           <p:nvPr/>
         </p:nvSpPr>
-        <p:spPr bwMode="auto">
+        <p:spPr>
           <a:xfrm>
             <a:off x="6958584" y="1737360"/>
             <a:ext cx="548640" cy="548640"/>
@@ -4696,22 +4561,21 @@
           <a:bodyPr wrap="square" lIns="0" tIns="0" rIns="0" bIns="0" rtlCol="0" anchor="ctr"/>
           <a:lstStyle/>
           <a:p>
-            <a:pPr marL="0" indent="0" algn="ctr">
+            <a:pPr algn="ctr" indent="0" marL="0">
               <a:buNone/>
-              <a:defRPr/>
-            </a:pPr>
-            <a:r>
-              <a:rPr lang="en-US" sz="1800" b="1">
+            </a:pPr>
+            <a:r>
+              <a:rPr lang="en-US" sz="1800" b="1" dirty="0">
                 <a:solidFill>
                   <a:schemeClr val="tx1"/>
                 </a:solidFill>
-                <a:latin typeface="Cambria"/>
-                <a:ea typeface="Cambria"/>
-                <a:cs typeface="Cambria"/>
+                <a:latin typeface="Cambria" pitchFamily="34" charset="0"/>
+                <a:ea typeface="Cambria" pitchFamily="34" charset="-122"/>
+                <a:cs typeface="Cambria" pitchFamily="34" charset="-120"/>
               </a:rPr>
               <a:t>4</a:t>
             </a:r>
-            <a:endParaRPr lang="en-US" sz="1800"/>
+            <a:endParaRPr lang="en-US" sz="1800" dirty="0"/>
           </a:p>
         </p:txBody>
       </p:sp>
@@ -4721,7 +4585,7 @@
           <p:cNvSpPr txBox="1"/>
           <p:nvPr/>
         </p:nvSpPr>
-        <p:spPr bwMode="auto">
+        <p:spPr>
           <a:xfrm>
             <a:off x="6958584" y="2468880"/>
             <a:ext cx="1554480" cy="640080"/>
@@ -4736,19 +4600,18 @@
           <a:bodyPr wrap="square" lIns="0" tIns="0" rIns="0" bIns="0" rtlCol="0" anchor="t"/>
           <a:lstStyle/>
           <a:p>
-            <a:pPr marL="0" indent="0">
+            <a:pPr indent="0" marL="0">
               <a:buNone/>
-              <a:defRPr/>
-            </a:pPr>
-            <a:r>
-              <a:rPr lang="en-US" sz="1600" b="1">
+            </a:pPr>
+            <a:r>
+              <a:rPr lang="en-US" sz="1600" b="1" dirty="0">
                 <a:solidFill>
                   <a:schemeClr val="tx1"/>
                 </a:solidFill>
               </a:rPr>
               <a:t>Слушать</a:t>
             </a:r>
-            <a:endParaRPr lang="en-US" sz="1600"/>
+            <a:endParaRPr lang="en-US" sz="1600" dirty="0"/>
           </a:p>
         </p:txBody>
       </p:sp>
@@ -4758,7 +4621,7 @@
           <p:cNvSpPr txBox="1"/>
           <p:nvPr/>
         </p:nvSpPr>
-        <p:spPr bwMode="auto">
+        <p:spPr>
           <a:xfrm>
             <a:off x="6958584" y="3108960"/>
             <a:ext cx="1554480" cy="640080"/>
@@ -4773,19 +4636,18 @@
           <a:bodyPr wrap="square" lIns="0" tIns="0" rIns="0" bIns="0" rtlCol="0" anchor="t"/>
           <a:lstStyle/>
           <a:p>
-            <a:pPr marL="0" indent="0">
+            <a:pPr indent="0" marL="0">
               <a:buNone/>
-              <a:defRPr/>
-            </a:pPr>
-            <a:r>
-              <a:rPr lang="en-US" sz="1400">
+            </a:pPr>
+            <a:r>
+              <a:rPr lang="en-US" sz="1400" dirty="0">
                 <a:solidFill>
                   <a:schemeClr val="tx2"/>
                 </a:solidFill>
               </a:rPr>
               <a:t>подсветка предложения</a:t>
             </a:r>
-            <a:endParaRPr lang="en-US" sz="1400"/>
+            <a:endParaRPr lang="en-US" sz="1400" dirty="0"/>
           </a:p>
         </p:txBody>
       </p:sp>
@@ -4795,7 +4657,7 @@
           <p:cNvSpPr txBox="1"/>
           <p:nvPr/>
         </p:nvSpPr>
-        <p:spPr bwMode="auto">
+        <p:spPr>
           <a:xfrm>
             <a:off x="548640" y="4114800"/>
             <a:ext cx="8046720" cy="365760"/>
@@ -4810,19 +4672,18 @@
           <a:bodyPr wrap="square" lIns="0" tIns="0" rIns="0" bIns="0" rtlCol="0" anchor="ctr"/>
           <a:lstStyle/>
           <a:p>
-            <a:pPr marL="0" indent="0">
+            <a:pPr indent="0" marL="0">
               <a:buNone/>
-              <a:defRPr/>
-            </a:pPr>
-            <a:r>
-              <a:rPr lang="en-US" sz="1400">
+            </a:pPr>
+            <a:r>
+              <a:rPr lang="en-US" sz="1400" dirty="0">
                 <a:solidFill>
                   <a:schemeClr val="tx2"/>
                 </a:solidFill>
               </a:rPr>
               <a:t>Паузы на абзацах и заголовках · файл на 30 с озвучивается за 9 с</a:t>
             </a:r>
-            <a:endParaRPr lang="en-US" sz="1400"/>
+            <a:endParaRPr lang="en-US" sz="1400" dirty="0"/>
           </a:p>
         </p:txBody>
       </p:sp>
@@ -4836,14 +4697,19 @@
             <p:ph type="sldNum" sz="quarter" idx="4294967295"/>
           </p:nvPr>
         </p:nvSpPr>
-        <p:spPr bwMode="auto">
-          <a:xfrm>
-            <a:off x="8321039" y="4754880"/>
+        <p:spPr>
+          <a:xfrm>
+            <a:off x="8321040" y="4754880"/>
             <a:ext cx="457200" cy="228600"/>
           </a:xfrm>
           <a:prstGeom prst="rect">
             <a:avLst/>
           </a:prstGeom>
+          <a:extLst>
+            <a:ext uri="{C572A759-6A51-4108-AA02-DFA0A04FC94B}">
+              <ma14:wrappingTextBoxFlag xmlns:ma14="http://schemas.microsoft.com/office/mac/drawingml/2011/main" val="0"/>
+            </a:ext>
+          </a:extLst>
         </p:spPr>
         <p:txBody>
           <a:bodyPr/>
@@ -4857,11 +4723,9 @@
             </a:lvl1pPr>
           </a:lstStyle>
           <a:p>
-            <a:pPr algn="l">
-              <a:defRPr/>
-            </a:pPr>
+            <a:pPr algn="l"/>
             <a:fld id="{F7021451-1387-4CA6-816F-3879F97B5CBC}" type="slidenum">
-              <a:rPr lang="en-US" b="0"/>
+              <a:rPr b="0" lang="en-US"/>
               <a:t>3</a:t>
             </a:fld>
             <a:endParaRPr lang="en-US"/>
@@ -4873,19 +4737,11 @@
   <p:clrMapOvr>
     <a:masterClrMapping/>
   </p:clrMapOvr>
-  <mc:AlternateContent xmlns:mc="http://schemas.openxmlformats.org/markup-compatibility/2006">
-    <mc:Choice xmlns:p159="http://schemas.microsoft.com/office/powerpoint/2015/09/main" xmlns:p14="http://schemas.microsoft.com/office/powerpoint/2010/main" Requires="p159">
-      <p:transition p14:dur="2000" advClick="1"/>
-    </mc:Choice>
-    <mc:Fallback>
-      <p:transition advClick="1"/>
-    </mc:Fallback>
-  </mc:AlternateContent>
 </p:sld>
 </file>
 
 <file path=ppt/slides/slide4.xml><?xml version="1.0" encoding="utf-8"?>
-<p:sld xmlns:a="http://schemas.openxmlformats.org/drawingml/2006/main" xmlns:r="http://schemas.openxmlformats.org/officeDocument/2006/relationships" xmlns:p="http://schemas.openxmlformats.org/presentationml/2006/main" xmlns:m="http://schemas.openxmlformats.org/officeDocument/2006/math" xmlns:w="http://schemas.openxmlformats.org/wordprocessingml/2006/main" xmlns:mc="http://schemas.openxmlformats.org/markup-compatibility/2006" showMasterPhAnim="0" showMasterSp="1" show="1">
+<p:sld xmlns:a="http://schemas.openxmlformats.org/drawingml/2006/main" xmlns:r="http://schemas.openxmlformats.org/officeDocument/2006/relationships" xmlns:p="http://schemas.openxmlformats.org/presentationml/2006/main">
   <p:cSld name="Slide 4">
     <p:spTree>
       <p:nvGrpSpPr>
@@ -4893,7 +4749,7 @@
         <p:cNvGrpSpPr/>
         <p:nvPr/>
       </p:nvGrpSpPr>
-      <p:grpSpPr bwMode="auto">
+      <p:grpSpPr>
         <a:xfrm>
           <a:off x="0" y="0"/>
           <a:ext cx="0" cy="0"/>
@@ -4906,10 +4762,10 @@
           <p:cNvPr id="2" name="Text 0"/>
           <p:cNvSpPr/>
           <p:nvPr>
-            <p:ph type="title" idx="100" hasCustomPrompt="1"/>
+            <p:ph idx="100" type="title" hasCustomPrompt="1"/>
           </p:nvPr>
         </p:nvSpPr>
-        <p:spPr bwMode="auto">
+        <p:spPr>
           <a:xfrm>
             <a:off x="548640" y="320040"/>
             <a:ext cx="8046720" cy="822960"/>
@@ -4924,22 +4780,21 @@
           <a:bodyPr wrap="square" rtlCol="0" anchor="ctr"/>
           <a:lstStyle/>
           <a:p>
-            <a:pPr marL="0" indent="0">
+            <a:pPr indent="0" marL="0">
               <a:buNone/>
-              <a:defRPr/>
-            </a:pPr>
-            <a:r>
-              <a:rPr lang="en-US" sz="3200" b="1">
+            </a:pPr>
+            <a:r>
+              <a:rPr lang="en-US" sz="3200" b="1" dirty="0">
                 <a:solidFill>
                   <a:schemeClr val="tx1"/>
                 </a:solidFill>
-                <a:latin typeface="Cambria"/>
-                <a:ea typeface="Cambria"/>
-                <a:cs typeface="Cambria"/>
+                <a:latin typeface="Cambria" pitchFamily="34" charset="0"/>
+                <a:ea typeface="Cambria" pitchFamily="34" charset="-122"/>
+                <a:cs typeface="Cambria" pitchFamily="34" charset="-120"/>
               </a:rPr>
               <a:t>Два пути, одни правила текста</a:t>
             </a:r>
-            <a:endParaRPr lang="en-US" sz="3200"/>
+            <a:endParaRPr lang="en-US" sz="3200" dirty="0"/>
           </a:p>
         </p:txBody>
       </p:sp>
@@ -4949,7 +4804,7 @@
           <p:cNvSpPr/>
           <p:nvPr/>
         </p:nvSpPr>
-        <p:spPr bwMode="auto">
+        <p:spPr>
           <a:xfrm>
             <a:off x="548640" y="1371600"/>
             <a:ext cx="3886200" cy="2103120"/>
@@ -4976,9 +4831,9 @@
           <p:cNvSpPr txBox="1"/>
           <p:nvPr/>
         </p:nvSpPr>
-        <p:spPr bwMode="auto">
-          <a:xfrm>
-            <a:off x="777240" y="1508759"/>
+        <p:spPr>
+          <a:xfrm>
+            <a:off x="777240" y="1508760"/>
             <a:ext cx="3474720" cy="457200"/>
           </a:xfrm>
           <a:prstGeom prst="rect">
@@ -4991,22 +4846,21 @@
           <a:bodyPr wrap="square" lIns="0" tIns="0" rIns="0" bIns="0" rtlCol="0" anchor="ctr"/>
           <a:lstStyle/>
           <a:p>
-            <a:pPr marL="0" indent="0">
+            <a:pPr indent="0" marL="0">
               <a:buNone/>
-              <a:defRPr/>
-            </a:pPr>
-            <a:r>
-              <a:rPr lang="en-US" sz="2200" b="1">
+            </a:pPr>
+            <a:r>
+              <a:rPr lang="en-US" sz="2200" b="1" dirty="0">
                 <a:solidFill>
                   <a:schemeClr val="tx1"/>
                 </a:solidFill>
-                <a:latin typeface="Cambria"/>
-                <a:ea typeface="Cambria"/>
-                <a:cs typeface="Cambria"/>
+                <a:latin typeface="Cambria" pitchFamily="34" charset="0"/>
+                <a:ea typeface="Cambria" pitchFamily="34" charset="-122"/>
+                <a:cs typeface="Cambria" pitchFamily="34" charset="-120"/>
               </a:rPr>
               <a:t>Mini App</a:t>
             </a:r>
-            <a:endParaRPr lang="en-US" sz="2200"/>
+            <a:endParaRPr lang="en-US" sz="2200" dirty="0"/>
           </a:p>
         </p:txBody>
       </p:sp>
@@ -5016,7 +4870,7 @@
           <p:cNvSpPr txBox="1"/>
           <p:nvPr/>
         </p:nvSpPr>
-        <p:spPr bwMode="auto">
+        <p:spPr>
           <a:xfrm>
             <a:off x="777240" y="2011680"/>
             <a:ext cx="3474720" cy="1371600"/>
@@ -5037,17 +4891,16 @@
               </a:spcAft>
               <a:buSzPct val="100000"/>
               <a:buChar char="•"/>
-              <a:defRPr/>
-            </a:pPr>
-            <a:r>
-              <a:rPr lang="en-US" sz="1400">
+            </a:pPr>
+            <a:r>
+              <a:rPr lang="en-US" sz="1400" dirty="0">
                 <a:solidFill>
                   <a:schemeClr val="tx2"/>
                 </a:solidFill>
               </a:rPr>
               <a:t>Считает на устройстве пользователя</a:t>
             </a:r>
-            <a:endParaRPr lang="en-US" sz="1400"/>
+            <a:endParaRPr lang="en-US" sz="1400" dirty="0"/>
           </a:p>
           <a:p>
             <a:pPr marL="342900" indent="-342900">
@@ -5056,17 +4909,16 @@
               </a:spcAft>
               <a:buSzPct val="100000"/>
               <a:buChar char="•"/>
-              <a:defRPr/>
-            </a:pPr>
-            <a:r>
-              <a:rPr lang="en-US" sz="1400">
+            </a:pPr>
+            <a:r>
+              <a:rPr lang="en-US" sz="1400" dirty="0">
                 <a:solidFill>
                   <a:schemeClr val="tx2"/>
                 </a:solidFill>
               </a:rPr>
               <a:t>Текст никуда не уходит</a:t>
             </a:r>
-            <a:endParaRPr lang="en-US" sz="1400"/>
+            <a:endParaRPr lang="en-US" sz="1400" dirty="0"/>
           </a:p>
           <a:p>
             <a:pPr marL="342900" indent="-342900">
@@ -5075,17 +4927,16 @@
               </a:spcAft>
               <a:buSzPct val="100000"/>
               <a:buChar char="•"/>
-              <a:defRPr/>
-            </a:pPr>
-            <a:r>
-              <a:rPr lang="en-US" sz="1400">
+            </a:pPr>
+            <a:r>
+              <a:rPr lang="en-US" sz="1400" dirty="0">
                 <a:solidFill>
                   <a:schemeClr val="tx2"/>
                 </a:solidFill>
               </a:rPr>
               <a:t>WebGPU или WASM, GitHub Pages</a:t>
             </a:r>
-            <a:endParaRPr lang="en-US" sz="1400"/>
+            <a:endParaRPr lang="en-US" sz="1400" dirty="0"/>
           </a:p>
         </p:txBody>
       </p:sp>
@@ -5095,7 +4946,7 @@
           <p:cNvSpPr/>
           <p:nvPr/>
         </p:nvSpPr>
-        <p:spPr bwMode="auto">
+        <p:spPr>
           <a:xfrm>
             <a:off x="4709160" y="1371600"/>
             <a:ext cx="3886200" cy="2103120"/>
@@ -5122,9 +4973,9 @@
           <p:cNvSpPr txBox="1"/>
           <p:nvPr/>
         </p:nvSpPr>
-        <p:spPr bwMode="auto">
-          <a:xfrm>
-            <a:off x="4937760" y="1508759"/>
+        <p:spPr>
+          <a:xfrm>
+            <a:off x="4937760" y="1508760"/>
             <a:ext cx="3474720" cy="457200"/>
           </a:xfrm>
           <a:prstGeom prst="rect">
@@ -5137,22 +4988,21 @@
           <a:bodyPr wrap="square" lIns="0" tIns="0" rIns="0" bIns="0" rtlCol="0" anchor="ctr"/>
           <a:lstStyle/>
           <a:p>
-            <a:pPr marL="0" indent="0">
+            <a:pPr indent="0" marL="0">
               <a:buNone/>
-              <a:defRPr/>
-            </a:pPr>
-            <a:r>
-              <a:rPr lang="en-US" sz="2200" b="1">
+            </a:pPr>
+            <a:r>
+              <a:rPr lang="en-US" sz="2200" b="1" dirty="0">
                 <a:solidFill>
                   <a:schemeClr val="tx1"/>
                 </a:solidFill>
-                <a:latin typeface="Cambria"/>
-                <a:ea typeface="Cambria"/>
-                <a:cs typeface="Cambria"/>
+                <a:latin typeface="Cambria" pitchFamily="34" charset="0"/>
+                <a:ea typeface="Cambria" pitchFamily="34" charset="-122"/>
+                <a:cs typeface="Cambria" pitchFamily="34" charset="-120"/>
               </a:rPr>
               <a:t>Telegram-бот</a:t>
             </a:r>
-            <a:endParaRPr lang="en-US" sz="2200"/>
+            <a:endParaRPr lang="en-US" sz="2200" dirty="0"/>
           </a:p>
         </p:txBody>
       </p:sp>
@@ -5162,7 +5012,7 @@
           <p:cNvSpPr txBox="1"/>
           <p:nvPr/>
         </p:nvSpPr>
-        <p:spPr bwMode="auto">
+        <p:spPr>
           <a:xfrm>
             <a:off x="4937760" y="2011680"/>
             <a:ext cx="3474720" cy="1371600"/>
@@ -5183,17 +5033,16 @@
               </a:spcAft>
               <a:buSzPct val="100000"/>
               <a:buChar char="•"/>
-              <a:defRPr/>
-            </a:pPr>
-            <a:r>
-              <a:rPr lang="en-US" sz="1400">
+            </a:pPr>
+            <a:r>
+              <a:rPr lang="en-US" sz="1400" dirty="0">
                 <a:solidFill>
                   <a:schemeClr val="tx2"/>
                 </a:solidFill>
               </a:rPr>
               <a:t>Считает на ПК владельца</a:t>
             </a:r>
-            <a:endParaRPr lang="en-US" sz="1400"/>
+            <a:endParaRPr lang="en-US" sz="1400" dirty="0"/>
           </a:p>
           <a:p>
             <a:pPr marL="342900" indent="-342900">
@@ -5202,17 +5051,16 @@
               </a:spcAft>
               <a:buSzPct val="100000"/>
               <a:buChar char="•"/>
-              <a:defRPr/>
-            </a:pPr>
-            <a:r>
-              <a:rPr lang="en-US" sz="1400">
+            </a:pPr>
+            <a:r>
+              <a:rPr lang="en-US" sz="1400" dirty="0">
                 <a:solidFill>
                   <a:schemeClr val="tx2"/>
                 </a:solidFill>
               </a:rPr>
               <a:t>Прогресс, список разрешённых ID</a:t>
             </a:r>
-            <a:endParaRPr lang="en-US" sz="1400"/>
+            <a:endParaRPr lang="en-US" sz="1400" dirty="0"/>
           </a:p>
           <a:p>
             <a:pPr marL="342900" indent="-342900">
@@ -5221,17 +5069,16 @@
               </a:spcAft>
               <a:buSzPct val="100000"/>
               <a:buChar char="•"/>
-              <a:defRPr/>
-            </a:pPr>
-            <a:r>
-              <a:rPr lang="en-US" sz="1400">
+            </a:pPr>
+            <a:r>
+              <a:rPr lang="en-US" sz="1400" dirty="0">
                 <a:solidFill>
                   <a:schemeClr val="tx2"/>
                 </a:solidFill>
               </a:rPr>
               <a:t>Файл .ogg в ответ</a:t>
             </a:r>
-            <a:endParaRPr lang="en-US" sz="1400"/>
+            <a:endParaRPr lang="en-US" sz="1400" dirty="0"/>
           </a:p>
         </p:txBody>
       </p:sp>
@@ -5241,7 +5088,7 @@
           <p:cNvSpPr/>
           <p:nvPr/>
         </p:nvSpPr>
-        <p:spPr bwMode="auto">
+        <p:spPr>
           <a:xfrm>
             <a:off x="548640" y="3749040"/>
             <a:ext cx="8046720" cy="731520"/>
@@ -5268,7 +5115,7 @@
           <p:cNvSpPr txBox="1"/>
           <p:nvPr/>
         </p:nvSpPr>
-        <p:spPr bwMode="auto">
+        <p:spPr>
           <a:xfrm>
             <a:off x="777240" y="3749040"/>
             <a:ext cx="7589520" cy="731520"/>
@@ -5283,19 +5130,18 @@
           <a:bodyPr wrap="square" lIns="0" tIns="0" rIns="0" bIns="0" rtlCol="0" anchor="ctr"/>
           <a:lstStyle/>
           <a:p>
-            <a:pPr marL="0" indent="0">
+            <a:pPr indent="0" marL="0">
               <a:buNone/>
-              <a:defRPr/>
-            </a:pPr>
-            <a:r>
-              <a:rPr lang="en-US" sz="1400">
+            </a:pPr>
+            <a:r>
+              <a:rPr lang="en-US" sz="1400" dirty="0">
                 <a:solidFill>
                   <a:schemeClr val="bg1"/>
                 </a:solidFill>
               </a:rPr>
               <a:t>Общее: подготовка текста + модель Kokoro-82M · одни эталонные тесты в Python и JS · CI на GitHub</a:t>
             </a:r>
-            <a:endParaRPr lang="en-US" sz="1400"/>
+            <a:endParaRPr lang="en-US" sz="1400" dirty="0"/>
           </a:p>
         </p:txBody>
       </p:sp>
@@ -5309,14 +5155,19 @@
             <p:ph type="sldNum" sz="quarter" idx="4294967295"/>
           </p:nvPr>
         </p:nvSpPr>
-        <p:spPr bwMode="auto">
-          <a:xfrm>
-            <a:off x="8321039" y="4754880"/>
+        <p:spPr>
+          <a:xfrm>
+            <a:off x="8321040" y="4754880"/>
             <a:ext cx="457200" cy="228600"/>
           </a:xfrm>
           <a:prstGeom prst="rect">
             <a:avLst/>
           </a:prstGeom>
+          <a:extLst>
+            <a:ext uri="{C572A759-6A51-4108-AA02-DFA0A04FC94B}">
+              <ma14:wrappingTextBoxFlag xmlns:ma14="http://schemas.microsoft.com/office/mac/drawingml/2011/main" val="0"/>
+            </a:ext>
+          </a:extLst>
         </p:spPr>
         <p:txBody>
           <a:bodyPr/>
@@ -5330,11 +5181,9 @@
             </a:lvl1pPr>
           </a:lstStyle>
           <a:p>
-            <a:pPr algn="l">
-              <a:defRPr/>
-            </a:pPr>
+            <a:pPr algn="l"/>
             <a:fld id="{F7021451-1387-4CA6-816F-3879F97B5CBC}" type="slidenum">
-              <a:rPr lang="en-US" b="0"/>
+              <a:rPr b="0" lang="en-US"/>
               <a:t>4</a:t>
             </a:fld>
             <a:endParaRPr lang="en-US"/>
@@ -5346,19 +5195,11 @@
   <p:clrMapOvr>
     <a:masterClrMapping/>
   </p:clrMapOvr>
-  <mc:AlternateContent xmlns:mc="http://schemas.openxmlformats.org/markup-compatibility/2006">
-    <mc:Choice xmlns:p159="http://schemas.microsoft.com/office/powerpoint/2015/09/main" xmlns:p14="http://schemas.microsoft.com/office/powerpoint/2010/main" Requires="p159">
-      <p:transition p14:dur="2000" advClick="1"/>
-    </mc:Choice>
-    <mc:Fallback>
-      <p:transition advClick="1"/>
-    </mc:Fallback>
-  </mc:AlternateContent>
 </p:sld>
 </file>
 
 <file path=ppt/slides/slide5.xml><?xml version="1.0" encoding="utf-8"?>
-<p:sld xmlns:a="http://schemas.openxmlformats.org/drawingml/2006/main" xmlns:r="http://schemas.openxmlformats.org/officeDocument/2006/relationships" xmlns:p="http://schemas.openxmlformats.org/presentationml/2006/main" xmlns:m="http://schemas.openxmlformats.org/officeDocument/2006/math" xmlns:w="http://schemas.openxmlformats.org/wordprocessingml/2006/main" xmlns:mc="http://schemas.openxmlformats.org/markup-compatibility/2006" showMasterPhAnim="0" showMasterSp="1" show="1">
+<p:sld xmlns:a="http://schemas.openxmlformats.org/drawingml/2006/main" xmlns:r="http://schemas.openxmlformats.org/officeDocument/2006/relationships" xmlns:p="http://schemas.openxmlformats.org/presentationml/2006/main">
   <p:cSld name="Slide 5">
     <p:spTree>
       <p:nvGrpSpPr>
@@ -5366,7 +5207,7 @@
         <p:cNvGrpSpPr/>
         <p:nvPr/>
       </p:nvGrpSpPr>
-      <p:grpSpPr bwMode="auto">
+      <p:grpSpPr>
         <a:xfrm>
           <a:off x="0" y="0"/>
           <a:ext cx="0" cy="0"/>
@@ -5379,10 +5220,10 @@
           <p:cNvPr id="2" name="Text 0"/>
           <p:cNvSpPr/>
           <p:nvPr>
-            <p:ph type="title" idx="100" hasCustomPrompt="1"/>
+            <p:ph idx="100" type="title" hasCustomPrompt="1"/>
           </p:nvPr>
         </p:nvSpPr>
-        <p:spPr bwMode="auto">
+        <p:spPr>
           <a:xfrm>
             <a:off x="548640" y="320040"/>
             <a:ext cx="8046720" cy="822960"/>
@@ -5397,22 +5238,21 @@
           <a:bodyPr wrap="square" rtlCol="0" anchor="ctr"/>
           <a:lstStyle/>
           <a:p>
-            <a:pPr marL="0" indent="0">
+            <a:pPr indent="0" marL="0">
               <a:buNone/>
-              <a:defRPr/>
-            </a:pPr>
-            <a:r>
-              <a:rPr lang="en-US" sz="3200" b="1">
+            </a:pPr>
+            <a:r>
+              <a:rPr lang="en-US" sz="3200" b="1" dirty="0">
                 <a:solidFill>
                   <a:schemeClr val="tx1"/>
                 </a:solidFill>
-                <a:latin typeface="Cambria"/>
-                <a:ea typeface="Cambria"/>
-                <a:cs typeface="Cambria"/>
+                <a:latin typeface="Cambria" pitchFamily="34" charset="0"/>
+                <a:ea typeface="Cambria" pitchFamily="34" charset="-122"/>
+                <a:cs typeface="Cambria" pitchFamily="34" charset="-120"/>
               </a:rPr>
               <a:t>Эксперимент: что и как измеряли</a:t>
             </a:r>
-            <a:endParaRPr lang="en-US" sz="3200"/>
+            <a:endParaRPr lang="en-US" sz="3200" dirty="0"/>
           </a:p>
         </p:txBody>
       </p:sp>
@@ -5422,10 +5262,10 @@
           <p:cNvSpPr/>
           <p:nvPr/>
         </p:nvSpPr>
-        <p:spPr bwMode="auto">
+        <p:spPr>
           <a:xfrm>
             <a:off x="548640" y="1371600"/>
-            <a:ext cx="3886200" cy="3017519"/>
+            <a:ext cx="3886200" cy="3017520"/>
           </a:xfrm>
           <a:prstGeom prst="roundRect">
             <a:avLst>
@@ -5449,9 +5289,9 @@
           <p:cNvSpPr txBox="1"/>
           <p:nvPr/>
         </p:nvSpPr>
-        <p:spPr bwMode="auto">
-          <a:xfrm>
-            <a:off x="777240" y="1508759"/>
+        <p:spPr>
+          <a:xfrm>
+            <a:off x="777240" y="1508760"/>
             <a:ext cx="3474720" cy="457200"/>
           </a:xfrm>
           <a:prstGeom prst="rect">
@@ -5464,22 +5304,21 @@
           <a:bodyPr wrap="square" lIns="0" tIns="0" rIns="0" bIns="0" rtlCol="0" anchor="ctr"/>
           <a:lstStyle/>
           <a:p>
-            <a:pPr marL="0" indent="0">
+            <a:pPr indent="0" marL="0">
               <a:buNone/>
-              <a:defRPr/>
-            </a:pPr>
-            <a:r>
-              <a:rPr lang="en-US" sz="2200" b="1">
+            </a:pPr>
+            <a:r>
+              <a:rPr lang="en-US" sz="2200" b="1" dirty="0">
                 <a:solidFill>
                   <a:schemeClr val="tx1"/>
                 </a:solidFill>
-                <a:latin typeface="Cambria"/>
-                <a:ea typeface="Cambria"/>
-                <a:cs typeface="Cambria"/>
+                <a:latin typeface="Cambria" pitchFamily="34" charset="0"/>
+                <a:ea typeface="Cambria" pitchFamily="34" charset="-122"/>
+                <a:cs typeface="Cambria" pitchFamily="34" charset="-120"/>
               </a:rPr>
               <a:t>4 системы</a:t>
             </a:r>
-            <a:endParaRPr lang="en-US" sz="2200"/>
+            <a:endParaRPr lang="en-US" sz="2200" dirty="0"/>
           </a:p>
         </p:txBody>
       </p:sp>
@@ -5489,7 +5328,7 @@
           <p:cNvSpPr txBox="1"/>
           <p:nvPr/>
         </p:nvSpPr>
-        <p:spPr bwMode="auto">
+        <p:spPr>
           <a:xfrm>
             <a:off x="777240" y="2057400"/>
             <a:ext cx="3474720" cy="2194560"/>
@@ -5510,17 +5349,16 @@
               </a:spcAft>
               <a:buSzPct val="100000"/>
               <a:buChar char="•"/>
-              <a:defRPr/>
-            </a:pPr>
-            <a:r>
-              <a:rPr lang="en-US" sz="1600">
+            </a:pPr>
+            <a:r>
+              <a:rPr lang="en-US" sz="1600" dirty="0">
                 <a:solidFill>
                   <a:schemeClr val="tx2"/>
                 </a:solidFill>
               </a:rPr>
               <a:t>eSpeak NG: baseline</a:t>
             </a:r>
-            <a:endParaRPr lang="en-US" sz="1600"/>
+            <a:endParaRPr lang="en-US" sz="1600" dirty="0"/>
           </a:p>
           <a:p>
             <a:pPr marL="342900" indent="-342900">
@@ -5529,17 +5367,16 @@
               </a:spcAft>
               <a:buSzPct val="100000"/>
               <a:buChar char="•"/>
-              <a:defRPr/>
-            </a:pPr>
-            <a:r>
-              <a:rPr lang="en-US" sz="1600">
+            </a:pPr>
+            <a:r>
+              <a:rPr lang="en-US" sz="1600" dirty="0">
                 <a:solidFill>
                   <a:schemeClr val="tx2"/>
                 </a:solidFill>
               </a:rPr>
               <a:t>Piper lessac-medium</a:t>
             </a:r>
-            <a:endParaRPr lang="en-US" sz="1600"/>
+            <a:endParaRPr lang="en-US" sz="1600" dirty="0"/>
           </a:p>
           <a:p>
             <a:pPr marL="342900" indent="-342900">
@@ -5548,17 +5385,16 @@
               </a:spcAft>
               <a:buSzPct val="100000"/>
               <a:buChar char="•"/>
-              <a:defRPr/>
-            </a:pPr>
-            <a:r>
-              <a:rPr lang="en-US" sz="1600">
+            </a:pPr>
+            <a:r>
+              <a:rPr lang="en-US" sz="1600" dirty="0">
                 <a:solidFill>
                   <a:schemeClr val="tx2"/>
                 </a:solidFill>
               </a:rPr>
               <a:t>Kokoro без подготовки текста</a:t>
             </a:r>
-            <a:endParaRPr lang="en-US" sz="1600"/>
+            <a:endParaRPr lang="en-US" sz="1600" dirty="0"/>
           </a:p>
           <a:p>
             <a:pPr marL="342900" indent="-342900">
@@ -5567,17 +5403,16 @@
               </a:spcAft>
               <a:buSzPct val="100000"/>
               <a:buChar char="•"/>
-              <a:defRPr/>
-            </a:pPr>
-            <a:r>
-              <a:rPr lang="en-US" sz="1600">
+            </a:pPr>
+            <a:r>
+              <a:rPr lang="en-US" sz="1600" dirty="0">
                 <a:solidFill>
                   <a:schemeClr val="tx2"/>
                 </a:solidFill>
               </a:rPr>
               <a:t>Kokoro с подготовкой текста</a:t>
             </a:r>
-            <a:endParaRPr lang="en-US" sz="1600"/>
+            <a:endParaRPr lang="en-US" sz="1600" dirty="0"/>
           </a:p>
         </p:txBody>
       </p:sp>
@@ -5587,10 +5422,10 @@
           <p:cNvSpPr/>
           <p:nvPr/>
         </p:nvSpPr>
-        <p:spPr bwMode="auto">
+        <p:spPr>
           <a:xfrm>
             <a:off x="4709160" y="1371600"/>
-            <a:ext cx="3886200" cy="3017519"/>
+            <a:ext cx="3886200" cy="3017520"/>
           </a:xfrm>
           <a:prstGeom prst="roundRect">
             <a:avLst>
@@ -5614,9 +5449,9 @@
           <p:cNvSpPr txBox="1"/>
           <p:nvPr/>
         </p:nvSpPr>
-        <p:spPr bwMode="auto">
-          <a:xfrm>
-            <a:off x="4937760" y="1508759"/>
+        <p:spPr>
+          <a:xfrm>
+            <a:off x="4937760" y="1508760"/>
             <a:ext cx="3474720" cy="457200"/>
           </a:xfrm>
           <a:prstGeom prst="rect">
@@ -5629,22 +5464,21 @@
           <a:bodyPr wrap="square" lIns="0" tIns="0" rIns="0" bIns="0" rtlCol="0" anchor="ctr"/>
           <a:lstStyle/>
           <a:p>
-            <a:pPr marL="0" indent="0">
+            <a:pPr indent="0" marL="0">
               <a:buNone/>
-              <a:defRPr/>
-            </a:pPr>
-            <a:r>
-              <a:rPr lang="en-US" sz="2000" b="1">
+            </a:pPr>
+            <a:r>
+              <a:rPr lang="en-US" sz="2000" b="1" dirty="0">
                 <a:solidFill>
                   <a:schemeClr val="tx1"/>
                 </a:solidFill>
-                <a:latin typeface="Cambria"/>
-                <a:ea typeface="Cambria"/>
-                <a:cs typeface="Cambria"/>
+                <a:latin typeface="Cambria" pitchFamily="34" charset="0"/>
+                <a:ea typeface="Cambria" pitchFamily="34" charset="-122"/>
+                <a:cs typeface="Cambria" pitchFamily="34" charset="-120"/>
               </a:rPr>
               <a:t>4 метрики, 22 предложения</a:t>
             </a:r>
-            <a:endParaRPr lang="en-US" sz="2000"/>
+            <a:endParaRPr lang="en-US" sz="2000" dirty="0"/>
           </a:p>
         </p:txBody>
       </p:sp>
@@ -5654,7 +5488,7 @@
           <p:cNvSpPr txBox="1"/>
           <p:nvPr/>
         </p:nvSpPr>
-        <p:spPr bwMode="auto">
+        <p:spPr>
           <a:xfrm>
             <a:off x="4937760" y="2057400"/>
             <a:ext cx="3474720" cy="2194560"/>
@@ -5675,17 +5509,16 @@
               </a:spcAft>
               <a:buSzPct val="100000"/>
               <a:buChar char="•"/>
-              <a:defRPr/>
-            </a:pPr>
-            <a:r>
-              <a:rPr lang="en-US" sz="1600">
+            </a:pPr>
+            <a:r>
+              <a:rPr lang="en-US" sz="1600" dirty="0">
                 <a:solidFill>
                   <a:schemeClr val="tx2"/>
                 </a:solidFill>
               </a:rPr>
-              <a:t>WER: синтез → Whisper → слова</a:t>
-            </a:r>
-            <a:endParaRPr lang="en-US" sz="1600"/>
+              <a:t>WER: Whisper (речь → текст) сверяет с исходным текстом</a:t>
+            </a:r>
+            <a:endParaRPr lang="en-US" sz="1600" dirty="0"/>
           </a:p>
           <a:p>
             <a:pPr marL="342900" indent="-342900">
@@ -5694,17 +5527,16 @@
               </a:spcAft>
               <a:buSzPct val="100000"/>
               <a:buChar char="•"/>
-              <a:defRPr/>
-            </a:pPr>
-            <a:r>
-              <a:rPr lang="en-US" sz="1600">
+            </a:pPr>
+            <a:r>
+              <a:rPr lang="en-US" sz="1600" dirty="0">
                 <a:solidFill>
                   <a:schemeClr val="tx2"/>
                 </a:solidFill>
               </a:rPr>
               <a:t>Скорость, × реального времени</a:t>
             </a:r>
-            <a:endParaRPr lang="en-US" sz="1600"/>
+            <a:endParaRPr lang="en-US" sz="1600" dirty="0"/>
           </a:p>
           <a:p>
             <a:pPr marL="342900" indent="-342900">
@@ -5713,17 +5545,16 @@
               </a:spcAft>
               <a:buSzPct val="100000"/>
               <a:buChar char="•"/>
-              <a:defRPr/>
-            </a:pPr>
-            <a:r>
-              <a:rPr lang="en-US" sz="1600">
+            </a:pPr>
+            <a:r>
+              <a:rPr lang="en-US" sz="1600" dirty="0">
                 <a:solidFill>
                   <a:schemeClr val="tx2"/>
                 </a:solidFill>
               </a:rPr>
               <a:t>Самая длинная пауза в клипе</a:t>
             </a:r>
-            <a:endParaRPr lang="en-US" sz="1600"/>
+            <a:endParaRPr lang="en-US" sz="1600" dirty="0"/>
           </a:p>
           <a:p>
             <a:pPr marL="342900" indent="-342900">
@@ -5732,17 +5563,16 @@
               </a:spcAft>
               <a:buSzPct val="100000"/>
               <a:buChar char="•"/>
-              <a:defRPr/>
-            </a:pPr>
-            <a:r>
-              <a:rPr lang="en-US" sz="1600">
+            </a:pPr>
+            <a:r>
+              <a:rPr lang="en-US" sz="1600" dirty="0">
                 <a:solidFill>
                   <a:schemeClr val="tx2"/>
                 </a:solidFill>
               </a:rPr>
               <a:t>Оценка на слух вслепую, 24 клипа</a:t>
             </a:r>
-            <a:endParaRPr lang="en-US" sz="1600"/>
+            <a:endParaRPr lang="en-US" sz="1600" dirty="0"/>
           </a:p>
         </p:txBody>
       </p:sp>
@@ -5756,14 +5586,19 @@
             <p:ph type="sldNum" sz="quarter" idx="4294967295"/>
           </p:nvPr>
         </p:nvSpPr>
-        <p:spPr bwMode="auto">
-          <a:xfrm>
-            <a:off x="8321039" y="4754880"/>
+        <p:spPr>
+          <a:xfrm>
+            <a:off x="8321040" y="4754880"/>
             <a:ext cx="457200" cy="228600"/>
           </a:xfrm>
           <a:prstGeom prst="rect">
             <a:avLst/>
           </a:prstGeom>
+          <a:extLst>
+            <a:ext uri="{C572A759-6A51-4108-AA02-DFA0A04FC94B}">
+              <ma14:wrappingTextBoxFlag xmlns:ma14="http://schemas.microsoft.com/office/mac/drawingml/2011/main" val="0"/>
+            </a:ext>
+          </a:extLst>
         </p:spPr>
         <p:txBody>
           <a:bodyPr/>
@@ -5777,11 +5612,9 @@
             </a:lvl1pPr>
           </a:lstStyle>
           <a:p>
-            <a:pPr algn="l">
-              <a:defRPr/>
-            </a:pPr>
+            <a:pPr algn="l"/>
             <a:fld id="{F7021451-1387-4CA6-816F-3879F97B5CBC}" type="slidenum">
-              <a:rPr lang="en-US" b="0"/>
+              <a:rPr b="0" lang="en-US"/>
               <a:t>5</a:t>
             </a:fld>
             <a:endParaRPr lang="en-US"/>
@@ -5793,19 +5626,11 @@
   <p:clrMapOvr>
     <a:masterClrMapping/>
   </p:clrMapOvr>
-  <mc:AlternateContent xmlns:mc="http://schemas.openxmlformats.org/markup-compatibility/2006">
-    <mc:Choice xmlns:p159="http://schemas.microsoft.com/office/powerpoint/2015/09/main" xmlns:p14="http://schemas.microsoft.com/office/powerpoint/2010/main" Requires="p159">
-      <p:transition p14:dur="2000" advClick="1"/>
-    </mc:Choice>
-    <mc:Fallback>
-      <p:transition advClick="1"/>
-    </mc:Fallback>
-  </mc:AlternateContent>
 </p:sld>
 </file>
 
 <file path=ppt/slides/slide6.xml><?xml version="1.0" encoding="utf-8"?>
-<p:sld xmlns:a="http://schemas.openxmlformats.org/drawingml/2006/main" xmlns:r="http://schemas.openxmlformats.org/officeDocument/2006/relationships" xmlns:p="http://schemas.openxmlformats.org/presentationml/2006/main" xmlns:m="http://schemas.openxmlformats.org/officeDocument/2006/math" xmlns:w="http://schemas.openxmlformats.org/wordprocessingml/2006/main" xmlns:mc="http://schemas.openxmlformats.org/markup-compatibility/2006" showMasterPhAnim="0" showMasterSp="1" show="1">
+<p:sld xmlns:a="http://schemas.openxmlformats.org/drawingml/2006/main" xmlns:r="http://schemas.openxmlformats.org/officeDocument/2006/relationships" xmlns:p="http://schemas.openxmlformats.org/presentationml/2006/main">
   <p:cSld name="Slide 6">
     <p:spTree>
       <p:nvGrpSpPr>
@@ -5813,7 +5638,7 @@
         <p:cNvGrpSpPr/>
         <p:nvPr/>
       </p:nvGrpSpPr>
-      <p:grpSpPr bwMode="auto">
+      <p:grpSpPr>
         <a:xfrm>
           <a:off x="0" y="0"/>
           <a:ext cx="0" cy="0"/>
@@ -5826,10 +5651,10 @@
           <p:cNvPr id="2" name="Text 0"/>
           <p:cNvSpPr/>
           <p:nvPr>
-            <p:ph type="title" idx="100" hasCustomPrompt="1"/>
+            <p:ph idx="100" type="title" hasCustomPrompt="1"/>
           </p:nvPr>
         </p:nvSpPr>
-        <p:spPr bwMode="auto">
+        <p:spPr>
           <a:xfrm>
             <a:off x="548640" y="320040"/>
             <a:ext cx="8046720" cy="822960"/>
@@ -5844,58 +5669,53 @@
           <a:bodyPr wrap="square" rtlCol="0" anchor="ctr"/>
           <a:lstStyle/>
           <a:p>
-            <a:pPr marL="0" indent="0">
+            <a:pPr indent="0" marL="0">
               <a:buNone/>
-              <a:defRPr/>
-            </a:pPr>
-            <a:r>
-              <a:rPr lang="en-US" sz="3200" b="1">
+            </a:pPr>
+            <a:r>
+              <a:rPr lang="en-US" sz="3200" b="1" dirty="0">
                 <a:solidFill>
                   <a:schemeClr val="tx1"/>
                 </a:solidFill>
-                <a:latin typeface="Cambria"/>
-                <a:ea typeface="Cambria"/>
-                <a:cs typeface="Cambria"/>
+                <a:latin typeface="Cambria" pitchFamily="34" charset="0"/>
+                <a:ea typeface="Cambria" pitchFamily="34" charset="-122"/>
+                <a:cs typeface="Cambria" pitchFamily="34" charset="-120"/>
               </a:rPr>
               <a:t>Kokoro звучит естественнее всех</a:t>
             </a:r>
-            <a:endParaRPr lang="en-US" sz="3200"/>
+            <a:endParaRPr lang="en-US" sz="3200" dirty="0"/>
           </a:p>
         </p:txBody>
       </p:sp>
       <p:graphicFrame>
         <p:nvGraphicFramePr>
           <p:cNvPr id="3" name="Chart 0" descr=""/>
-          <p:cNvGraphicFramePr>
-            <a:graphicFrameLocks xmlns:a="http://schemas.openxmlformats.org/drawingml/2006/main"/>
-          </p:cNvGraphicFramePr>
+          <p:cNvGraphicFramePr/>
           <p:nvPr/>
         </p:nvGraphicFramePr>
         <p:xfrm>
           <a:off x="548640" y="1325880"/>
           <a:ext cx="3931920" cy="2926080"/>
         </p:xfrm>
-        <a:graphic>
+        <a:graphic xmlns:a="http://schemas.openxmlformats.org/drawingml/2006/main">
           <a:graphicData uri="http://schemas.openxmlformats.org/drawingml/2006/chart">
-            <c:chart xmlns:c="http://schemas.openxmlformats.org/drawingml/2006/chart" xmlns:r="http://schemas.openxmlformats.org/officeDocument/2006/relationships" r:id="rId3"/>
+            <c:chart xmlns:c="http://schemas.openxmlformats.org/drawingml/2006/chart" r:id="rId1"/>
           </a:graphicData>
         </a:graphic>
       </p:graphicFrame>
       <p:graphicFrame>
         <p:nvGraphicFramePr>
           <p:cNvPr id="4" name="Chart 1" descr=""/>
-          <p:cNvGraphicFramePr>
-            <a:graphicFrameLocks xmlns:a="http://schemas.openxmlformats.org/drawingml/2006/main"/>
-          </p:cNvGraphicFramePr>
+          <p:cNvGraphicFramePr/>
           <p:nvPr/>
         </p:nvGraphicFramePr>
         <p:xfrm>
           <a:off x="4663440" y="1325880"/>
           <a:ext cx="3931920" cy="2926080"/>
         </p:xfrm>
-        <a:graphic>
+        <a:graphic xmlns:a="http://schemas.openxmlformats.org/drawingml/2006/main">
           <a:graphicData uri="http://schemas.openxmlformats.org/drawingml/2006/chart">
-            <c:chart xmlns:c="http://schemas.openxmlformats.org/drawingml/2006/chart" xmlns:r="http://schemas.openxmlformats.org/officeDocument/2006/relationships" r:id="rId4"/>
+            <c:chart xmlns:c="http://schemas.openxmlformats.org/drawingml/2006/chart" r:id="rId2"/>
           </a:graphicData>
         </a:graphic>
       </p:graphicFrame>
@@ -5905,7 +5725,7 @@
           <p:cNvSpPr txBox="1"/>
           <p:nvPr/>
         </p:nvSpPr>
-        <p:spPr bwMode="auto">
+        <p:spPr>
           <a:xfrm>
             <a:off x="548640" y="4389120"/>
             <a:ext cx="8046720" cy="457200"/>
@@ -5920,19 +5740,18 @@
           <a:bodyPr wrap="square" lIns="0" tIns="0" rIns="0" bIns="0" rtlCol="0" anchor="ctr"/>
           <a:lstStyle/>
           <a:p>
-            <a:pPr marL="0" indent="0">
+            <a:pPr indent="0" marL="0">
               <a:buNone/>
-              <a:defRPr/>
-            </a:pPr>
-            <a:r>
-              <a:rPr lang="en-US" sz="1200">
+            </a:pPr>
+            <a:r>
+              <a:rPr lang="en-US" sz="1200" dirty="0">
                 <a:solidFill>
                   <a:schemeClr val="tx2"/>
                 </a:solidFill>
               </a:rPr>
-              <a:t>Цена: скорость Kokoro ≈ 3× реального времени (Piper 24×, eSpeak 56×). Оценка на слух: один оценщик, 6 клипов на систему.</a:t>
-            </a:r>
-            <a:endParaRPr lang="en-US" sz="1200"/>
+              <a:t>Цена: скорость Kokoro ≈ 3× реального времени (Piper 25×, eSpeak 57×). Оценка на слух: один оценщик, 6 клипов на систему.</a:t>
+            </a:r>
+            <a:endParaRPr lang="en-US" sz="1200" dirty="0"/>
           </a:p>
         </p:txBody>
       </p:sp>
@@ -5946,14 +5765,19 @@
             <p:ph type="sldNum" sz="quarter" idx="4294967295"/>
           </p:nvPr>
         </p:nvSpPr>
-        <p:spPr bwMode="auto">
-          <a:xfrm>
-            <a:off x="8321039" y="4754880"/>
+        <p:spPr>
+          <a:xfrm>
+            <a:off x="8321040" y="4754880"/>
             <a:ext cx="457200" cy="228600"/>
           </a:xfrm>
           <a:prstGeom prst="rect">
             <a:avLst/>
           </a:prstGeom>
+          <a:extLst>
+            <a:ext uri="{C572A759-6A51-4108-AA02-DFA0A04FC94B}">
+              <ma14:wrappingTextBoxFlag xmlns:ma14="http://schemas.microsoft.com/office/mac/drawingml/2011/main" val="0"/>
+            </a:ext>
+          </a:extLst>
         </p:spPr>
         <p:txBody>
           <a:bodyPr/>
@@ -5967,11 +5791,9 @@
             </a:lvl1pPr>
           </a:lstStyle>
           <a:p>
-            <a:pPr algn="l">
-              <a:defRPr/>
-            </a:pPr>
+            <a:pPr algn="l"/>
             <a:fld id="{F7021451-1387-4CA6-816F-3879F97B5CBC}" type="slidenum">
-              <a:rPr lang="en-US" b="0"/>
+              <a:rPr b="0" lang="en-US"/>
               <a:t>6</a:t>
             </a:fld>
             <a:endParaRPr lang="en-US"/>
@@ -5983,19 +5805,11 @@
   <p:clrMapOvr>
     <a:masterClrMapping/>
   </p:clrMapOvr>
-  <mc:AlternateContent xmlns:mc="http://schemas.openxmlformats.org/markup-compatibility/2006">
-    <mc:Choice xmlns:p159="http://schemas.microsoft.com/office/powerpoint/2015/09/main" xmlns:p14="http://schemas.microsoft.com/office/powerpoint/2010/main" Requires="p159">
-      <p:transition p14:dur="2000" advClick="1"/>
-    </mc:Choice>
-    <mc:Fallback>
-      <p:transition advClick="1"/>
-    </mc:Fallback>
-  </mc:AlternateContent>
 </p:sld>
 </file>
 
 <file path=ppt/slides/slide7.xml><?xml version="1.0" encoding="utf-8"?>
-<p:sld xmlns:a="http://schemas.openxmlformats.org/drawingml/2006/main" xmlns:r="http://schemas.openxmlformats.org/officeDocument/2006/relationships" xmlns:p="http://schemas.openxmlformats.org/presentationml/2006/main" xmlns:m="http://schemas.openxmlformats.org/officeDocument/2006/math" xmlns:w="http://schemas.openxmlformats.org/wordprocessingml/2006/main" xmlns:mc="http://schemas.openxmlformats.org/markup-compatibility/2006" showMasterPhAnim="0" showMasterSp="1" show="0">
+<p:sld xmlns:a="http://schemas.openxmlformats.org/drawingml/2006/main" xmlns:r="http://schemas.openxmlformats.org/officeDocument/2006/relationships" xmlns:p="http://schemas.openxmlformats.org/presentationml/2006/main">
   <p:cSld name="Slide 7">
     <p:spTree>
       <p:nvGrpSpPr>
@@ -6003,7 +5817,7 @@
         <p:cNvGrpSpPr/>
         <p:nvPr/>
       </p:nvGrpSpPr>
-      <p:grpSpPr bwMode="auto">
+      <p:grpSpPr>
         <a:xfrm>
           <a:off x="0" y="0"/>
           <a:ext cx="0" cy="0"/>
@@ -6016,10 +5830,10 @@
           <p:cNvPr id="2" name="Text 0"/>
           <p:cNvSpPr/>
           <p:nvPr>
-            <p:ph type="title" idx="100" hasCustomPrompt="1"/>
+            <p:ph idx="100" type="title" hasCustomPrompt="1"/>
           </p:nvPr>
         </p:nvSpPr>
-        <p:spPr bwMode="auto">
+        <p:spPr>
           <a:xfrm>
             <a:off x="548640" y="320040"/>
             <a:ext cx="8046720" cy="822960"/>
@@ -6034,22 +5848,21 @@
           <a:bodyPr wrap="square" rtlCol="0" anchor="ctr"/>
           <a:lstStyle/>
           <a:p>
-            <a:pPr marL="0" indent="0">
+            <a:pPr indent="0" marL="0">
               <a:buNone/>
-              <a:defRPr/>
-            </a:pPr>
-            <a:r>
-              <a:rPr lang="en-US" sz="3200" b="1">
+            </a:pPr>
+            <a:r>
+              <a:rPr lang="en-US" sz="3200" b="1" dirty="0">
                 <a:solidFill>
                   <a:schemeClr val="tx1"/>
                 </a:solidFill>
-                <a:latin typeface="Cambria"/>
-                <a:ea typeface="Cambria"/>
-                <a:cs typeface="Cambria"/>
+                <a:latin typeface="Cambria" pitchFamily="34" charset="0"/>
+                <a:ea typeface="Cambria" pitchFamily="34" charset="-122"/>
+                <a:cs typeface="Cambria" pitchFamily="34" charset="-120"/>
               </a:rPr>
               <a:t>Подготовка текста решает «7:30»</a:t>
             </a:r>
-            <a:endParaRPr lang="en-US" sz="3200"/>
+            <a:endParaRPr lang="en-US" sz="3200" dirty="0"/>
           </a:p>
         </p:txBody>
       </p:sp>
@@ -6059,7 +5872,7 @@
           <p:cNvSpPr/>
           <p:nvPr/>
         </p:nvSpPr>
-        <p:spPr bwMode="auto">
+        <p:spPr>
           <a:xfrm>
             <a:off x="548640" y="1371600"/>
             <a:ext cx="3886200" cy="2377440"/>
@@ -6086,7 +5899,7 @@
           <p:cNvSpPr txBox="1"/>
           <p:nvPr/>
         </p:nvSpPr>
-        <p:spPr bwMode="auto">
+        <p:spPr>
           <a:xfrm>
             <a:off x="777240" y="1554480"/>
             <a:ext cx="3474720" cy="914400"/>
@@ -6101,22 +5914,21 @@
           <a:bodyPr wrap="square" lIns="0" tIns="0" rIns="0" bIns="0" rtlCol="0" anchor="ctr"/>
           <a:lstStyle/>
           <a:p>
-            <a:pPr marL="0" indent="0">
+            <a:pPr indent="0" marL="0">
               <a:buNone/>
-              <a:defRPr/>
-            </a:pPr>
-            <a:r>
-              <a:rPr lang="en-US" sz="4400" b="1">
+            </a:pPr>
+            <a:r>
+              <a:rPr lang="en-US" sz="4400" b="1" dirty="0">
                 <a:solidFill>
                   <a:schemeClr val="accent3"/>
                 </a:solidFill>
-                <a:latin typeface="Cambria"/>
-                <a:ea typeface="Cambria"/>
-                <a:cs typeface="Cambria"/>
+                <a:latin typeface="Cambria" pitchFamily="34" charset="0"/>
+                <a:ea typeface="Cambria" pitchFamily="34" charset="-122"/>
+                <a:cs typeface="Cambria" pitchFamily="34" charset="-120"/>
               </a:rPr>
               <a:t>17% → 2,1%</a:t>
             </a:r>
-            <a:endParaRPr lang="en-US" sz="4400"/>
+            <a:endParaRPr lang="en-US" sz="4400" dirty="0"/>
           </a:p>
         </p:txBody>
       </p:sp>
@@ -6126,7 +5938,7 @@
           <p:cNvSpPr txBox="1"/>
           <p:nvPr/>
         </p:nvSpPr>
-        <p:spPr bwMode="auto">
+        <p:spPr>
           <a:xfrm>
             <a:off x="777240" y="2560320"/>
             <a:ext cx="3474720" cy="1005840"/>
@@ -6141,19 +5953,18 @@
           <a:bodyPr wrap="square" lIns="0" tIns="0" rIns="0" bIns="0" rtlCol="0" anchor="t"/>
           <a:lstStyle/>
           <a:p>
-            <a:pPr marL="0" indent="0">
+            <a:pPr indent="0" marL="0">
               <a:buNone/>
-              <a:defRPr/>
-            </a:pPr>
-            <a:r>
-              <a:rPr lang="en-US" sz="1400">
+            </a:pPr>
+            <a:r>
+              <a:rPr lang="en-US" sz="1400" dirty="0">
                 <a:solidFill>
                   <a:schemeClr val="tx2"/>
                 </a:solidFill>
               </a:rPr>
               <a:t>WER на предложениях со временем («7:30», «12:00»): без подготовки и с ней</a:t>
             </a:r>
-            <a:endParaRPr lang="en-US" sz="1400"/>
+            <a:endParaRPr lang="en-US" sz="1400" dirty="0"/>
           </a:p>
         </p:txBody>
       </p:sp>
@@ -6163,7 +5974,7 @@
           <p:cNvSpPr/>
           <p:nvPr/>
         </p:nvSpPr>
-        <p:spPr bwMode="auto">
+        <p:spPr>
           <a:xfrm>
             <a:off x="4709160" y="1371600"/>
             <a:ext cx="3886200" cy="2377440"/>
@@ -6190,7 +6001,7 @@
           <p:cNvSpPr txBox="1"/>
           <p:nvPr/>
         </p:nvSpPr>
-        <p:spPr bwMode="auto">
+        <p:spPr>
           <a:xfrm>
             <a:off x="4937760" y="1554480"/>
             <a:ext cx="3474720" cy="914400"/>
@@ -6205,22 +6016,21 @@
           <a:bodyPr wrap="square" lIns="0" tIns="0" rIns="0" bIns="0" rtlCol="0" anchor="ctr"/>
           <a:lstStyle/>
           <a:p>
-            <a:pPr marL="0" indent="0">
+            <a:pPr indent="0" marL="0">
               <a:buNone/>
-              <a:defRPr/>
-            </a:pPr>
-            <a:r>
-              <a:rPr lang="en-US" sz="4400" b="1">
+            </a:pPr>
+            <a:r>
+              <a:rPr lang="en-US" sz="4400" b="1" dirty="0">
                 <a:solidFill>
                   <a:schemeClr val="accent2"/>
                 </a:solidFill>
-                <a:latin typeface="Cambria"/>
-                <a:ea typeface="Cambria"/>
-                <a:cs typeface="Cambria"/>
+                <a:latin typeface="Cambria" pitchFamily="34" charset="0"/>
+                <a:ea typeface="Cambria" pitchFamily="34" charset="-122"/>
+                <a:cs typeface="Cambria" pitchFamily="34" charset="-120"/>
               </a:rPr>
               <a:t>0,28 → 0,03 с</a:t>
             </a:r>
-            <a:endParaRPr lang="en-US" sz="4400"/>
+            <a:endParaRPr lang="en-US" sz="4400" dirty="0"/>
           </a:p>
         </p:txBody>
       </p:sp>
@@ -6230,7 +6040,7 @@
           <p:cNvSpPr txBox="1"/>
           <p:nvPr/>
         </p:nvSpPr>
-        <p:spPr bwMode="auto">
+        <p:spPr>
           <a:xfrm>
             <a:off x="4937760" y="2560320"/>
             <a:ext cx="3474720" cy="1005840"/>
@@ -6245,19 +6055,18 @@
           <a:bodyPr wrap="square" lIns="0" tIns="0" rIns="0" bIns="0" rtlCol="0" anchor="t"/>
           <a:lstStyle/>
           <a:p>
-            <a:pPr marL="0" indent="0">
+            <a:pPr indent="0" marL="0">
               <a:buNone/>
-              <a:defRPr/>
-            </a:pPr>
-            <a:r>
-              <a:rPr lang="en-US" sz="1400">
+            </a:pPr>
+            <a:r>
+              <a:rPr lang="en-US" sz="1400" dirty="0">
                 <a:solidFill>
                   <a:schemeClr val="tx2"/>
                 </a:solidFill>
               </a:rPr>
               <a:t>самая длинная пауза внутри клипа на «9:15» и «6:05»: пауза на двоеточии исчезает</a:t>
             </a:r>
-            <a:endParaRPr lang="en-US" sz="1400"/>
+            <a:endParaRPr lang="en-US" sz="1400" dirty="0"/>
           </a:p>
         </p:txBody>
       </p:sp>
@@ -6267,7 +6076,7 @@
           <p:cNvSpPr txBox="1"/>
           <p:nvPr/>
         </p:nvSpPr>
-        <p:spPr bwMode="auto">
+        <p:spPr>
           <a:xfrm>
             <a:off x="548640" y="4023360"/>
             <a:ext cx="8046720" cy="548640"/>
@@ -6282,19 +6091,18 @@
           <a:bodyPr wrap="square" lIns="0" tIns="0" rIns="0" bIns="0" rtlCol="0" anchor="ctr"/>
           <a:lstStyle/>
           <a:p>
-            <a:pPr marL="0" indent="0">
+            <a:pPr indent="0" marL="0">
               <a:buNone/>
-              <a:defRPr/>
-            </a:pPr>
-            <a:r>
-              <a:rPr lang="en-US" sz="1400">
+            </a:pPr>
+            <a:r>
+              <a:rPr lang="en-US" sz="1400" dirty="0">
                 <a:solidFill>
                   <a:schemeClr val="tx1"/>
                 </a:solidFill>
               </a:rPr>
               <a:t>Одна функция заменяет «7:30» на «7 30»; на слух без неё слышна странная пауза и ошибка чтения.</a:t>
             </a:r>
-            <a:endParaRPr lang="en-US" sz="1400"/>
+            <a:endParaRPr lang="en-US" sz="1400" dirty="0"/>
           </a:p>
         </p:txBody>
       </p:sp>
@@ -6308,14 +6116,19 @@
             <p:ph type="sldNum" sz="quarter" idx="4294967295"/>
           </p:nvPr>
         </p:nvSpPr>
-        <p:spPr bwMode="auto">
-          <a:xfrm>
-            <a:off x="8321039" y="4754880"/>
+        <p:spPr>
+          <a:xfrm>
+            <a:off x="8321040" y="4754880"/>
             <a:ext cx="457200" cy="228600"/>
           </a:xfrm>
           <a:prstGeom prst="rect">
             <a:avLst/>
           </a:prstGeom>
+          <a:extLst>
+            <a:ext uri="{C572A759-6A51-4108-AA02-DFA0A04FC94B}">
+              <ma14:wrappingTextBoxFlag xmlns:ma14="http://schemas.microsoft.com/office/mac/drawingml/2011/main" val="0"/>
+            </a:ext>
+          </a:extLst>
         </p:spPr>
         <p:txBody>
           <a:bodyPr/>
@@ -6329,11 +6142,9 @@
             </a:lvl1pPr>
           </a:lstStyle>
           <a:p>
-            <a:pPr algn="l">
-              <a:defRPr/>
-            </a:pPr>
+            <a:pPr algn="l"/>
             <a:fld id="{F7021451-1387-4CA6-816F-3879F97B5CBC}" type="slidenum">
-              <a:rPr lang="en-US" b="0"/>
+              <a:rPr b="0" lang="en-US"/>
               <a:t>7</a:t>
             </a:fld>
             <a:endParaRPr lang="en-US"/>
@@ -6345,19 +6156,11 @@
   <p:clrMapOvr>
     <a:masterClrMapping/>
   </p:clrMapOvr>
-  <mc:AlternateContent xmlns:mc="http://schemas.openxmlformats.org/markup-compatibility/2006">
-    <mc:Choice xmlns:p159="http://schemas.microsoft.com/office/powerpoint/2015/09/main" xmlns:p14="http://schemas.microsoft.com/office/powerpoint/2010/main" Requires="p159">
-      <p:transition p14:dur="2000" advClick="1"/>
-    </mc:Choice>
-    <mc:Fallback>
-      <p:transition advClick="1"/>
-    </mc:Fallback>
-  </mc:AlternateContent>
 </p:sld>
 </file>
 
 <file path=ppt/slides/slide8.xml><?xml version="1.0" encoding="utf-8"?>
-<p:sld xmlns:a="http://schemas.openxmlformats.org/drawingml/2006/main" xmlns:r="http://schemas.openxmlformats.org/officeDocument/2006/relationships" xmlns:p="http://schemas.openxmlformats.org/presentationml/2006/main" xmlns:m="http://schemas.openxmlformats.org/officeDocument/2006/math" xmlns:w="http://schemas.openxmlformats.org/wordprocessingml/2006/main" xmlns:mc="http://schemas.openxmlformats.org/markup-compatibility/2006" showMasterPhAnim="0" showMasterSp="1" show="1">
+<p:sld xmlns:a="http://schemas.openxmlformats.org/drawingml/2006/main" xmlns:r="http://schemas.openxmlformats.org/officeDocument/2006/relationships" xmlns:p="http://schemas.openxmlformats.org/presentationml/2006/main">
   <p:cSld name="Slide 8">
     <p:spTree>
       <p:nvGrpSpPr>
@@ -6365,7 +6168,7 @@
         <p:cNvGrpSpPr/>
         <p:nvPr/>
       </p:nvGrpSpPr>
-      <p:grpSpPr bwMode="auto">
+      <p:grpSpPr>
         <a:xfrm>
           <a:off x="0" y="0"/>
           <a:ext cx="0" cy="0"/>
@@ -6378,10 +6181,10 @@
           <p:cNvPr id="2" name="Text 0"/>
           <p:cNvSpPr/>
           <p:nvPr>
-            <p:ph type="title" idx="100" hasCustomPrompt="1"/>
+            <p:ph idx="100" type="title" hasCustomPrompt="1"/>
           </p:nvPr>
         </p:nvSpPr>
-        <p:spPr bwMode="auto">
+        <p:spPr>
           <a:xfrm>
             <a:off x="548640" y="320040"/>
             <a:ext cx="8046720" cy="822960"/>
@@ -6396,22 +6199,21 @@
           <a:bodyPr wrap="square" rtlCol="0" anchor="ctr"/>
           <a:lstStyle/>
           <a:p>
-            <a:pPr marL="0" indent="0">
+            <a:pPr indent="0" marL="0">
               <a:buNone/>
-              <a:defRPr/>
-            </a:pPr>
-            <a:r>
-              <a:rPr lang="en-US" sz="3200" b="1">
+            </a:pPr>
+            <a:r>
+              <a:rPr lang="en-US" sz="3200" b="1" dirty="0">
                 <a:solidFill>
                   <a:schemeClr val="tx1"/>
                 </a:solidFill>
-                <a:latin typeface="Cambria"/>
-                <a:ea typeface="Cambria"/>
-                <a:cs typeface="Cambria"/>
+                <a:latin typeface="Cambria" pitchFamily="34" charset="0"/>
+                <a:ea typeface="Cambria" pitchFamily="34" charset="-122"/>
+                <a:cs typeface="Cambria" pitchFamily="34" charset="-120"/>
               </a:rPr>
               <a:t>Анализ ошибок</a:t>
             </a:r>
-            <a:endParaRPr lang="en-US" sz="3200"/>
+            <a:endParaRPr lang="en-US" sz="3200" dirty="0"/>
           </a:p>
         </p:txBody>
       </p:sp>
@@ -6419,9 +6221,15 @@
         <p:nvGraphicFramePr>
           <p:cNvPr id="9" name="Table 0"/>
           <p:cNvGraphicFramePr>
-            <a:graphicFrameLocks xmlns:a="http://schemas.openxmlformats.org/drawingml/2006/main" noGrp="1"/>
+            <a:graphicFrameLocks noGrp="1"/>
           </p:cNvGraphicFramePr>
-          <p:nvPr/>
+          <p:nvPr>
+            <p:extLst>
+              <p:ext uri="{D42A27DB-BD31-4B8C-83A1-F6EECF244321}">
+                <p14:modId xmlns:p14="http://schemas.microsoft.com/office/powerpoint/2010/main" val="1579011935"/>
+              </p:ext>
+            </p:extLst>
+          </p:nvPr>
         </p:nvGraphicFramePr>
         <p:xfrm>
           <a:off x="548640" y="1325880"/>
@@ -6430,7 +6238,7 @@
         <a:graphic>
           <a:graphicData uri="http://schemas.openxmlformats.org/drawingml/2006/table">
             <a:tbl>
-              <a:tblPr firstRow="0" firstCol="0" lastRow="0" lastCol="0" bandRow="0" bandCol="0"/>
+              <a:tblPr/>
               <a:tblGrid>
                 <a:gridCol w="2743200"/>
                 <a:gridCol w="2651760"/>
@@ -6440,42 +6248,58 @@
                 <a:tc>
                   <a:txBody>
                     <a:bodyPr/>
+                    <a:lstStyle/>
                     <a:p>
-                      <a:pPr marL="0" indent="0">
+                      <a:pPr indent="0" marL="0">
                         <a:buNone/>
-                        <a:defRPr/>
                       </a:pPr>
                       <a:r>
-                        <a:rPr lang="en-US" sz="1400" b="1">
+                        <a:rPr lang="en-US" sz="1400" b="1" dirty="0">
                           <a:solidFill>
                             <a:srgbClr val="FFFFFF"/>
                           </a:solidFill>
                         </a:rPr>
                         <a:t>Что произошло</a:t>
                       </a:r>
-                      <a:endParaRPr lang="en-US" sz="1400"/>
+                      <a:endParaRPr lang="en-US" sz="1400" dirty="0"/>
                     </a:p>
                   </a:txBody>
                   <a:tcPr marL="91440" marR="91440" marT="36576" marB="36576" anchor="ctr">
-                    <a:lnL w="6350" algn="ctr">
+                    <a:lnL w="6350" cap="flat" cmpd="sng" algn="ctr">
                       <a:solidFill>
                         <a:srgbClr val="D5D8E8"/>
                       </a:solidFill>
+                      <a:prstDash val="solid"/>
+                      <a:round/>
+                      <a:headEnd type="none" w="med" len="med"/>
+                      <a:tailEnd type="none" w="med" len="med"/>
                     </a:lnL>
-                    <a:lnR w="6350" algn="ctr">
+                    <a:lnR w="6350" cap="flat" cmpd="sng" algn="ctr">
                       <a:solidFill>
                         <a:srgbClr val="D5D8E8"/>
                       </a:solidFill>
+                      <a:prstDash val="solid"/>
+                      <a:round/>
+                      <a:headEnd type="none" w="med" len="med"/>
+                      <a:tailEnd type="none" w="med" len="med"/>
                     </a:lnR>
-                    <a:lnT w="6350" algn="ctr">
+                    <a:lnT w="6350" cap="flat" cmpd="sng" algn="ctr">
                       <a:solidFill>
                         <a:srgbClr val="D5D8E8"/>
                       </a:solidFill>
+                      <a:prstDash val="solid"/>
+                      <a:round/>
+                      <a:headEnd type="none" w="med" len="med"/>
+                      <a:tailEnd type="none" w="med" len="med"/>
                     </a:lnT>
-                    <a:lnB w="6350" algn="ctr">
+                    <a:lnB w="6350" cap="flat" cmpd="sng" algn="ctr">
                       <a:solidFill>
                         <a:srgbClr val="D5D8E8"/>
                       </a:solidFill>
+                      <a:prstDash val="solid"/>
+                      <a:round/>
+                      <a:headEnd type="none" w="med" len="med"/>
+                      <a:tailEnd type="none" w="med" len="med"/>
                     </a:lnB>
                     <a:solidFill>
                       <a:srgbClr val="1B1F3B"/>
@@ -6485,42 +6309,58 @@
                 <a:tc>
                   <a:txBody>
                     <a:bodyPr/>
+                    <a:lstStyle/>
                     <a:p>
-                      <a:pPr marL="0" indent="0">
+                      <a:pPr indent="0" marL="0">
                         <a:buNone/>
-                        <a:defRPr/>
                       </a:pPr>
                       <a:r>
-                        <a:rPr lang="en-US" sz="1400" b="1">
+                        <a:rPr lang="en-US" sz="1400" b="1" dirty="0">
                           <a:solidFill>
                             <a:srgbClr val="FFFFFF"/>
                           </a:solidFill>
                         </a:rPr>
                         <a:t>Причина</a:t>
                       </a:r>
-                      <a:endParaRPr lang="en-US" sz="1400"/>
+                      <a:endParaRPr lang="en-US" sz="1400" dirty="0"/>
                     </a:p>
                   </a:txBody>
                   <a:tcPr marL="91440" marR="91440" marT="36576" marB="36576" anchor="ctr">
-                    <a:lnL w="6350" algn="ctr">
+                    <a:lnL w="6350" cap="flat" cmpd="sng" algn="ctr">
                       <a:solidFill>
                         <a:srgbClr val="D5D8E8"/>
                       </a:solidFill>
+                      <a:prstDash val="solid"/>
+                      <a:round/>
+                      <a:headEnd type="none" w="med" len="med"/>
+                      <a:tailEnd type="none" w="med" len="med"/>
                     </a:lnL>
-                    <a:lnR w="6350" algn="ctr">
+                    <a:lnR w="6350" cap="flat" cmpd="sng" algn="ctr">
                       <a:solidFill>
                         <a:srgbClr val="D5D8E8"/>
                       </a:solidFill>
+                      <a:prstDash val="solid"/>
+                      <a:round/>
+                      <a:headEnd type="none" w="med" len="med"/>
+                      <a:tailEnd type="none" w="med" len="med"/>
                     </a:lnR>
-                    <a:lnT w="6350" algn="ctr">
+                    <a:lnT w="6350" cap="flat" cmpd="sng" algn="ctr">
                       <a:solidFill>
                         <a:srgbClr val="D5D8E8"/>
                       </a:solidFill>
+                      <a:prstDash val="solid"/>
+                      <a:round/>
+                      <a:headEnd type="none" w="med" len="med"/>
+                      <a:tailEnd type="none" w="med" len="med"/>
                     </a:lnT>
-                    <a:lnB w="6350" algn="ctr">
+                    <a:lnB w="6350" cap="flat" cmpd="sng" algn="ctr">
                       <a:solidFill>
                         <a:srgbClr val="D5D8E8"/>
                       </a:solidFill>
+                      <a:prstDash val="solid"/>
+                      <a:round/>
+                      <a:headEnd type="none" w="med" len="med"/>
+                      <a:tailEnd type="none" w="med" len="med"/>
                     </a:lnB>
                     <a:solidFill>
                       <a:srgbClr val="1B1F3B"/>
@@ -6530,42 +6370,58 @@
                 <a:tc>
                   <a:txBody>
                     <a:bodyPr/>
+                    <a:lstStyle/>
                     <a:p>
-                      <a:pPr marL="0" indent="0">
+                      <a:pPr indent="0" marL="0">
                         <a:buNone/>
-                        <a:defRPr/>
                       </a:pPr>
                       <a:r>
-                        <a:rPr lang="en-US" sz="1400" b="1">
+                        <a:rPr lang="en-US" sz="1400" b="1" dirty="0">
                           <a:solidFill>
                             <a:srgbClr val="FFFFFF"/>
                           </a:solidFill>
                         </a:rPr>
                         <a:t>Что сделали</a:t>
                       </a:r>
-                      <a:endParaRPr lang="en-US" sz="1400"/>
+                      <a:endParaRPr lang="en-US" sz="1400" dirty="0"/>
                     </a:p>
                   </a:txBody>
                   <a:tcPr marL="91440" marR="91440" marT="36576" marB="36576" anchor="ctr">
-                    <a:lnL w="6350" algn="ctr">
+                    <a:lnL w="6350" cap="flat" cmpd="sng" algn="ctr">
                       <a:solidFill>
                         <a:srgbClr val="D5D8E8"/>
                       </a:solidFill>
+                      <a:prstDash val="solid"/>
+                      <a:round/>
+                      <a:headEnd type="none" w="med" len="med"/>
+                      <a:tailEnd type="none" w="med" len="med"/>
                     </a:lnL>
-                    <a:lnR w="6350" algn="ctr">
+                    <a:lnR w="6350" cap="flat" cmpd="sng" algn="ctr">
                       <a:solidFill>
                         <a:srgbClr val="D5D8E8"/>
                       </a:solidFill>
+                      <a:prstDash val="solid"/>
+                      <a:round/>
+                      <a:headEnd type="none" w="med" len="med"/>
+                      <a:tailEnd type="none" w="med" len="med"/>
                     </a:lnR>
-                    <a:lnT w="6350" algn="ctr">
+                    <a:lnT w="6350" cap="flat" cmpd="sng" algn="ctr">
                       <a:solidFill>
                         <a:srgbClr val="D5D8E8"/>
                       </a:solidFill>
+                      <a:prstDash val="solid"/>
+                      <a:round/>
+                      <a:headEnd type="none" w="med" len="med"/>
+                      <a:tailEnd type="none" w="med" len="med"/>
                     </a:lnT>
-                    <a:lnB w="6350" algn="ctr">
+                    <a:lnB w="6350" cap="flat" cmpd="sng" algn="ctr">
                       <a:solidFill>
                         <a:srgbClr val="D5D8E8"/>
                       </a:solidFill>
+                      <a:prstDash val="solid"/>
+                      <a:round/>
+                      <a:headEnd type="none" w="med" len="med"/>
+                      <a:tailEnd type="none" w="med" len="med"/>
                     </a:lnB>
                     <a:solidFill>
                       <a:srgbClr val="1B1F3B"/>
@@ -6577,42 +6433,58 @@
                 <a:tc>
                   <a:txBody>
                     <a:bodyPr/>
+                    <a:lstStyle/>
                     <a:p>
-                      <a:pPr marL="0" indent="0">
+                      <a:pPr indent="0" marL="0">
                         <a:buNone/>
-                        <a:defRPr/>
                       </a:pPr>
                       <a:r>
-                        <a:rPr lang="en-US" sz="1400">
+                        <a:rPr lang="en-US" sz="1400" dirty="0">
                           <a:solidFill>
                             <a:srgbClr val="1B1F3B"/>
                           </a:solidFill>
                         </a:rPr>
                         <a:t>Скрежет на телефоне</a:t>
                       </a:r>
-                      <a:endParaRPr lang="en-US" sz="1400"/>
+                      <a:endParaRPr lang="en-US" sz="1400" dirty="0"/>
                     </a:p>
                   </a:txBody>
                   <a:tcPr marL="91440" marR="91440" marT="36576" marB="36576" anchor="ctr">
-                    <a:lnL w="6350" algn="ctr">
+                    <a:lnL w="6350" cap="flat" cmpd="sng" algn="ctr">
                       <a:solidFill>
                         <a:srgbClr val="D5D8E8"/>
                       </a:solidFill>
+                      <a:prstDash val="solid"/>
+                      <a:round/>
+                      <a:headEnd type="none" w="med" len="med"/>
+                      <a:tailEnd type="none" w="med" len="med"/>
                     </a:lnL>
-                    <a:lnR w="6350" algn="ctr">
+                    <a:lnR w="6350" cap="flat" cmpd="sng" algn="ctr">
                       <a:solidFill>
                         <a:srgbClr val="D5D8E8"/>
                       </a:solidFill>
+                      <a:prstDash val="solid"/>
+                      <a:round/>
+                      <a:headEnd type="none" w="med" len="med"/>
+                      <a:tailEnd type="none" w="med" len="med"/>
                     </a:lnR>
-                    <a:lnT w="6350" algn="ctr">
+                    <a:lnT w="6350" cap="flat" cmpd="sng" algn="ctr">
                       <a:solidFill>
                         <a:srgbClr val="D5D8E8"/>
                       </a:solidFill>
+                      <a:prstDash val="solid"/>
+                      <a:round/>
+                      <a:headEnd type="none" w="med" len="med"/>
+                      <a:tailEnd type="none" w="med" len="med"/>
                     </a:lnT>
-                    <a:lnB w="6350" algn="ctr">
+                    <a:lnB w="6350" cap="flat" cmpd="sng" algn="ctr">
                       <a:solidFill>
                         <a:srgbClr val="D5D8E8"/>
                       </a:solidFill>
+                      <a:prstDash val="solid"/>
+                      <a:round/>
+                      <a:headEnd type="none" w="med" len="med"/>
+                      <a:tailEnd type="none" w="med" len="med"/>
                     </a:lnB>
                     <a:solidFill>
                       <a:srgbClr val="FFFFFF"/>
@@ -6622,42 +6494,58 @@
                 <a:tc>
                   <a:txBody>
                     <a:bodyPr/>
+                    <a:lstStyle/>
                     <a:p>
-                      <a:pPr marL="0" indent="0">
+                      <a:pPr indent="0" marL="0">
                         <a:buNone/>
-                        <a:defRPr/>
                       </a:pPr>
                       <a:r>
-                        <a:rPr lang="en-US" sz="1400">
+                        <a:rPr lang="en-US" sz="1400" dirty="0">
                           <a:solidFill>
                             <a:srgbClr val="1B1F3B"/>
                           </a:solidFill>
                         </a:rPr>
                         <a:t>WebGPU на мобильном GPU</a:t>
                       </a:r>
-                      <a:endParaRPr lang="en-US" sz="1400"/>
+                      <a:endParaRPr lang="en-US" sz="1400" dirty="0"/>
                     </a:p>
                   </a:txBody>
                   <a:tcPr marL="91440" marR="91440" marT="36576" marB="36576" anchor="ctr">
-                    <a:lnL w="6350" algn="ctr">
+                    <a:lnL w="6350" cap="flat" cmpd="sng" algn="ctr">
                       <a:solidFill>
                         <a:srgbClr val="D5D8E8"/>
                       </a:solidFill>
+                      <a:prstDash val="solid"/>
+                      <a:round/>
+                      <a:headEnd type="none" w="med" len="med"/>
+                      <a:tailEnd type="none" w="med" len="med"/>
                     </a:lnL>
-                    <a:lnR w="6350" algn="ctr">
+                    <a:lnR w="6350" cap="flat" cmpd="sng" algn="ctr">
                       <a:solidFill>
                         <a:srgbClr val="D5D8E8"/>
                       </a:solidFill>
+                      <a:prstDash val="solid"/>
+                      <a:round/>
+                      <a:headEnd type="none" w="med" len="med"/>
+                      <a:tailEnd type="none" w="med" len="med"/>
                     </a:lnR>
-                    <a:lnT w="6350" algn="ctr">
+                    <a:lnT w="6350" cap="flat" cmpd="sng" algn="ctr">
                       <a:solidFill>
                         <a:srgbClr val="D5D8E8"/>
                       </a:solidFill>
+                      <a:prstDash val="solid"/>
+                      <a:round/>
+                      <a:headEnd type="none" w="med" len="med"/>
+                      <a:tailEnd type="none" w="med" len="med"/>
                     </a:lnT>
-                    <a:lnB w="6350" algn="ctr">
+                    <a:lnB w="6350" cap="flat" cmpd="sng" algn="ctr">
                       <a:solidFill>
                         <a:srgbClr val="D5D8E8"/>
                       </a:solidFill>
+                      <a:prstDash val="solid"/>
+                      <a:round/>
+                      <a:headEnd type="none" w="med" len="med"/>
+                      <a:tailEnd type="none" w="med" len="med"/>
                     </a:lnB>
                     <a:solidFill>
                       <a:srgbClr val="FFFFFF"/>
@@ -6667,42 +6555,58 @@
                 <a:tc>
                   <a:txBody>
                     <a:bodyPr/>
+                    <a:lstStyle/>
                     <a:p>
-                      <a:pPr marL="0" indent="0">
+                      <a:pPr indent="0" marL="0">
                         <a:buNone/>
-                        <a:defRPr/>
                       </a:pPr>
                       <a:r>
-                        <a:rPr lang="en-US" sz="1400">
+                        <a:rPr lang="en-US" sz="1400" dirty="0">
                           <a:solidFill>
                             <a:srgbClr val="1B1F3B"/>
                           </a:solidFill>
                         </a:rPr>
                         <a:t>WASM на телефонах</a:t>
                       </a:r>
-                      <a:endParaRPr lang="en-US" sz="1400"/>
+                      <a:endParaRPr lang="en-US" sz="1400" dirty="0"/>
                     </a:p>
                   </a:txBody>
                   <a:tcPr marL="91440" marR="91440" marT="36576" marB="36576" anchor="ctr">
-                    <a:lnL w="6350" algn="ctr">
+                    <a:lnL w="6350" cap="flat" cmpd="sng" algn="ctr">
                       <a:solidFill>
                         <a:srgbClr val="D5D8E8"/>
                       </a:solidFill>
+                      <a:prstDash val="solid"/>
+                      <a:round/>
+                      <a:headEnd type="none" w="med" len="med"/>
+                      <a:tailEnd type="none" w="med" len="med"/>
                     </a:lnL>
-                    <a:lnR w="6350" algn="ctr">
+                    <a:lnR w="6350" cap="flat" cmpd="sng" algn="ctr">
                       <a:solidFill>
                         <a:srgbClr val="D5D8E8"/>
                       </a:solidFill>
+                      <a:prstDash val="solid"/>
+                      <a:round/>
+                      <a:headEnd type="none" w="med" len="med"/>
+                      <a:tailEnd type="none" w="med" len="med"/>
                     </a:lnR>
-                    <a:lnT w="6350" algn="ctr">
+                    <a:lnT w="6350" cap="flat" cmpd="sng" algn="ctr">
                       <a:solidFill>
                         <a:srgbClr val="D5D8E8"/>
                       </a:solidFill>
+                      <a:prstDash val="solid"/>
+                      <a:round/>
+                      <a:headEnd type="none" w="med" len="med"/>
+                      <a:tailEnd type="none" w="med" len="med"/>
                     </a:lnT>
-                    <a:lnB w="6350" algn="ctr">
+                    <a:lnB w="6350" cap="flat" cmpd="sng" algn="ctr">
                       <a:solidFill>
                         <a:srgbClr val="D5D8E8"/>
                       </a:solidFill>
+                      <a:prstDash val="solid"/>
+                      <a:round/>
+                      <a:headEnd type="none" w="med" len="med"/>
+                      <a:tailEnd type="none" w="med" len="med"/>
                     </a:lnB>
                     <a:solidFill>
                       <a:srgbClr val="FFFFFF"/>
@@ -6714,42 +6618,58 @@
                 <a:tc>
                   <a:txBody>
                     <a:bodyPr/>
+                    <a:lstStyle/>
                     <a:p>
-                      <a:pPr marL="0" indent="0">
+                      <a:pPr indent="0" marL="0">
                         <a:buNone/>
-                        <a:defRPr/>
                       </a:pPr>
                       <a:r>
-                        <a:rPr lang="en-US" sz="1400">
+                        <a:rPr lang="en-US" sz="1400" dirty="0">
                           <a:solidFill>
                             <a:srgbClr val="1B1F3B"/>
                           </a:solidFill>
                         </a:rPr>
                         <a:t>Пауза на «7:30»</a:t>
                       </a:r>
-                      <a:endParaRPr lang="en-US" sz="1400"/>
+                      <a:endParaRPr lang="en-US" sz="1400" dirty="0"/>
                     </a:p>
                   </a:txBody>
                   <a:tcPr marL="91440" marR="91440" marT="36576" marB="36576" anchor="ctr">
-                    <a:lnL w="6350" algn="ctr">
+                    <a:lnL w="6350" cap="flat" cmpd="sng" algn="ctr">
                       <a:solidFill>
                         <a:srgbClr val="D5D8E8"/>
                       </a:solidFill>
+                      <a:prstDash val="solid"/>
+                      <a:round/>
+                      <a:headEnd type="none" w="med" len="med"/>
+                      <a:tailEnd type="none" w="med" len="med"/>
                     </a:lnL>
-                    <a:lnR w="6350" algn="ctr">
+                    <a:lnR w="6350" cap="flat" cmpd="sng" algn="ctr">
                       <a:solidFill>
                         <a:srgbClr val="D5D8E8"/>
                       </a:solidFill>
+                      <a:prstDash val="solid"/>
+                      <a:round/>
+                      <a:headEnd type="none" w="med" len="med"/>
+                      <a:tailEnd type="none" w="med" len="med"/>
                     </a:lnR>
-                    <a:lnT w="6350" algn="ctr">
+                    <a:lnT w="6350" cap="flat" cmpd="sng" algn="ctr">
                       <a:solidFill>
                         <a:srgbClr val="D5D8E8"/>
                       </a:solidFill>
+                      <a:prstDash val="solid"/>
+                      <a:round/>
+                      <a:headEnd type="none" w="med" len="med"/>
+                      <a:tailEnd type="none" w="med" len="med"/>
                     </a:lnT>
-                    <a:lnB w="6350" algn="ctr">
+                    <a:lnB w="6350" cap="flat" cmpd="sng" algn="ctr">
                       <a:solidFill>
                         <a:srgbClr val="D5D8E8"/>
                       </a:solidFill>
+                      <a:prstDash val="solid"/>
+                      <a:round/>
+                      <a:headEnd type="none" w="med" len="med"/>
+                      <a:tailEnd type="none" w="med" len="med"/>
                     </a:lnB>
                     <a:solidFill>
                       <a:srgbClr val="FFFFFF"/>
@@ -6759,42 +6679,58 @@
                 <a:tc>
                   <a:txBody>
                     <a:bodyPr/>
+                    <a:lstStyle/>
                     <a:p>
-                      <a:pPr marL="0" indent="0">
+                      <a:pPr indent="0" marL="0">
                         <a:buNone/>
-                        <a:defRPr/>
                       </a:pPr>
                       <a:r>
-                        <a:rPr lang="en-US" sz="1400">
+                        <a:rPr lang="en-US" sz="1400" dirty="0">
                           <a:solidFill>
                             <a:srgbClr val="1B1F3B"/>
                           </a:solidFill>
                         </a:rPr>
                         <a:t>«:» читается как пауза</a:t>
                       </a:r>
-                      <a:endParaRPr lang="en-US" sz="1400"/>
+                      <a:endParaRPr lang="en-US" sz="1400" dirty="0"/>
                     </a:p>
                   </a:txBody>
                   <a:tcPr marL="91440" marR="91440" marT="36576" marB="36576" anchor="ctr">
-                    <a:lnL w="6350" algn="ctr">
+                    <a:lnL w="6350" cap="flat" cmpd="sng" algn="ctr">
                       <a:solidFill>
                         <a:srgbClr val="D5D8E8"/>
                       </a:solidFill>
+                      <a:prstDash val="solid"/>
+                      <a:round/>
+                      <a:headEnd type="none" w="med" len="med"/>
+                      <a:tailEnd type="none" w="med" len="med"/>
                     </a:lnL>
-                    <a:lnR w="6350" algn="ctr">
+                    <a:lnR w="6350" cap="flat" cmpd="sng" algn="ctr">
                       <a:solidFill>
                         <a:srgbClr val="D5D8E8"/>
                       </a:solidFill>
+                      <a:prstDash val="solid"/>
+                      <a:round/>
+                      <a:headEnd type="none" w="med" len="med"/>
+                      <a:tailEnd type="none" w="med" len="med"/>
                     </a:lnR>
-                    <a:lnT w="6350" algn="ctr">
+                    <a:lnT w="6350" cap="flat" cmpd="sng" algn="ctr">
                       <a:solidFill>
                         <a:srgbClr val="D5D8E8"/>
                       </a:solidFill>
+                      <a:prstDash val="solid"/>
+                      <a:round/>
+                      <a:headEnd type="none" w="med" len="med"/>
+                      <a:tailEnd type="none" w="med" len="med"/>
                     </a:lnT>
-                    <a:lnB w="6350" algn="ctr">
+                    <a:lnB w="6350" cap="flat" cmpd="sng" algn="ctr">
                       <a:solidFill>
                         <a:srgbClr val="D5D8E8"/>
                       </a:solidFill>
+                      <a:prstDash val="solid"/>
+                      <a:round/>
+                      <a:headEnd type="none" w="med" len="med"/>
+                      <a:tailEnd type="none" w="med" len="med"/>
                     </a:lnB>
                     <a:solidFill>
                       <a:srgbClr val="FFFFFF"/>
@@ -6804,42 +6740,58 @@
                 <a:tc>
                   <a:txBody>
                     <a:bodyPr/>
+                    <a:lstStyle/>
                     <a:p>
-                      <a:pPr marL="0" indent="0">
+                      <a:pPr indent="0" marL="0">
                         <a:buNone/>
-                        <a:defRPr/>
                       </a:pPr>
                       <a:r>
-                        <a:rPr lang="en-US" sz="1400">
+                        <a:rPr lang="en-US" sz="1400" dirty="0">
                           <a:solidFill>
                             <a:srgbClr val="1B1F3B"/>
                           </a:solidFill>
                         </a:rPr>
                         <a:t>Время заменяется словами</a:t>
                       </a:r>
-                      <a:endParaRPr lang="en-US" sz="1400"/>
+                      <a:endParaRPr lang="en-US" sz="1400" dirty="0"/>
                     </a:p>
                   </a:txBody>
                   <a:tcPr marL="91440" marR="91440" marT="36576" marB="36576" anchor="ctr">
-                    <a:lnL w="6350" algn="ctr">
+                    <a:lnL w="6350" cap="flat" cmpd="sng" algn="ctr">
                       <a:solidFill>
                         <a:srgbClr val="D5D8E8"/>
                       </a:solidFill>
+                      <a:prstDash val="solid"/>
+                      <a:round/>
+                      <a:headEnd type="none" w="med" len="med"/>
+                      <a:tailEnd type="none" w="med" len="med"/>
                     </a:lnL>
-                    <a:lnR w="6350" algn="ctr">
+                    <a:lnR w="6350" cap="flat" cmpd="sng" algn="ctr">
                       <a:solidFill>
                         <a:srgbClr val="D5D8E8"/>
                       </a:solidFill>
+                      <a:prstDash val="solid"/>
+                      <a:round/>
+                      <a:headEnd type="none" w="med" len="med"/>
+                      <a:tailEnd type="none" w="med" len="med"/>
                     </a:lnR>
-                    <a:lnT w="6350" algn="ctr">
+                    <a:lnT w="6350" cap="flat" cmpd="sng" algn="ctr">
                       <a:solidFill>
                         <a:srgbClr val="D5D8E8"/>
                       </a:solidFill>
+                      <a:prstDash val="solid"/>
+                      <a:round/>
+                      <a:headEnd type="none" w="med" len="med"/>
+                      <a:tailEnd type="none" w="med" len="med"/>
                     </a:lnT>
-                    <a:lnB w="6350" algn="ctr">
+                    <a:lnB w="6350" cap="flat" cmpd="sng" algn="ctr">
                       <a:solidFill>
                         <a:srgbClr val="D5D8E8"/>
                       </a:solidFill>
+                      <a:prstDash val="solid"/>
+                      <a:round/>
+                      <a:headEnd type="none" w="med" len="med"/>
+                      <a:tailEnd type="none" w="med" len="med"/>
                     </a:lnB>
                     <a:solidFill>
                       <a:srgbClr val="FFFFFF"/>
@@ -6851,42 +6803,58 @@
                 <a:tc>
                   <a:txBody>
                     <a:bodyPr/>
+                    <a:lstStyle/>
                     <a:p>
-                      <a:pPr marL="0" indent="0">
+                      <a:pPr indent="0" marL="0">
                         <a:buNone/>
-                        <a:defRPr/>
                       </a:pPr>
                       <a:r>
-                        <a:rPr lang="en-US" sz="1400">
+                        <a:rPr lang="en-US" sz="1400" dirty="0">
                           <a:solidFill>
                             <a:srgbClr val="1B1F3B"/>
                           </a:solidFill>
                         </a:rPr>
                         <a:t>Нет паузы после заголовка</a:t>
                       </a:r>
-                      <a:endParaRPr lang="en-US" sz="1400"/>
+                      <a:endParaRPr lang="en-US" sz="1400" dirty="0"/>
                     </a:p>
                   </a:txBody>
                   <a:tcPr marL="91440" marR="91440" marT="36576" marB="36576" anchor="ctr">
-                    <a:lnL w="6350" algn="ctr">
+                    <a:lnL w="6350" cap="flat" cmpd="sng" algn="ctr">
                       <a:solidFill>
                         <a:srgbClr val="D5D8E8"/>
                       </a:solidFill>
+                      <a:prstDash val="solid"/>
+                      <a:round/>
+                      <a:headEnd type="none" w="med" len="med"/>
+                      <a:tailEnd type="none" w="med" len="med"/>
                     </a:lnL>
-                    <a:lnR w="6350" algn="ctr">
+                    <a:lnR w="6350" cap="flat" cmpd="sng" algn="ctr">
                       <a:solidFill>
                         <a:srgbClr val="D5D8E8"/>
                       </a:solidFill>
+                      <a:prstDash val="solid"/>
+                      <a:round/>
+                      <a:headEnd type="none" w="med" len="med"/>
+                      <a:tailEnd type="none" w="med" len="med"/>
                     </a:lnR>
-                    <a:lnT w="6350" algn="ctr">
+                    <a:lnT w="6350" cap="flat" cmpd="sng" algn="ctr">
                       <a:solidFill>
                         <a:srgbClr val="D5D8E8"/>
                       </a:solidFill>
+                      <a:prstDash val="solid"/>
+                      <a:round/>
+                      <a:headEnd type="none" w="med" len="med"/>
+                      <a:tailEnd type="none" w="med" len="med"/>
                     </a:lnT>
-                    <a:lnB w="6350" algn="ctr">
+                    <a:lnB w="6350" cap="flat" cmpd="sng" algn="ctr">
                       <a:solidFill>
                         <a:srgbClr val="D5D8E8"/>
                       </a:solidFill>
+                      <a:prstDash val="solid"/>
+                      <a:round/>
+                      <a:headEnd type="none" w="med" len="med"/>
+                      <a:tailEnd type="none" w="med" len="med"/>
                     </a:lnB>
                     <a:solidFill>
                       <a:srgbClr val="FFFFFF"/>
@@ -6896,42 +6864,58 @@
                 <a:tc>
                   <a:txBody>
                     <a:bodyPr/>
+                    <a:lstStyle/>
                     <a:p>
-                      <a:pPr marL="0" indent="0">
+                      <a:pPr indent="0" marL="0">
                         <a:buNone/>
-                        <a:defRPr/>
                       </a:pPr>
                       <a:r>
-                        <a:rPr lang="en-US" sz="1400">
+                        <a:rPr lang="en-US" sz="1400" dirty="0">
                           <a:solidFill>
                             <a:srgbClr val="1B1F3B"/>
                           </a:solidFill>
                         </a:rPr>
                         <a:t>PDF склеивал заголовок</a:t>
                       </a:r>
-                      <a:endParaRPr lang="en-US" sz="1400"/>
+                      <a:endParaRPr lang="en-US" sz="1400" dirty="0"/>
                     </a:p>
                   </a:txBody>
                   <a:tcPr marL="91440" marR="91440" marT="36576" marB="36576" anchor="ctr">
-                    <a:lnL w="6350" algn="ctr">
+                    <a:lnL w="6350" cap="flat" cmpd="sng" algn="ctr">
                       <a:solidFill>
                         <a:srgbClr val="D5D8E8"/>
                       </a:solidFill>
+                      <a:prstDash val="solid"/>
+                      <a:round/>
+                      <a:headEnd type="none" w="med" len="med"/>
+                      <a:tailEnd type="none" w="med" len="med"/>
                     </a:lnL>
-                    <a:lnR w="6350" algn="ctr">
+                    <a:lnR w="6350" cap="flat" cmpd="sng" algn="ctr">
                       <a:solidFill>
                         <a:srgbClr val="D5D8E8"/>
                       </a:solidFill>
+                      <a:prstDash val="solid"/>
+                      <a:round/>
+                      <a:headEnd type="none" w="med" len="med"/>
+                      <a:tailEnd type="none" w="med" len="med"/>
                     </a:lnR>
-                    <a:lnT w="6350" algn="ctr">
+                    <a:lnT w="6350" cap="flat" cmpd="sng" algn="ctr">
                       <a:solidFill>
                         <a:srgbClr val="D5D8E8"/>
                       </a:solidFill>
+                      <a:prstDash val="solid"/>
+                      <a:round/>
+                      <a:headEnd type="none" w="med" len="med"/>
+                      <a:tailEnd type="none" w="med" len="med"/>
                     </a:lnT>
-                    <a:lnB w="6350" algn="ctr">
+                    <a:lnB w="6350" cap="flat" cmpd="sng" algn="ctr">
                       <a:solidFill>
                         <a:srgbClr val="D5D8E8"/>
                       </a:solidFill>
+                      <a:prstDash val="solid"/>
+                      <a:round/>
+                      <a:headEnd type="none" w="med" len="med"/>
+                      <a:tailEnd type="none" w="med" len="med"/>
                     </a:lnB>
                     <a:solidFill>
                       <a:srgbClr val="FFFFFF"/>
@@ -6941,42 +6925,58 @@
                 <a:tc>
                   <a:txBody>
                     <a:bodyPr/>
+                    <a:lstStyle/>
                     <a:p>
-                      <a:pPr marL="0" indent="0">
+                      <a:pPr indent="0" marL="0">
                         <a:buNone/>
-                        <a:defRPr/>
                       </a:pPr>
                       <a:r>
-                        <a:rPr lang="en-US" sz="1400">
+                        <a:rPr lang="en-US" sz="1400" dirty="0">
                           <a:solidFill>
                             <a:srgbClr val="1B1F3B"/>
                           </a:solidFill>
                         </a:rPr>
                         <a:t>Определение заголовков</a:t>
                       </a:r>
-                      <a:endParaRPr lang="en-US" sz="1400"/>
+                      <a:endParaRPr lang="en-US" sz="1400" dirty="0"/>
                     </a:p>
                   </a:txBody>
                   <a:tcPr marL="91440" marR="91440" marT="36576" marB="36576" anchor="ctr">
-                    <a:lnL w="6350" algn="ctr">
+                    <a:lnL w="6350" cap="flat" cmpd="sng" algn="ctr">
                       <a:solidFill>
                         <a:srgbClr val="D5D8E8"/>
                       </a:solidFill>
+                      <a:prstDash val="solid"/>
+                      <a:round/>
+                      <a:headEnd type="none" w="med" len="med"/>
+                      <a:tailEnd type="none" w="med" len="med"/>
                     </a:lnL>
-                    <a:lnR w="6350" algn="ctr">
+                    <a:lnR w="6350" cap="flat" cmpd="sng" algn="ctr">
                       <a:solidFill>
                         <a:srgbClr val="D5D8E8"/>
                       </a:solidFill>
+                      <a:prstDash val="solid"/>
+                      <a:round/>
+                      <a:headEnd type="none" w="med" len="med"/>
+                      <a:tailEnd type="none" w="med" len="med"/>
                     </a:lnR>
-                    <a:lnT w="6350" algn="ctr">
+                    <a:lnT w="6350" cap="flat" cmpd="sng" algn="ctr">
                       <a:solidFill>
                         <a:srgbClr val="D5D8E8"/>
                       </a:solidFill>
+                      <a:prstDash val="solid"/>
+                      <a:round/>
+                      <a:headEnd type="none" w="med" len="med"/>
+                      <a:tailEnd type="none" w="med" len="med"/>
                     </a:lnT>
-                    <a:lnB w="6350" algn="ctr">
+                    <a:lnB w="6350" cap="flat" cmpd="sng" algn="ctr">
                       <a:solidFill>
                         <a:srgbClr val="D5D8E8"/>
                       </a:solidFill>
+                      <a:prstDash val="solid"/>
+                      <a:round/>
+                      <a:headEnd type="none" w="med" len="med"/>
+                      <a:tailEnd type="none" w="med" len="med"/>
                     </a:lnB>
                     <a:solidFill>
                       <a:srgbClr val="FFFFFF"/>
@@ -6988,42 +6988,58 @@
                 <a:tc>
                   <a:txBody>
                     <a:bodyPr/>
+                    <a:lstStyle/>
                     <a:p>
-                      <a:pPr marL="0" indent="0">
+                      <a:pPr indent="0" marL="0">
                         <a:buNone/>
-                        <a:defRPr/>
                       </a:pPr>
                       <a:r>
-                        <a:rPr lang="en-US" sz="1400">
+                        <a:rPr lang="en-US" sz="1400" dirty="0">
                           <a:solidFill>
                             <a:srgbClr val="1B1F3B"/>
                           </a:solidFill>
                         </a:rPr>
                         <a:t>Вылет бота на Windows</a:t>
                       </a:r>
-                      <a:endParaRPr lang="en-US" sz="1400"/>
+                      <a:endParaRPr lang="en-US" sz="1400" dirty="0"/>
                     </a:p>
                   </a:txBody>
                   <a:tcPr marL="91440" marR="91440" marT="36576" marB="36576" anchor="ctr">
-                    <a:lnL w="6350" algn="ctr">
+                    <a:lnL w="6350" cap="flat" cmpd="sng" algn="ctr">
                       <a:solidFill>
                         <a:srgbClr val="D5D8E8"/>
                       </a:solidFill>
+                      <a:prstDash val="solid"/>
+                      <a:round/>
+                      <a:headEnd type="none" w="med" len="med"/>
+                      <a:tailEnd type="none" w="med" len="med"/>
                     </a:lnL>
-                    <a:lnR w="6350" algn="ctr">
+                    <a:lnR w="6350" cap="flat" cmpd="sng" algn="ctr">
                       <a:solidFill>
                         <a:srgbClr val="D5D8E8"/>
                       </a:solidFill>
+                      <a:prstDash val="solid"/>
+                      <a:round/>
+                      <a:headEnd type="none" w="med" len="med"/>
+                      <a:tailEnd type="none" w="med" len="med"/>
                     </a:lnR>
-                    <a:lnT w="6350" algn="ctr">
+                    <a:lnT w="6350" cap="flat" cmpd="sng" algn="ctr">
                       <a:solidFill>
                         <a:srgbClr val="D5D8E8"/>
                       </a:solidFill>
+                      <a:prstDash val="solid"/>
+                      <a:round/>
+                      <a:headEnd type="none" w="med" len="med"/>
+                      <a:tailEnd type="none" w="med" len="med"/>
                     </a:lnT>
-                    <a:lnB w="6350" algn="ctr">
+                    <a:lnB w="6350" cap="flat" cmpd="sng" algn="ctr">
                       <a:solidFill>
                         <a:srgbClr val="D5D8E8"/>
                       </a:solidFill>
+                      <a:prstDash val="solid"/>
+                      <a:round/>
+                      <a:headEnd type="none" w="med" len="med"/>
+                      <a:tailEnd type="none" w="med" len="med"/>
                     </a:lnB>
                     <a:solidFill>
                       <a:srgbClr val="FFFFFF"/>
@@ -7033,42 +7049,58 @@
                 <a:tc>
                   <a:txBody>
                     <a:bodyPr/>
+                    <a:lstStyle/>
                     <a:p>
-                      <a:pPr marL="0" indent="0">
+                      <a:pPr indent="0" marL="0">
                         <a:buNone/>
-                        <a:defRPr/>
                       </a:pPr>
                       <a:r>
-                        <a:rPr lang="en-US" sz="1400">
+                        <a:rPr lang="en-US" sz="1400" dirty="0">
                           <a:solidFill>
                             <a:srgbClr val="1B1F3B"/>
                           </a:solidFill>
                         </a:rPr>
                         <a:t>Малый стек потока</a:t>
                       </a:r>
-                      <a:endParaRPr lang="en-US" sz="1400"/>
+                      <a:endParaRPr lang="en-US" sz="1400" dirty="0"/>
                     </a:p>
                   </a:txBody>
                   <a:tcPr marL="91440" marR="91440" marT="36576" marB="36576" anchor="ctr">
-                    <a:lnL w="6350" algn="ctr">
+                    <a:lnL w="6350" cap="flat" cmpd="sng" algn="ctr">
                       <a:solidFill>
                         <a:srgbClr val="D5D8E8"/>
                       </a:solidFill>
+                      <a:prstDash val="solid"/>
+                      <a:round/>
+                      <a:headEnd type="none" w="med" len="med"/>
+                      <a:tailEnd type="none" w="med" len="med"/>
                     </a:lnL>
-                    <a:lnR w="6350" algn="ctr">
+                    <a:lnR w="6350" cap="flat" cmpd="sng" algn="ctr">
                       <a:solidFill>
                         <a:srgbClr val="D5D8E8"/>
                       </a:solidFill>
+                      <a:prstDash val="solid"/>
+                      <a:round/>
+                      <a:headEnd type="none" w="med" len="med"/>
+                      <a:tailEnd type="none" w="med" len="med"/>
                     </a:lnR>
-                    <a:lnT w="6350" algn="ctr">
+                    <a:lnT w="6350" cap="flat" cmpd="sng" algn="ctr">
                       <a:solidFill>
                         <a:srgbClr val="D5D8E8"/>
                       </a:solidFill>
+                      <a:prstDash val="solid"/>
+                      <a:round/>
+                      <a:headEnd type="none" w="med" len="med"/>
+                      <a:tailEnd type="none" w="med" len="med"/>
                     </a:lnT>
-                    <a:lnB w="6350" algn="ctr">
+                    <a:lnB w="6350" cap="flat" cmpd="sng" algn="ctr">
                       <a:solidFill>
                         <a:srgbClr val="D5D8E8"/>
                       </a:solidFill>
+                      <a:prstDash val="solid"/>
+                      <a:round/>
+                      <a:headEnd type="none" w="med" len="med"/>
+                      <a:tailEnd type="none" w="med" len="med"/>
                     </a:lnB>
                     <a:solidFill>
                       <a:srgbClr val="FFFFFF"/>
@@ -7078,42 +7110,58 @@
                 <a:tc>
                   <a:txBody>
                     <a:bodyPr/>
+                    <a:lstStyle/>
                     <a:p>
-                      <a:pPr marL="0" indent="0">
+                      <a:pPr indent="0" marL="0">
                         <a:buNone/>
-                        <a:defRPr/>
                       </a:pPr>
                       <a:r>
-                        <a:rPr lang="en-US" sz="1400">
+                        <a:rPr lang="en-US" sz="1400" dirty="0">
                           <a:solidFill>
                             <a:srgbClr val="1B1F3B"/>
                           </a:solidFill>
                         </a:rPr>
                         <a:t>Потоки со стеком 64 МБ</a:t>
                       </a:r>
-                      <a:endParaRPr lang="en-US" sz="1400"/>
+                      <a:endParaRPr lang="en-US" sz="1400" dirty="0"/>
                     </a:p>
                   </a:txBody>
                   <a:tcPr marL="91440" marR="91440" marT="36576" marB="36576" anchor="ctr">
-                    <a:lnL w="6350" algn="ctr">
+                    <a:lnL w="6350" cap="flat" cmpd="sng" algn="ctr">
                       <a:solidFill>
                         <a:srgbClr val="D5D8E8"/>
                       </a:solidFill>
+                      <a:prstDash val="solid"/>
+                      <a:round/>
+                      <a:headEnd type="none" w="med" len="med"/>
+                      <a:tailEnd type="none" w="med" len="med"/>
                     </a:lnL>
-                    <a:lnR w="6350" algn="ctr">
+                    <a:lnR w="6350" cap="flat" cmpd="sng" algn="ctr">
                       <a:solidFill>
                         <a:srgbClr val="D5D8E8"/>
                       </a:solidFill>
+                      <a:prstDash val="solid"/>
+                      <a:round/>
+                      <a:headEnd type="none" w="med" len="med"/>
+                      <a:tailEnd type="none" w="med" len="med"/>
                     </a:lnR>
-                    <a:lnT w="6350" algn="ctr">
+                    <a:lnT w="6350" cap="flat" cmpd="sng" algn="ctr">
                       <a:solidFill>
                         <a:srgbClr val="D5D8E8"/>
                       </a:solidFill>
+                      <a:prstDash val="solid"/>
+                      <a:round/>
+                      <a:headEnd type="none" w="med" len="med"/>
+                      <a:tailEnd type="none" w="med" len="med"/>
                     </a:lnT>
-                    <a:lnB w="6350" algn="ctr">
+                    <a:lnB w="6350" cap="flat" cmpd="sng" algn="ctr">
                       <a:solidFill>
                         <a:srgbClr val="D5D8E8"/>
                       </a:solidFill>
+                      <a:prstDash val="solid"/>
+                      <a:round/>
+                      <a:headEnd type="none" w="med" len="med"/>
+                      <a:tailEnd type="none" w="med" len="med"/>
                     </a:lnB>
                     <a:solidFill>
                       <a:srgbClr val="FFFFFF"/>
@@ -7125,42 +7173,58 @@
                 <a:tc>
                   <a:txBody>
                     <a:bodyPr/>
+                    <a:lstStyle/>
                     <a:p>
-                      <a:pPr marL="0" indent="0">
+                      <a:pPr indent="0" marL="0">
                         <a:buNone/>
-                        <a:defRPr/>
                       </a:pPr>
                       <a:r>
-                        <a:rPr lang="en-US" sz="1400">
+                        <a:rPr lang="en-US" sz="1400" dirty="0">
                           <a:solidFill>
                             <a:srgbClr val="1B1F3B"/>
                           </a:solidFill>
                         </a:rPr>
                         <a:t>«Elm St.» → «Elmsent»</a:t>
                       </a:r>
-                      <a:endParaRPr lang="en-US" sz="1400"/>
+                      <a:endParaRPr lang="en-US" sz="1400" dirty="0"/>
                     </a:p>
                   </a:txBody>
                   <a:tcPr marL="91440" marR="91440" marT="36576" marB="36576" anchor="ctr">
-                    <a:lnL w="6350" algn="ctr">
+                    <a:lnL w="6350" cap="flat" cmpd="sng" algn="ctr">
                       <a:solidFill>
                         <a:srgbClr val="D5D8E8"/>
                       </a:solidFill>
+                      <a:prstDash val="solid"/>
+                      <a:round/>
+                      <a:headEnd type="none" w="med" len="med"/>
+                      <a:tailEnd type="none" w="med" len="med"/>
                     </a:lnL>
-                    <a:lnR w="6350" algn="ctr">
+                    <a:lnR w="6350" cap="flat" cmpd="sng" algn="ctr">
                       <a:solidFill>
                         <a:srgbClr val="D5D8E8"/>
                       </a:solidFill>
+                      <a:prstDash val="solid"/>
+                      <a:round/>
+                      <a:headEnd type="none" w="med" len="med"/>
+                      <a:tailEnd type="none" w="med" len="med"/>
                     </a:lnR>
-                    <a:lnT w="6350" algn="ctr">
+                    <a:lnT w="6350" cap="flat" cmpd="sng" algn="ctr">
                       <a:solidFill>
                         <a:srgbClr val="D5D8E8"/>
                       </a:solidFill>
+                      <a:prstDash val="solid"/>
+                      <a:round/>
+                      <a:headEnd type="none" w="med" len="med"/>
+                      <a:tailEnd type="none" w="med" len="med"/>
                     </a:lnT>
-                    <a:lnB w="6350" algn="ctr">
+                    <a:lnB w="6350" cap="flat" cmpd="sng" algn="ctr">
                       <a:solidFill>
                         <a:srgbClr val="D5D8E8"/>
                       </a:solidFill>
+                      <a:prstDash val="solid"/>
+                      <a:round/>
+                      <a:headEnd type="none" w="med" len="med"/>
+                      <a:tailEnd type="none" w="med" len="med"/>
                     </a:lnB>
                     <a:solidFill>
                       <a:srgbClr val="FFFFFF"/>
@@ -7170,42 +7234,58 @@
                 <a:tc>
                   <a:txBody>
                     <a:bodyPr/>
+                    <a:lstStyle/>
                     <a:p>
-                      <a:pPr marL="0" indent="0">
+                      <a:pPr indent="0" marL="0">
                         <a:buNone/>
-                        <a:defRPr/>
                       </a:pPr>
                       <a:r>
-                        <a:rPr lang="en-US" sz="1400">
+                        <a:rPr lang="en-US" sz="1400" dirty="0">
                           <a:solidFill>
                             <a:srgbClr val="1B1F3B"/>
                           </a:solidFill>
                         </a:rPr>
                         <a:t>Сокращение не раскрыто</a:t>
                       </a:r>
-                      <a:endParaRPr lang="en-US" sz="1400"/>
+                      <a:endParaRPr lang="en-US" sz="1400" dirty="0"/>
                     </a:p>
                   </a:txBody>
                   <a:tcPr marL="91440" marR="91440" marT="36576" marB="36576" anchor="ctr">
-                    <a:lnL w="6350" algn="ctr">
+                    <a:lnL w="6350" cap="flat" cmpd="sng" algn="ctr">
                       <a:solidFill>
                         <a:srgbClr val="D5D8E8"/>
                       </a:solidFill>
+                      <a:prstDash val="solid"/>
+                      <a:round/>
+                      <a:headEnd type="none" w="med" len="med"/>
+                      <a:tailEnd type="none" w="med" len="med"/>
                     </a:lnL>
-                    <a:lnR w="6350" algn="ctr">
+                    <a:lnR w="6350" cap="flat" cmpd="sng" algn="ctr">
                       <a:solidFill>
                         <a:srgbClr val="D5D8E8"/>
                       </a:solidFill>
+                      <a:prstDash val="solid"/>
+                      <a:round/>
+                      <a:headEnd type="none" w="med" len="med"/>
+                      <a:tailEnd type="none" w="med" len="med"/>
                     </a:lnR>
-                    <a:lnT w="6350" algn="ctr">
+                    <a:lnT w="6350" cap="flat" cmpd="sng" algn="ctr">
                       <a:solidFill>
                         <a:srgbClr val="D5D8E8"/>
                       </a:solidFill>
+                      <a:prstDash val="solid"/>
+                      <a:round/>
+                      <a:headEnd type="none" w="med" len="med"/>
+                      <a:tailEnd type="none" w="med" len="med"/>
                     </a:lnT>
-                    <a:lnB w="6350" algn="ctr">
+                    <a:lnB w="6350" cap="flat" cmpd="sng" algn="ctr">
                       <a:solidFill>
                         <a:srgbClr val="D5D8E8"/>
                       </a:solidFill>
+                      <a:prstDash val="solid"/>
+                      <a:round/>
+                      <a:headEnd type="none" w="med" len="med"/>
+                      <a:tailEnd type="none" w="med" len="med"/>
                     </a:lnB>
                     <a:solidFill>
                       <a:srgbClr val="FFFFFF"/>
@@ -7215,42 +7295,58 @@
                 <a:tc>
                   <a:txBody>
                     <a:bodyPr/>
+                    <a:lstStyle/>
                     <a:p>
-                      <a:pPr marL="0" indent="0">
+                      <a:pPr indent="0" marL="0">
                         <a:buNone/>
-                        <a:defRPr/>
                       </a:pPr>
                       <a:r>
-                        <a:rPr lang="en-US" sz="1400">
+                        <a:rPr lang="en-US" sz="1400" dirty="0">
                           <a:solidFill>
                             <a:srgbClr val="1B1F3B"/>
                           </a:solidFill>
                         </a:rPr>
-                        <a:t>Не исправлено</a:t>
+                        <a:t>«St.» → «Street» до синтеза</a:t>
                       </a:r>
-                      <a:endParaRPr lang="en-US" sz="1400"/>
+                      <a:endParaRPr lang="en-US" sz="1400" dirty="0"/>
                     </a:p>
                   </a:txBody>
                   <a:tcPr marL="91440" marR="91440" marT="36576" marB="36576" anchor="ctr">
-                    <a:lnL w="6350" algn="ctr">
+                    <a:lnL w="6350" cap="flat" cmpd="sng" algn="ctr">
                       <a:solidFill>
                         <a:srgbClr val="D5D8E8"/>
                       </a:solidFill>
+                      <a:prstDash val="solid"/>
+                      <a:round/>
+                      <a:headEnd type="none" w="med" len="med"/>
+                      <a:tailEnd type="none" w="med" len="med"/>
                     </a:lnL>
-                    <a:lnR w="6350" algn="ctr">
+                    <a:lnR w="6350" cap="flat" cmpd="sng" algn="ctr">
                       <a:solidFill>
                         <a:srgbClr val="D5D8E8"/>
                       </a:solidFill>
+                      <a:prstDash val="solid"/>
+                      <a:round/>
+                      <a:headEnd type="none" w="med" len="med"/>
+                      <a:tailEnd type="none" w="med" len="med"/>
                     </a:lnR>
-                    <a:lnT w="6350" algn="ctr">
+                    <a:lnT w="6350" cap="flat" cmpd="sng" algn="ctr">
                       <a:solidFill>
                         <a:srgbClr val="D5D8E8"/>
                       </a:solidFill>
+                      <a:prstDash val="solid"/>
+                      <a:round/>
+                      <a:headEnd type="none" w="med" len="med"/>
+                      <a:tailEnd type="none" w="med" len="med"/>
                     </a:lnT>
-                    <a:lnB w="6350" algn="ctr">
+                    <a:lnB w="6350" cap="flat" cmpd="sng" algn="ctr">
                       <a:solidFill>
                         <a:srgbClr val="D5D8E8"/>
                       </a:solidFill>
+                      <a:prstDash val="solid"/>
+                      <a:round/>
+                      <a:headEnd type="none" w="med" len="med"/>
+                      <a:tailEnd type="none" w="med" len="med"/>
                     </a:lnB>
                     <a:solidFill>
                       <a:srgbClr val="FFFFFF"/>
@@ -7268,7 +7364,7 @@
           <p:cNvSpPr txBox="1"/>
           <p:nvPr/>
         </p:nvSpPr>
-        <p:spPr bwMode="auto">
+        <p:spPr>
           <a:xfrm>
             <a:off x="548640" y="4297680"/>
             <a:ext cx="8046720" cy="365760"/>
@@ -7283,19 +7379,18 @@
           <a:bodyPr wrap="square" lIns="0" tIns="0" rIns="0" bIns="0" rtlCol="0" anchor="ctr"/>
           <a:lstStyle/>
           <a:p>
-            <a:pPr marL="0" indent="0">
+            <a:pPr indent="0" marL="0">
               <a:buNone/>
-              <a:defRPr/>
-            </a:pPr>
-            <a:r>
-              <a:rPr lang="en-US" sz="1400">
+            </a:pPr>
+            <a:r>
+              <a:rPr lang="en-US" sz="1400" dirty="0">
                 <a:solidFill>
                   <a:schemeClr val="tx2"/>
                 </a:solidFill>
               </a:rPr>
               <a:t>Каждая найденная ошибка превращена в тест или записана в ограничения.</a:t>
             </a:r>
-            <a:endParaRPr lang="en-US" sz="1400"/>
+            <a:endParaRPr lang="en-US" sz="1400" dirty="0"/>
           </a:p>
         </p:txBody>
       </p:sp>
@@ -7309,14 +7404,19 @@
             <p:ph type="sldNum" sz="quarter" idx="4294967295"/>
           </p:nvPr>
         </p:nvSpPr>
-        <p:spPr bwMode="auto">
-          <a:xfrm>
-            <a:off x="8321039" y="4754880"/>
+        <p:spPr>
+          <a:xfrm>
+            <a:off x="8321040" y="4754880"/>
             <a:ext cx="457200" cy="228600"/>
           </a:xfrm>
           <a:prstGeom prst="rect">
             <a:avLst/>
           </a:prstGeom>
+          <a:extLst>
+            <a:ext uri="{C572A759-6A51-4108-AA02-DFA0A04FC94B}">
+              <ma14:wrappingTextBoxFlag xmlns:ma14="http://schemas.microsoft.com/office/mac/drawingml/2011/main" val="0"/>
+            </a:ext>
+          </a:extLst>
         </p:spPr>
         <p:txBody>
           <a:bodyPr/>
@@ -7330,11 +7430,9 @@
             </a:lvl1pPr>
           </a:lstStyle>
           <a:p>
-            <a:pPr algn="l">
-              <a:defRPr/>
-            </a:pPr>
+            <a:pPr algn="l"/>
             <a:fld id="{F7021451-1387-4CA6-816F-3879F97B5CBC}" type="slidenum">
-              <a:rPr lang="en-US" b="0"/>
+              <a:rPr b="0" lang="en-US"/>
               <a:t>8</a:t>
             </a:fld>
             <a:endParaRPr lang="en-US"/>
@@ -7346,19 +7444,11 @@
   <p:clrMapOvr>
     <a:masterClrMapping/>
   </p:clrMapOvr>
-  <mc:AlternateContent xmlns:mc="http://schemas.openxmlformats.org/markup-compatibility/2006">
-    <mc:Choice xmlns:p159="http://schemas.microsoft.com/office/powerpoint/2015/09/main" xmlns:p14="http://schemas.microsoft.com/office/powerpoint/2010/main" Requires="p159">
-      <p:transition p14:dur="2000" advClick="1"/>
-    </mc:Choice>
-    <mc:Fallback>
-      <p:transition advClick="1"/>
-    </mc:Fallback>
-  </mc:AlternateContent>
 </p:sld>
 </file>
 
 <file path=ppt/slides/slide9.xml><?xml version="1.0" encoding="utf-8"?>
-<p:sld xmlns:a="http://schemas.openxmlformats.org/drawingml/2006/main" xmlns:r="http://schemas.openxmlformats.org/officeDocument/2006/relationships" xmlns:p="http://schemas.openxmlformats.org/presentationml/2006/main" xmlns:m="http://schemas.openxmlformats.org/officeDocument/2006/math" xmlns:w="http://schemas.openxmlformats.org/wordprocessingml/2006/main" xmlns:mc="http://schemas.openxmlformats.org/markup-compatibility/2006" showMasterPhAnim="0" showMasterSp="1" show="1">
+<p:sld xmlns:a="http://schemas.openxmlformats.org/drawingml/2006/main" xmlns:r="http://schemas.openxmlformats.org/officeDocument/2006/relationships" xmlns:p="http://schemas.openxmlformats.org/presentationml/2006/main">
   <p:cSld name="Slide 9">
     <p:spTree>
       <p:nvGrpSpPr>
@@ -7366,7 +7456,7 @@
         <p:cNvGrpSpPr/>
         <p:nvPr/>
       </p:nvGrpSpPr>
-      <p:grpSpPr bwMode="auto">
+      <p:grpSpPr>
         <a:xfrm>
           <a:off x="0" y="0"/>
           <a:ext cx="0" cy="0"/>
@@ -7379,10 +7469,10 @@
           <p:cNvPr id="2" name="Text 0"/>
           <p:cNvSpPr/>
           <p:nvPr>
-            <p:ph type="title" idx="100" hasCustomPrompt="1"/>
+            <p:ph idx="100" type="title" hasCustomPrompt="1"/>
           </p:nvPr>
         </p:nvSpPr>
-        <p:spPr bwMode="auto">
+        <p:spPr>
           <a:xfrm>
             <a:off x="548640" y="320040"/>
             <a:ext cx="8046720" cy="822960"/>
@@ -7397,22 +7487,21 @@
           <a:bodyPr wrap="square" rtlCol="0" anchor="ctr"/>
           <a:lstStyle/>
           <a:p>
-            <a:pPr marL="0" indent="0">
+            <a:pPr indent="0" marL="0">
               <a:buNone/>
-              <a:defRPr/>
-            </a:pPr>
-            <a:r>
-              <a:rPr lang="en-US" sz="3200" b="1">
+            </a:pPr>
+            <a:r>
+              <a:rPr lang="en-US" sz="3200" b="1" dirty="0">
                 <a:solidFill>
                   <a:schemeClr val="tx1"/>
                 </a:solidFill>
-                <a:latin typeface="Cambria"/>
-                <a:ea typeface="Cambria"/>
-                <a:cs typeface="Cambria"/>
+                <a:latin typeface="Cambria" pitchFamily="34" charset="0"/>
+                <a:ea typeface="Cambria" pitchFamily="34" charset="-122"/>
+                <a:cs typeface="Cambria" pitchFamily="34" charset="-120"/>
               </a:rPr>
               <a:t>Ограничения и что дальше</a:t>
             </a:r>
-            <a:endParaRPr lang="en-US" sz="3200"/>
+            <a:endParaRPr lang="en-US" sz="3200" dirty="0"/>
           </a:p>
         </p:txBody>
       </p:sp>
@@ -7422,10 +7511,10 @@
           <p:cNvSpPr/>
           <p:nvPr/>
         </p:nvSpPr>
-        <p:spPr bwMode="auto">
+        <p:spPr>
           <a:xfrm>
             <a:off x="548640" y="1371600"/>
-            <a:ext cx="3886200" cy="3017519"/>
+            <a:ext cx="3886200" cy="3017520"/>
           </a:xfrm>
           <a:prstGeom prst="roundRect">
             <a:avLst>
@@ -7449,9 +7538,9 @@
           <p:cNvSpPr txBox="1"/>
           <p:nvPr/>
         </p:nvSpPr>
-        <p:spPr bwMode="auto">
-          <a:xfrm>
-            <a:off x="777240" y="1508759"/>
+        <p:spPr>
+          <a:xfrm>
+            <a:off x="777240" y="1508760"/>
             <a:ext cx="3474720" cy="457200"/>
           </a:xfrm>
           <a:prstGeom prst="rect">
@@ -7464,22 +7553,21 @@
           <a:bodyPr wrap="square" lIns="0" tIns="0" rIns="0" bIns="0" rtlCol="0" anchor="ctr"/>
           <a:lstStyle/>
           <a:p>
-            <a:pPr marL="0" indent="0">
+            <a:pPr indent="0" marL="0">
               <a:buNone/>
-              <a:defRPr/>
-            </a:pPr>
-            <a:r>
-              <a:rPr lang="en-US" sz="2000" b="1">
+            </a:pPr>
+            <a:r>
+              <a:rPr lang="en-US" sz="2000" b="1" dirty="0">
                 <a:solidFill>
                   <a:schemeClr val="accent3"/>
                 </a:solidFill>
-                <a:latin typeface="Cambria"/>
-                <a:ea typeface="Cambria"/>
-                <a:cs typeface="Cambria"/>
+                <a:latin typeface="Cambria" pitchFamily="34" charset="0"/>
+                <a:ea typeface="Cambria" pitchFamily="34" charset="-122"/>
+                <a:cs typeface="Cambria" pitchFamily="34" charset="-120"/>
               </a:rPr>
               <a:t>Ограничения</a:t>
             </a:r>
-            <a:endParaRPr lang="en-US" sz="2000"/>
+            <a:endParaRPr lang="en-US" sz="2000" dirty="0"/>
           </a:p>
         </p:txBody>
       </p:sp>
@@ -7489,7 +7577,7 @@
           <p:cNvSpPr txBox="1"/>
           <p:nvPr/>
         </p:nvSpPr>
-        <p:spPr bwMode="auto">
+        <p:spPr>
           <a:xfrm>
             <a:off x="777240" y="2057400"/>
             <a:ext cx="3474720" cy="2194560"/>
@@ -7510,17 +7598,16 @@
               </a:spcAft>
               <a:buSzPct val="100000"/>
               <a:buChar char="•"/>
-              <a:defRPr/>
-            </a:pPr>
-            <a:r>
-              <a:rPr lang="en-US" sz="1600">
+            </a:pPr>
+            <a:r>
+              <a:rPr lang="en-US" sz="1600" dirty="0">
                 <a:solidFill>
                   <a:schemeClr val="tx2"/>
                 </a:solidFill>
               </a:rPr>
               <a:t>Скорость на телефоне не измерена</a:t>
             </a:r>
-            <a:endParaRPr lang="en-US" sz="1600"/>
+            <a:endParaRPr lang="en-US" sz="1600" dirty="0"/>
           </a:p>
           <a:p>
             <a:pPr marL="342900" indent="-342900">
@@ -7529,17 +7616,16 @@
               </a:spcAft>
               <a:buSzPct val="100000"/>
               <a:buChar char="•"/>
-              <a:defRPr/>
-            </a:pPr>
-            <a:r>
-              <a:rPr lang="en-US" sz="1600">
+            </a:pPr>
+            <a:r>
+              <a:rPr lang="en-US" sz="1600" dirty="0">
                 <a:solidFill>
                   <a:schemeClr val="tx2"/>
                 </a:solidFill>
               </a:rPr>
               <a:t>Один оценщик, только английский</a:t>
             </a:r>
-            <a:endParaRPr lang="en-US" sz="1600"/>
+            <a:endParaRPr lang="en-US" sz="1600" dirty="0"/>
           </a:p>
           <a:p>
             <a:pPr marL="342900" indent="-342900">
@@ -7548,17 +7634,16 @@
               </a:spcAft>
               <a:buSzPct val="100000"/>
               <a:buChar char="•"/>
-              <a:defRPr/>
-            </a:pPr>
-            <a:r>
-              <a:rPr lang="en-US" sz="1600">
+            </a:pPr>
+            <a:r>
+              <a:rPr lang="en-US" sz="1600" dirty="0">
                 <a:solidFill>
                   <a:schemeClr val="tx2"/>
                 </a:solidFill>
               </a:rPr>
               <a:t>Нет OCR для сканов PDF</a:t>
             </a:r>
-            <a:endParaRPr lang="en-US" sz="1600"/>
+            <a:endParaRPr lang="en-US" sz="1600" dirty="0"/>
           </a:p>
           <a:p>
             <a:pPr marL="342900" indent="-342900">
@@ -7567,17 +7652,16 @@
               </a:spcAft>
               <a:buSzPct val="100000"/>
               <a:buChar char="•"/>
-              <a:defRPr/>
-            </a:pPr>
-            <a:r>
-              <a:rPr lang="en-US" sz="1600">
+            </a:pPr>
+            <a:r>
+              <a:rPr lang="en-US" sz="1600" dirty="0">
                 <a:solidFill>
                   <a:schemeClr val="tx2"/>
                 </a:solidFill>
               </a:rPr>
               <a:t>Бот работает, пока включён ПК</a:t>
             </a:r>
-            <a:endParaRPr lang="en-US" sz="1600"/>
+            <a:endParaRPr lang="en-US" sz="1600" dirty="0"/>
           </a:p>
         </p:txBody>
       </p:sp>
@@ -7587,10 +7671,10 @@
           <p:cNvSpPr/>
           <p:nvPr/>
         </p:nvSpPr>
-        <p:spPr bwMode="auto">
+        <p:spPr>
           <a:xfrm>
             <a:off x="4709160" y="1371600"/>
-            <a:ext cx="3886200" cy="3017519"/>
+            <a:ext cx="3886200" cy="3017520"/>
           </a:xfrm>
           <a:prstGeom prst="roundRect">
             <a:avLst>
@@ -7614,9 +7698,9 @@
           <p:cNvSpPr txBox="1"/>
           <p:nvPr/>
         </p:nvSpPr>
-        <p:spPr bwMode="auto">
-          <a:xfrm>
-            <a:off x="4937760" y="1508759"/>
+        <p:spPr>
+          <a:xfrm>
+            <a:off x="4937760" y="1508760"/>
             <a:ext cx="3474720" cy="457200"/>
           </a:xfrm>
           <a:prstGeom prst="rect">
@@ -7629,22 +7713,21 @@
           <a:bodyPr wrap="square" lIns="0" tIns="0" rIns="0" bIns="0" rtlCol="0" anchor="ctr"/>
           <a:lstStyle/>
           <a:p>
-            <a:pPr marL="0" indent="0">
+            <a:pPr indent="0" marL="0">
               <a:buNone/>
-              <a:defRPr/>
-            </a:pPr>
-            <a:r>
-              <a:rPr lang="en-US" sz="2000" b="1">
+            </a:pPr>
+            <a:r>
+              <a:rPr lang="en-US" sz="2000" b="1" dirty="0">
                 <a:solidFill>
                   <a:schemeClr val="accent2"/>
                 </a:solidFill>
-                <a:latin typeface="Cambria"/>
-                <a:ea typeface="Cambria"/>
-                <a:cs typeface="Cambria"/>
+                <a:latin typeface="Cambria" pitchFamily="34" charset="0"/>
+                <a:ea typeface="Cambria" pitchFamily="34" charset="-122"/>
+                <a:cs typeface="Cambria" pitchFamily="34" charset="-120"/>
               </a:rPr>
               <a:t>Дальше</a:t>
             </a:r>
-            <a:endParaRPr lang="en-US" sz="2000"/>
+            <a:endParaRPr lang="en-US" sz="2000" dirty="0"/>
           </a:p>
         </p:txBody>
       </p:sp>
@@ -7654,7 +7737,7 @@
           <p:cNvSpPr txBox="1"/>
           <p:nvPr/>
         </p:nvSpPr>
-        <p:spPr bwMode="auto">
+        <p:spPr>
           <a:xfrm>
             <a:off x="4937760" y="2057400"/>
             <a:ext cx="3474720" cy="2194560"/>
@@ -7675,17 +7758,16 @@
               </a:spcAft>
               <a:buSzPct val="100000"/>
               <a:buChar char="•"/>
-              <a:defRPr/>
-            </a:pPr>
-            <a:r>
-              <a:rPr lang="en-US" sz="1600">
+            </a:pPr>
+            <a:r>
+              <a:rPr lang="en-US" sz="1600" dirty="0">
                 <a:solidFill>
                   <a:schemeClr val="tx2"/>
                 </a:solidFill>
               </a:rPr>
               <a:t>Ускорить телефон (потоки WASM)</a:t>
             </a:r>
-            <a:endParaRPr lang="en-US" sz="1600"/>
+            <a:endParaRPr lang="en-US" sz="1600" dirty="0"/>
           </a:p>
           <a:p>
             <a:pPr marL="342900" indent="-342900">
@@ -7694,25 +7776,16 @@
               </a:spcAft>
               <a:buSzPct val="100000"/>
               <a:buChar char="•"/>
-              <a:defRPr/>
-            </a:pPr>
-            <a:r>
-              <a:rPr lang="ru-RU" sz="1600">
+            </a:pPr>
+            <a:r>
+              <a:rPr lang="en-US" sz="1600" dirty="0">
                 <a:solidFill>
                   <a:schemeClr val="tx2"/>
                 </a:solidFill>
               </a:rPr>
-              <a:t>Проигрывание</a:t>
-            </a:r>
-            <a:r>
-              <a:rPr lang="ru-RU" sz="1600">
-                <a:solidFill>
-                  <a:schemeClr val="tx2"/>
-                </a:solidFill>
-              </a:rPr>
-              <a:t> во время генерации</a:t>
-            </a:r>
-            <a:endParaRPr lang="en-US" sz="1600"/>
+              <a:t>Играть, пока генерируется</a:t>
+            </a:r>
+            <a:endParaRPr lang="en-US" sz="1600" dirty="0"/>
           </a:p>
           <a:p>
             <a:pPr marL="342900" indent="-342900">
@@ -7721,17 +7794,16 @@
               </a:spcAft>
               <a:buSzPct val="100000"/>
               <a:buChar char="•"/>
-              <a:defRPr/>
-            </a:pPr>
-            <a:r>
-              <a:rPr lang="en-US" sz="1600">
+            </a:pPr>
+            <a:r>
+              <a:rPr lang="en-US" sz="1600" dirty="0">
                 <a:solidFill>
                   <a:schemeClr val="tx2"/>
                 </a:solidFill>
               </a:rPr>
-              <a:t>Словарь сокращений («St.»)</a:t>
-            </a:r>
-            <a:endParaRPr lang="en-US" sz="1600"/>
+              <a:t>Другие сокращения (Ave., Rd.)</a:t>
+            </a:r>
+            <a:endParaRPr lang="en-US" sz="1600" dirty="0"/>
           </a:p>
           <a:p>
             <a:pPr marL="342900" indent="-342900">
@@ -7740,17 +7812,16 @@
               </a:spcAft>
               <a:buSzPct val="100000"/>
               <a:buChar char="•"/>
-              <a:defRPr/>
-            </a:pPr>
-            <a:r>
-              <a:rPr lang="en-US" sz="1600">
+            </a:pPr>
+            <a:r>
+              <a:rPr lang="en-US" sz="1600" dirty="0">
                 <a:solidFill>
                   <a:schemeClr val="tx2"/>
                 </a:solidFill>
               </a:rPr>
               <a:t>EPUB, DOCX, Opus-голосовые</a:t>
             </a:r>
-            <a:endParaRPr lang="en-US" sz="1600"/>
+            <a:endParaRPr lang="en-US" sz="1600" dirty="0"/>
           </a:p>
         </p:txBody>
       </p:sp>
@@ -7764,14 +7835,19 @@
             <p:ph type="sldNum" sz="quarter" idx="4294967295"/>
           </p:nvPr>
         </p:nvSpPr>
-        <p:spPr bwMode="auto">
-          <a:xfrm>
-            <a:off x="8321039" y="4754880"/>
+        <p:spPr>
+          <a:xfrm>
+            <a:off x="8321040" y="4754880"/>
             <a:ext cx="457200" cy="228600"/>
           </a:xfrm>
           <a:prstGeom prst="rect">
             <a:avLst/>
           </a:prstGeom>
+          <a:extLst>
+            <a:ext uri="{C572A759-6A51-4108-AA02-DFA0A04FC94B}">
+              <ma14:wrappingTextBoxFlag xmlns:ma14="http://schemas.microsoft.com/office/mac/drawingml/2011/main" val="0"/>
+            </a:ext>
+          </a:extLst>
         </p:spPr>
         <p:txBody>
           <a:bodyPr/>
@@ -7785,11 +7861,9 @@
             </a:lvl1pPr>
           </a:lstStyle>
           <a:p>
-            <a:pPr algn="l">
-              <a:defRPr/>
-            </a:pPr>
+            <a:pPr algn="l"/>
             <a:fld id="{F7021451-1387-4CA6-816F-3879F97B5CBC}" type="slidenum">
-              <a:rPr lang="en-US" b="0"/>
+              <a:rPr b="0" lang="en-US"/>
               <a:t>9</a:t>
             </a:fld>
             <a:endParaRPr lang="en-US"/>
@@ -7801,19 +7875,11 @@
   <p:clrMapOvr>
     <a:masterClrMapping/>
   </p:clrMapOvr>
-  <mc:AlternateContent xmlns:mc="http://schemas.openxmlformats.org/markup-compatibility/2006">
-    <mc:Choice xmlns:p159="http://schemas.microsoft.com/office/powerpoint/2015/09/main" xmlns:p14="http://schemas.microsoft.com/office/powerpoint/2010/main" Requires="p159">
-      <p:transition p14:dur="2000" advClick="1"/>
-    </mc:Choice>
-    <mc:Fallback>
-      <p:transition advClick="1"/>
-    </mc:Fallback>
-  </mc:AlternateContent>
 </p:sld>
 </file>
 
 <file path=ppt/theme/theme1.xml><?xml version="1.0" encoding="utf-8"?>
-<a:theme xmlns:a="http://schemas.openxmlformats.org/drawingml/2006/main" xmlns:r="http://schemas.openxmlformats.org/officeDocument/2006/relationships" xmlns:p="http://schemas.openxmlformats.org/presentationml/2006/main" name="Kokoro Reader">
+<a:theme xmlns:a="http://schemas.openxmlformats.org/drawingml/2006/main" name="Kokoro Reader">
   <a:themeElements>
     <a:clrScheme name="Kokoro Reader">
       <a:dk1>
@@ -7856,13 +7922,107 @@
     <a:fontScheme name="Kokoro Reader">
       <a:majorFont>
         <a:latin typeface="Cambria"/>
-        <a:ea typeface="Arial"/>
-        <a:cs typeface="Arial"/>
+        <a:ea typeface=""/>
+        <a:cs typeface=""/>
+        <a:font script="Jpan" typeface="游ゴシック Light"/>
+        <a:font script="Hang" typeface="맑은 고딕"/>
+        <a:font script="Hans" typeface="等线 Light"/>
+        <a:font script="Hant" typeface="新細明體"/>
+        <a:font script="Arab" typeface="Times New Roman"/>
+        <a:font script="Hebr" typeface="Times New Roman"/>
+        <a:font script="Thai" typeface="Angsana New"/>
+        <a:font script="Ethi" typeface="Nyala"/>
+        <a:font script="Beng" typeface="Vrinda"/>
+        <a:font script="Gujr" typeface="Shruti"/>
+        <a:font script="Khmr" typeface="MoolBoran"/>
+        <a:font script="Knda" typeface="Tunga"/>
+        <a:font script="Guru" typeface="Raavi"/>
+        <a:font script="Cans" typeface="Euphemia"/>
+        <a:font script="Cher" typeface="Plantagenet Cherokee"/>
+        <a:font script="Yiii" typeface="Microsoft Yi Baiti"/>
+        <a:font script="Tibt" typeface="Microsoft Himalaya"/>
+        <a:font script="Thaa" typeface="MV Boli"/>
+        <a:font script="Deva" typeface="Mangal"/>
+        <a:font script="Telu" typeface="Gautami"/>
+        <a:font script="Taml" typeface="Latha"/>
+        <a:font script="Syrc" typeface="Estrangelo Edessa"/>
+        <a:font script="Orya" typeface="Kalinga"/>
+        <a:font script="Mlym" typeface="Kartika"/>
+        <a:font script="Laoo" typeface="DokChampa"/>
+        <a:font script="Sinh" typeface="Iskoola Pota"/>
+        <a:font script="Mong" typeface="Mongolian Baiti"/>
+        <a:font script="Viet" typeface="Times New Roman"/>
+        <a:font script="Uigh" typeface="Microsoft Uighur"/>
+        <a:font script="Geor" typeface="Sylfaen"/>
+        <a:font script="Armn" typeface="Arial"/>
+        <a:font script="Bugi" typeface="Leelawadee UI"/>
+        <a:font script="Bopo" typeface="Microsoft JhengHei"/>
+        <a:font script="Java" typeface="Javanese Text"/>
+        <a:font script="Lisu" typeface="Segoe UI"/>
+        <a:font script="Mymr" typeface="Myanmar Text"/>
+        <a:font script="Nkoo" typeface="Ebrima"/>
+        <a:font script="Olck" typeface="Nirmala UI"/>
+        <a:font script="Osma" typeface="Ebrima"/>
+        <a:font script="Phag" typeface="Phagspa"/>
+        <a:font script="Syrn" typeface="Estrangelo Edessa"/>
+        <a:font script="Syrj" typeface="Estrangelo Edessa"/>
+        <a:font script="Syre" typeface="Estrangelo Edessa"/>
+        <a:font script="Sora" typeface="Nirmala UI"/>
+        <a:font script="Tale" typeface="Microsoft Tai Le"/>
+        <a:font script="Talu" typeface="Microsoft New Tai Lue"/>
+        <a:font script="Tfng" typeface="Ebrima"/>
       </a:majorFont>
       <a:minorFont>
         <a:latin typeface="Calibri"/>
-        <a:ea typeface="Arial"/>
-        <a:cs typeface="Arial"/>
+        <a:ea typeface=""/>
+        <a:cs typeface=""/>
+        <a:font script="Jpan" typeface="游ゴシック"/>
+        <a:font script="Hang" typeface="맑은 고딕"/>
+        <a:font script="Hans" typeface="等线"/>
+        <a:font script="Hant" typeface="新細明體"/>
+        <a:font script="Arab" typeface="Arial"/>
+        <a:font script="Hebr" typeface="Arial"/>
+        <a:font script="Thai" typeface="Cordia New"/>
+        <a:font script="Ethi" typeface="Nyala"/>
+        <a:font script="Beng" typeface="Vrinda"/>
+        <a:font script="Gujr" typeface="Shruti"/>
+        <a:font script="Khmr" typeface="DaunPenh"/>
+        <a:font script="Knda" typeface="Tunga"/>
+        <a:font script="Guru" typeface="Raavi"/>
+        <a:font script="Cans" typeface="Euphemia"/>
+        <a:font script="Cher" typeface="Plantagenet Cherokee"/>
+        <a:font script="Yiii" typeface="Microsoft Yi Baiti"/>
+        <a:font script="Tibt" typeface="Microsoft Himalaya"/>
+        <a:font script="Thaa" typeface="MV Boli"/>
+        <a:font script="Deva" typeface="Mangal"/>
+        <a:font script="Telu" typeface="Gautami"/>
+        <a:font script="Taml" typeface="Latha"/>
+        <a:font script="Syrc" typeface="Estrangelo Edessa"/>
+        <a:font script="Orya" typeface="Kalinga"/>
+        <a:font script="Mlym" typeface="Kartika"/>
+        <a:font script="Laoo" typeface="DokChampa"/>
+        <a:font script="Sinh" typeface="Iskoola Pota"/>
+        <a:font script="Mong" typeface="Mongolian Baiti"/>
+        <a:font script="Viet" typeface="Arial"/>
+        <a:font script="Uigh" typeface="Microsoft Uighur"/>
+        <a:font script="Geor" typeface="Sylfaen"/>
+        <a:font script="Armn" typeface="Arial"/>
+        <a:font script="Bugi" typeface="Leelawadee UI"/>
+        <a:font script="Bopo" typeface="Microsoft JhengHei"/>
+        <a:font script="Java" typeface="Javanese Text"/>
+        <a:font script="Lisu" typeface="Segoe UI"/>
+        <a:font script="Mymr" typeface="Myanmar Text"/>
+        <a:font script="Nkoo" typeface="Ebrima"/>
+        <a:font script="Olck" typeface="Nirmala UI"/>
+        <a:font script="Osma" typeface="Ebrima"/>
+        <a:font script="Phag" typeface="Phagspa"/>
+        <a:font script="Syrn" typeface="Estrangelo Edessa"/>
+        <a:font script="Syrj" typeface="Estrangelo Edessa"/>
+        <a:font script="Syre" typeface="Estrangelo Edessa"/>
+        <a:font script="Sora" typeface="Nirmala UI"/>
+        <a:font script="Tale" typeface="Microsoft Tai Le"/>
+        <a:font script="Talu" typeface="Microsoft New Tai Lue"/>
+        <a:font script="Tfng" typeface="Ebrima"/>
       </a:minorFont>
     </a:fontScheme>
     <a:fmtScheme name="Office">
@@ -7870,7 +8030,7 @@
         <a:solidFill>
           <a:schemeClr val="phClr"/>
         </a:solidFill>
-        <a:gradFill>
+        <a:gradFill rotWithShape="1">
           <a:gsLst>
             <a:gs pos="0">
               <a:schemeClr val="phClr">
@@ -7896,7 +8056,7 @@
           </a:gsLst>
           <a:lin ang="5400000" scaled="0"/>
         </a:gradFill>
-        <a:gradFill>
+        <a:gradFill rotWithShape="1">
           <a:gsLst>
             <a:gs pos="0">
               <a:schemeClr val="phClr">
@@ -7948,28 +8108,16 @@
       </a:lnStyleLst>
       <a:effectStyleLst>
         <a:effectStyle>
-          <a:effectLst>
-            <a:outerShdw blurRad="40000" dist="20000" dir="5400000" rotWithShape="0">
-              <a:srgbClr val="000000">
-                <a:alpha val="38000"/>
-              </a:srgbClr>
-            </a:outerShdw>
-          </a:effectLst>
+          <a:effectLst/>
+        </a:effectStyle>
+        <a:effectStyle>
+          <a:effectLst/>
         </a:effectStyle>
         <a:effectStyle>
           <a:effectLst>
-            <a:outerShdw blurRad="40000" dist="23000" dir="5400000" rotWithShape="0">
+            <a:outerShdw blurRad="57150" dist="19050" dir="5400000" algn="ctr" rotWithShape="0">
               <a:srgbClr val="000000">
-                <a:alpha val="35000"/>
-              </a:srgbClr>
-            </a:outerShdw>
-          </a:effectLst>
-        </a:effectStyle>
-        <a:effectStyle>
-          <a:effectLst>
-            <a:outerShdw blurRad="40000" dist="23000" dir="5400000" rotWithShape="0">
-              <a:srgbClr val="000000">
-                <a:alpha val="35000"/>
+                <a:alpha val="63000"/>
               </a:srgbClr>
             </a:outerShdw>
           </a:effectLst>
@@ -7985,7 +8133,7 @@
             <a:satMod val="170000"/>
           </a:schemeClr>
         </a:solidFill>
-        <a:gradFill>
+        <a:gradFill rotWithShape="1">
           <a:gsLst>
             <a:gs pos="0">
               <a:schemeClr val="phClr">
@@ -8016,5 +8164,11 @@
     </a:fmtScheme>
   </a:themeElements>
   <a:objectDefaults/>
+  <a:extraClrSchemeLst/>
+  <a:extLst>
+    <a:ext uri="{05A4C25C-085E-4340-85A3-A5531E510DB2}">
+      <thm15:themeFamily xmlns:thm15="http://schemas.microsoft.com/office/thememl/2012/main" name="Office Theme" id="{62F939B6-93AF-4DB8-9C6B-D6C7DFDC589F}" vid="{4A3C46E8-61CC-4603-A589-7422A47A8E4A}"/>
+    </a:ext>
+  </a:extLst>
 </a:theme>
 </file>